--- a/pitch/CestomClash228-Pitch.pptx
+++ b/pitch/CestomClash228-Pitch.pptx
@@ -1393,6 +1393,28 @@
         </p:nvSpPr>
         <p:spPr>
           <a:xfrm>
+            <a:off x="11002975" y="2377440"/>
+            <a:ext cx="3291840" cy="3291840"/>
+          </a:xfrm>
+          <a:prstGeom prst="ellipse">
+            <a:avLst/>
+          </a:prstGeom>
+          <a:solidFill>
+            <a:srgbClr val="7DD3E0">
+              <a:alpha val="8000"/>
+            </a:srgbClr>
+          </a:solidFill>
+          <a:ln/>
+        </p:spPr>
+      </p:sp>
+      <p:sp>
+        <p:nvSpPr>
+          <p:cNvPr id="3" name="Shape 1"/>
+          <p:cNvSpPr/>
+          <p:nvPr/>
+        </p:nvSpPr>
+        <p:spPr>
+          <a:xfrm>
             <a:off x="640080" y="502920"/>
             <a:ext cx="1005840" cy="54864"/>
           </a:xfrm>
@@ -1404,7 +1426,7 @@
       </p:sp>
       <p:sp>
         <p:nvSpPr>
-          <p:cNvPr id="3" name="Text 1"/>
+          <p:cNvPr id="4" name="Text 2"/>
           <p:cNvSpPr/>
           <p:nvPr/>
         </p:nvSpPr>
@@ -1443,7 +1465,7 @@
       </p:sp>
       <p:sp>
         <p:nvSpPr>
-          <p:cNvPr id="4" name="Text 2"/>
+          <p:cNvPr id="5" name="Text 3"/>
           <p:cNvSpPr/>
           <p:nvPr/>
         </p:nvSpPr>
@@ -1482,7 +1504,7 @@
       </p:sp>
       <p:sp>
         <p:nvSpPr>
-          <p:cNvPr id="5" name="Text 3"/>
+          <p:cNvPr id="6" name="Text 4"/>
           <p:cNvSpPr/>
           <p:nvPr/>
         </p:nvSpPr>
@@ -1521,7 +1543,7 @@
       </p:sp>
       <p:sp>
         <p:nvSpPr>
-          <p:cNvPr id="6" name="Shape 4"/>
+          <p:cNvPr id="7" name="Shape 5"/>
           <p:cNvSpPr/>
           <p:nvPr/>
         </p:nvSpPr>
@@ -1548,14 +1570,34 @@
       </p:sp>
       <p:sp>
         <p:nvSpPr>
-          <p:cNvPr id="7" name="Text 5"/>
-          <p:cNvSpPr/>
-          <p:nvPr/>
-        </p:nvSpPr>
-        <p:spPr>
-          <a:xfrm>
-            <a:off x="868680" y="2075688"/>
-            <a:ext cx="4769968" cy="365760"/>
+          <p:cNvPr id="8" name="Shape 6"/>
+          <p:cNvSpPr/>
+          <p:nvPr/>
+        </p:nvSpPr>
+        <p:spPr>
+          <a:xfrm>
+            <a:off x="5410048" y="2093976"/>
+            <a:ext cx="292608" cy="292608"/>
+          </a:xfrm>
+          <a:prstGeom prst="ellipse">
+            <a:avLst/>
+          </a:prstGeom>
+          <a:solidFill>
+            <a:srgbClr val="E5484D"/>
+          </a:solidFill>
+          <a:ln/>
+        </p:spPr>
+      </p:sp>
+      <p:sp>
+        <p:nvSpPr>
+          <p:cNvPr id="9" name="Text 7"/>
+          <p:cNvSpPr/>
+          <p:nvPr/>
+        </p:nvSpPr>
+        <p:spPr>
+          <a:xfrm>
+            <a:off x="5410048" y="2093976"/>
+            <a:ext cx="292608" cy="292608"/>
           </a:xfrm>
           <a:prstGeom prst="rect">
             <a:avLst/>
@@ -1567,18 +1609,57 @@
           <a:bodyPr wrap="square" rtlCol="0" anchor="ctr"/>
           <a:lstStyle/>
           <a:p>
-            <a:pPr indent="0" marL="0">
-              <a:buNone/>
-            </a:pPr>
-            <a:r>
-              <a:rPr lang="en-US" sz="1300" b="1" dirty="0">
-                <a:solidFill>
-                  <a:srgbClr val="E5484D"/>
+            <a:pPr algn="ctr" indent="0" marL="0">
+              <a:buNone/>
+            </a:pPr>
+            <a:r>
+              <a:rPr lang="en-US" sz="1408" b="1" dirty="0">
+                <a:solidFill>
+                  <a:srgbClr val="1A1D24"/>
                 </a:solidFill>
                 <a:latin typeface="Bahnschrift" pitchFamily="34" charset="0"/>
                 <a:ea typeface="Bahnschrift" pitchFamily="34" charset="-122"/>
                 <a:cs typeface="Bahnschrift" pitchFamily="34" charset="-120"/>
               </a:rPr>
+              <a:t>!</a:t>
+            </a:r>
+            <a:endParaRPr lang="en-US" sz="1408" dirty="0"/>
+          </a:p>
+        </p:txBody>
+      </p:sp>
+      <p:sp>
+        <p:nvSpPr>
+          <p:cNvPr id="10" name="Text 8"/>
+          <p:cNvSpPr/>
+          <p:nvPr/>
+        </p:nvSpPr>
+        <p:spPr>
+          <a:xfrm>
+            <a:off x="868680" y="2075688"/>
+            <a:ext cx="4769968" cy="365760"/>
+          </a:xfrm>
+          <a:prstGeom prst="rect">
+            <a:avLst/>
+          </a:prstGeom>
+          <a:noFill/>
+          <a:ln/>
+        </p:spPr>
+        <p:txBody>
+          <a:bodyPr wrap="square" rtlCol="0" anchor="ctr"/>
+          <a:lstStyle/>
+          <a:p>
+            <a:pPr indent="0" marL="0">
+              <a:buNone/>
+            </a:pPr>
+            <a:r>
+              <a:rPr lang="en-US" sz="1300" b="1" dirty="0">
+                <a:solidFill>
+                  <a:srgbClr val="E5484D"/>
+                </a:solidFill>
+                <a:latin typeface="Bahnschrift" pitchFamily="34" charset="0"/>
+                <a:ea typeface="Bahnschrift" pitchFamily="34" charset="-122"/>
+                <a:cs typeface="Bahnschrift" pitchFamily="34" charset="-120"/>
+              </a:rPr>
               <a:t>Information fragmentée</a:t>
             </a:r>
             <a:endParaRPr lang="en-US" sz="1300" dirty="0"/>
@@ -1587,7 +1668,7 @@
       </p:sp>
       <p:sp>
         <p:nvSpPr>
-          <p:cNvPr id="8" name="Text 6"/>
+          <p:cNvPr id="11" name="Text 9"/>
           <p:cNvSpPr/>
           <p:nvPr/>
         </p:nvSpPr>
@@ -1626,7 +1707,7 @@
       </p:sp>
       <p:sp>
         <p:nvSpPr>
-          <p:cNvPr id="9" name="Shape 7"/>
+          <p:cNvPr id="12" name="Shape 10"/>
           <p:cNvSpPr/>
           <p:nvPr/>
         </p:nvSpPr>
@@ -1653,14 +1734,34 @@
       </p:sp>
       <p:sp>
         <p:nvSpPr>
-          <p:cNvPr id="10" name="Text 8"/>
-          <p:cNvSpPr/>
-          <p:nvPr/>
-        </p:nvSpPr>
-        <p:spPr>
-          <a:xfrm>
-            <a:off x="6553048" y="2075688"/>
-            <a:ext cx="4769968" cy="365760"/>
+          <p:cNvPr id="13" name="Shape 11"/>
+          <p:cNvSpPr/>
+          <p:nvPr/>
+        </p:nvSpPr>
+        <p:spPr>
+          <a:xfrm>
+            <a:off x="11094415" y="2093976"/>
+            <a:ext cx="292608" cy="292608"/>
+          </a:xfrm>
+          <a:prstGeom prst="ellipse">
+            <a:avLst/>
+          </a:prstGeom>
+          <a:solidFill>
+            <a:srgbClr val="4CAF7D"/>
+          </a:solidFill>
+          <a:ln/>
+        </p:spPr>
+      </p:sp>
+      <p:sp>
+        <p:nvSpPr>
+          <p:cNvPr id="14" name="Text 12"/>
+          <p:cNvSpPr/>
+          <p:nvPr/>
+        </p:nvSpPr>
+        <p:spPr>
+          <a:xfrm>
+            <a:off x="11094415" y="2093976"/>
+            <a:ext cx="292608" cy="292608"/>
           </a:xfrm>
           <a:prstGeom prst="rect">
             <a:avLst/>
@@ -1672,18 +1773,57 @@
           <a:bodyPr wrap="square" rtlCol="0" anchor="ctr"/>
           <a:lstStyle/>
           <a:p>
-            <a:pPr indent="0" marL="0">
-              <a:buNone/>
-            </a:pPr>
-            <a:r>
-              <a:rPr lang="en-US" sz="1300" b="1" dirty="0">
-                <a:solidFill>
-                  <a:srgbClr val="4CAF7D"/>
+            <a:pPr algn="ctr" indent="0" marL="0">
+              <a:buNone/>
+            </a:pPr>
+            <a:r>
+              <a:rPr lang="en-US" sz="1408" b="1" dirty="0">
+                <a:solidFill>
+                  <a:srgbClr val="1A1D24"/>
                 </a:solidFill>
                 <a:latin typeface="Bahnschrift" pitchFamily="34" charset="0"/>
                 <a:ea typeface="Bahnschrift" pitchFamily="34" charset="-122"/>
                 <a:cs typeface="Bahnschrift" pitchFamily="34" charset="-120"/>
               </a:rPr>
+              <a:t>+</a:t>
+            </a:r>
+            <a:endParaRPr lang="en-US" sz="1408" dirty="0"/>
+          </a:p>
+        </p:txBody>
+      </p:sp>
+      <p:sp>
+        <p:nvSpPr>
+          <p:cNvPr id="15" name="Text 13"/>
+          <p:cNvSpPr/>
+          <p:nvPr/>
+        </p:nvSpPr>
+        <p:spPr>
+          <a:xfrm>
+            <a:off x="6553048" y="2075688"/>
+            <a:ext cx="4769968" cy="365760"/>
+          </a:xfrm>
+          <a:prstGeom prst="rect">
+            <a:avLst/>
+          </a:prstGeom>
+          <a:noFill/>
+          <a:ln/>
+        </p:spPr>
+        <p:txBody>
+          <a:bodyPr wrap="square" rtlCol="0" anchor="ctr"/>
+          <a:lstStyle/>
+          <a:p>
+            <a:pPr indent="0" marL="0">
+              <a:buNone/>
+            </a:pPr>
+            <a:r>
+              <a:rPr lang="en-US" sz="1300" b="1" dirty="0">
+                <a:solidFill>
+                  <a:srgbClr val="4CAF7D"/>
+                </a:solidFill>
+                <a:latin typeface="Bahnschrift" pitchFamily="34" charset="0"/>
+                <a:ea typeface="Bahnschrift" pitchFamily="34" charset="-122"/>
+                <a:cs typeface="Bahnschrift" pitchFamily="34" charset="-120"/>
+              </a:rPr>
               <a:t>Carte par ville + Pins</a:t>
             </a:r>
             <a:endParaRPr lang="en-US" sz="1300" dirty="0"/>
@@ -1692,7 +1832,7 @@
       </p:sp>
       <p:sp>
         <p:nvSpPr>
-          <p:cNvPr id="11" name="Text 9"/>
+          <p:cNvPr id="16" name="Text 14"/>
           <p:cNvSpPr/>
           <p:nvPr/>
         </p:nvSpPr>
@@ -1731,7 +1871,7 @@
       </p:sp>
       <p:sp>
         <p:nvSpPr>
-          <p:cNvPr id="12" name="Shape 10"/>
+          <p:cNvPr id="17" name="Shape 15"/>
           <p:cNvSpPr/>
           <p:nvPr/>
         </p:nvSpPr>
@@ -1758,14 +1898,34 @@
       </p:sp>
       <p:sp>
         <p:nvSpPr>
-          <p:cNvPr id="13" name="Text 11"/>
-          <p:cNvSpPr/>
-          <p:nvPr/>
-        </p:nvSpPr>
-        <p:spPr>
-          <a:xfrm>
-            <a:off x="868680" y="3675888"/>
-            <a:ext cx="4769968" cy="365760"/>
+          <p:cNvPr id="18" name="Shape 16"/>
+          <p:cNvSpPr/>
+          <p:nvPr/>
+        </p:nvSpPr>
+        <p:spPr>
+          <a:xfrm>
+            <a:off x="5410048" y="3694176"/>
+            <a:ext cx="292608" cy="292608"/>
+          </a:xfrm>
+          <a:prstGeom prst="ellipse">
+            <a:avLst/>
+          </a:prstGeom>
+          <a:solidFill>
+            <a:srgbClr val="E5484D"/>
+          </a:solidFill>
+          <a:ln/>
+        </p:spPr>
+      </p:sp>
+      <p:sp>
+        <p:nvSpPr>
+          <p:cNvPr id="19" name="Text 17"/>
+          <p:cNvSpPr/>
+          <p:nvPr/>
+        </p:nvSpPr>
+        <p:spPr>
+          <a:xfrm>
+            <a:off x="5410048" y="3694176"/>
+            <a:ext cx="292608" cy="292608"/>
           </a:xfrm>
           <a:prstGeom prst="rect">
             <a:avLst/>
@@ -1777,18 +1937,57 @@
           <a:bodyPr wrap="square" rtlCol="0" anchor="ctr"/>
           <a:lstStyle/>
           <a:p>
-            <a:pPr indent="0" marL="0">
-              <a:buNone/>
-            </a:pPr>
-            <a:r>
-              <a:rPr lang="en-US" sz="1300" b="1" dirty="0">
-                <a:solidFill>
-                  <a:srgbClr val="E5484D"/>
+            <a:pPr algn="ctr" indent="0" marL="0">
+              <a:buNone/>
+            </a:pPr>
+            <a:r>
+              <a:rPr lang="en-US" sz="1408" b="1" dirty="0">
+                <a:solidFill>
+                  <a:srgbClr val="1A1D24"/>
                 </a:solidFill>
                 <a:latin typeface="Bahnschrift" pitchFamily="34" charset="0"/>
                 <a:ea typeface="Bahnschrift" pitchFamily="34" charset="-122"/>
                 <a:cs typeface="Bahnschrift" pitchFamily="34" charset="-120"/>
               </a:rPr>
+              <a:t>!</a:t>
+            </a:r>
+            <a:endParaRPr lang="en-US" sz="1408" dirty="0"/>
+          </a:p>
+        </p:txBody>
+      </p:sp>
+      <p:sp>
+        <p:nvSpPr>
+          <p:cNvPr id="20" name="Text 18"/>
+          <p:cNvSpPr/>
+          <p:nvPr/>
+        </p:nvSpPr>
+        <p:spPr>
+          <a:xfrm>
+            <a:off x="868680" y="3675888"/>
+            <a:ext cx="4769968" cy="365760"/>
+          </a:xfrm>
+          <a:prstGeom prst="rect">
+            <a:avLst/>
+          </a:prstGeom>
+          <a:noFill/>
+          <a:ln/>
+        </p:spPr>
+        <p:txBody>
+          <a:bodyPr wrap="square" rtlCol="0" anchor="ctr"/>
+          <a:lstStyle/>
+          <a:p>
+            <a:pPr indent="0" marL="0">
+              <a:buNone/>
+            </a:pPr>
+            <a:r>
+              <a:rPr lang="en-US" sz="1300" b="1" dirty="0">
+                <a:solidFill>
+                  <a:srgbClr val="E5484D"/>
+                </a:solidFill>
+                <a:latin typeface="Bahnschrift" pitchFamily="34" charset="0"/>
+                <a:ea typeface="Bahnschrift" pitchFamily="34" charset="-122"/>
+                <a:cs typeface="Bahnschrift" pitchFamily="34" charset="-120"/>
+              </a:rPr>
               <a:t>Aide rendue non valorisée</a:t>
             </a:r>
             <a:endParaRPr lang="en-US" sz="1300" dirty="0"/>
@@ -1797,7 +1996,7 @@
       </p:sp>
       <p:sp>
         <p:nvSpPr>
-          <p:cNvPr id="14" name="Text 12"/>
+          <p:cNvPr id="21" name="Text 19"/>
           <p:cNvSpPr/>
           <p:nvPr/>
         </p:nvSpPr>
@@ -1836,7 +2035,7 @@
       </p:sp>
       <p:sp>
         <p:nvSpPr>
-          <p:cNvPr id="15" name="Shape 13"/>
+          <p:cNvPr id="22" name="Shape 20"/>
           <p:cNvSpPr/>
           <p:nvPr/>
         </p:nvSpPr>
@@ -1863,14 +2062,34 @@
       </p:sp>
       <p:sp>
         <p:nvSpPr>
-          <p:cNvPr id="16" name="Text 14"/>
-          <p:cNvSpPr/>
-          <p:nvPr/>
-        </p:nvSpPr>
-        <p:spPr>
-          <a:xfrm>
-            <a:off x="6553048" y="3675888"/>
-            <a:ext cx="4769968" cy="365760"/>
+          <p:cNvPr id="23" name="Shape 21"/>
+          <p:cNvSpPr/>
+          <p:nvPr/>
+        </p:nvSpPr>
+        <p:spPr>
+          <a:xfrm>
+            <a:off x="11094415" y="3694176"/>
+            <a:ext cx="292608" cy="292608"/>
+          </a:xfrm>
+          <a:prstGeom prst="ellipse">
+            <a:avLst/>
+          </a:prstGeom>
+          <a:solidFill>
+            <a:srgbClr val="4CAF7D"/>
+          </a:solidFill>
+          <a:ln/>
+        </p:spPr>
+      </p:sp>
+      <p:sp>
+        <p:nvSpPr>
+          <p:cNvPr id="24" name="Text 22"/>
+          <p:cNvSpPr/>
+          <p:nvPr/>
+        </p:nvSpPr>
+        <p:spPr>
+          <a:xfrm>
+            <a:off x="11094415" y="3694176"/>
+            <a:ext cx="292608" cy="292608"/>
           </a:xfrm>
           <a:prstGeom prst="rect">
             <a:avLst/>
@@ -1882,18 +2101,57 @@
           <a:bodyPr wrap="square" rtlCol="0" anchor="ctr"/>
           <a:lstStyle/>
           <a:p>
-            <a:pPr indent="0" marL="0">
-              <a:buNone/>
-            </a:pPr>
-            <a:r>
-              <a:rPr lang="en-US" sz="1300" b="1" dirty="0">
-                <a:solidFill>
-                  <a:srgbClr val="4CAF7D"/>
+            <a:pPr algn="ctr" indent="0" marL="0">
+              <a:buNone/>
+            </a:pPr>
+            <a:r>
+              <a:rPr lang="en-US" sz="1408" b="1" dirty="0">
+                <a:solidFill>
+                  <a:srgbClr val="1A1D24"/>
                 </a:solidFill>
                 <a:latin typeface="Bahnschrift" pitchFamily="34" charset="0"/>
                 <a:ea typeface="Bahnschrift" pitchFamily="34" charset="-122"/>
                 <a:cs typeface="Bahnschrift" pitchFamily="34" charset="-120"/>
               </a:rPr>
+              <a:t>+</a:t>
+            </a:r>
+            <a:endParaRPr lang="en-US" sz="1408" dirty="0"/>
+          </a:p>
+        </p:txBody>
+      </p:sp>
+      <p:sp>
+        <p:nvSpPr>
+          <p:cNvPr id="25" name="Text 23"/>
+          <p:cNvSpPr/>
+          <p:nvPr/>
+        </p:nvSpPr>
+        <p:spPr>
+          <a:xfrm>
+            <a:off x="6553048" y="3675888"/>
+            <a:ext cx="4769968" cy="365760"/>
+          </a:xfrm>
+          <a:prstGeom prst="rect">
+            <a:avLst/>
+          </a:prstGeom>
+          <a:noFill/>
+          <a:ln/>
+        </p:spPr>
+        <p:txBody>
+          <a:bodyPr wrap="square" rtlCol="0" anchor="ctr"/>
+          <a:lstStyle/>
+          <a:p>
+            <a:pPr indent="0" marL="0">
+              <a:buNone/>
+            </a:pPr>
+            <a:r>
+              <a:rPr lang="en-US" sz="1300" b="1" dirty="0">
+                <a:solidFill>
+                  <a:srgbClr val="4CAF7D"/>
+                </a:solidFill>
+                <a:latin typeface="Bahnschrift" pitchFamily="34" charset="0"/>
+                <a:ea typeface="Bahnschrift" pitchFamily="34" charset="-122"/>
+                <a:cs typeface="Bahnschrift" pitchFamily="34" charset="-120"/>
+              </a:rPr>
               <a:t>Bounties + Notation</a:t>
             </a:r>
             <a:endParaRPr lang="en-US" sz="1300" dirty="0"/>
@@ -1902,7 +2160,7 @@
       </p:sp>
       <p:sp>
         <p:nvSpPr>
-          <p:cNvPr id="17" name="Text 15"/>
+          <p:cNvPr id="26" name="Text 24"/>
           <p:cNvSpPr/>
           <p:nvPr/>
         </p:nvSpPr>
@@ -1941,7 +2199,7 @@
       </p:sp>
       <p:sp>
         <p:nvSpPr>
-          <p:cNvPr id="18" name="Shape 16"/>
+          <p:cNvPr id="27" name="Shape 25"/>
           <p:cNvSpPr/>
           <p:nvPr/>
         </p:nvSpPr>
@@ -1968,14 +2226,34 @@
       </p:sp>
       <p:sp>
         <p:nvSpPr>
-          <p:cNvPr id="19" name="Text 17"/>
-          <p:cNvSpPr/>
-          <p:nvPr/>
-        </p:nvSpPr>
-        <p:spPr>
-          <a:xfrm>
-            <a:off x="868680" y="5276088"/>
-            <a:ext cx="4769968" cy="365760"/>
+          <p:cNvPr id="28" name="Shape 26"/>
+          <p:cNvSpPr/>
+          <p:nvPr/>
+        </p:nvSpPr>
+        <p:spPr>
+          <a:xfrm>
+            <a:off x="5410048" y="5294376"/>
+            <a:ext cx="292608" cy="292608"/>
+          </a:xfrm>
+          <a:prstGeom prst="ellipse">
+            <a:avLst/>
+          </a:prstGeom>
+          <a:solidFill>
+            <a:srgbClr val="E5484D"/>
+          </a:solidFill>
+          <a:ln/>
+        </p:spPr>
+      </p:sp>
+      <p:sp>
+        <p:nvSpPr>
+          <p:cNvPr id="29" name="Text 27"/>
+          <p:cNvSpPr/>
+          <p:nvPr/>
+        </p:nvSpPr>
+        <p:spPr>
+          <a:xfrm>
+            <a:off x="5410048" y="5294376"/>
+            <a:ext cx="292608" cy="292608"/>
           </a:xfrm>
           <a:prstGeom prst="rect">
             <a:avLst/>
@@ -1987,18 +2265,57 @@
           <a:bodyPr wrap="square" rtlCol="0" anchor="ctr"/>
           <a:lstStyle/>
           <a:p>
-            <a:pPr indent="0" marL="0">
-              <a:buNone/>
-            </a:pPr>
-            <a:r>
-              <a:rPr lang="en-US" sz="1300" b="1" dirty="0">
-                <a:solidFill>
-                  <a:srgbClr val="E5484D"/>
+            <a:pPr algn="ctr" indent="0" marL="0">
+              <a:buNone/>
+            </a:pPr>
+            <a:r>
+              <a:rPr lang="en-US" sz="1408" b="1" dirty="0">
+                <a:solidFill>
+                  <a:srgbClr val="1A1D24"/>
                 </a:solidFill>
                 <a:latin typeface="Bahnschrift" pitchFamily="34" charset="0"/>
                 <a:ea typeface="Bahnschrift" pitchFamily="34" charset="-122"/>
                 <a:cs typeface="Bahnschrift" pitchFamily="34" charset="-120"/>
               </a:rPr>
+              <a:t>!</a:t>
+            </a:r>
+            <a:endParaRPr lang="en-US" sz="1408" dirty="0"/>
+          </a:p>
+        </p:txBody>
+      </p:sp>
+      <p:sp>
+        <p:nvSpPr>
+          <p:cNvPr id="30" name="Text 28"/>
+          <p:cNvSpPr/>
+          <p:nvPr/>
+        </p:nvSpPr>
+        <p:spPr>
+          <a:xfrm>
+            <a:off x="868680" y="5276088"/>
+            <a:ext cx="4769968" cy="365760"/>
+          </a:xfrm>
+          <a:prstGeom prst="rect">
+            <a:avLst/>
+          </a:prstGeom>
+          <a:noFill/>
+          <a:ln/>
+        </p:spPr>
+        <p:txBody>
+          <a:bodyPr wrap="square" rtlCol="0" anchor="ctr"/>
+          <a:lstStyle/>
+          <a:p>
+            <a:pPr indent="0" marL="0">
+              <a:buNone/>
+            </a:pPr>
+            <a:r>
+              <a:rPr lang="en-US" sz="1300" b="1" dirty="0">
+                <a:solidFill>
+                  <a:srgbClr val="E5484D"/>
+                </a:solidFill>
+                <a:latin typeface="Bahnschrift" pitchFamily="34" charset="0"/>
+                <a:ea typeface="Bahnschrift" pitchFamily="34" charset="-122"/>
+                <a:cs typeface="Bahnschrift" pitchFamily="34" charset="-120"/>
+              </a:rPr>
               <a:t>Isolement à l'arrivée</a:t>
             </a:r>
             <a:endParaRPr lang="en-US" sz="1300" dirty="0"/>
@@ -2007,7 +2324,7 @@
       </p:sp>
       <p:sp>
         <p:nvSpPr>
-          <p:cNvPr id="20" name="Text 18"/>
+          <p:cNvPr id="31" name="Text 29"/>
           <p:cNvSpPr/>
           <p:nvPr/>
         </p:nvSpPr>
@@ -2046,7 +2363,7 @@
       </p:sp>
       <p:sp>
         <p:nvSpPr>
-          <p:cNvPr id="21" name="Shape 19"/>
+          <p:cNvPr id="32" name="Shape 30"/>
           <p:cNvSpPr/>
           <p:nvPr/>
         </p:nvSpPr>
@@ -2073,14 +2390,34 @@
       </p:sp>
       <p:sp>
         <p:nvSpPr>
-          <p:cNvPr id="22" name="Text 20"/>
-          <p:cNvSpPr/>
-          <p:nvPr/>
-        </p:nvSpPr>
-        <p:spPr>
-          <a:xfrm>
-            <a:off x="6553048" y="5276088"/>
-            <a:ext cx="4769968" cy="365760"/>
+          <p:cNvPr id="33" name="Shape 31"/>
+          <p:cNvSpPr/>
+          <p:nvPr/>
+        </p:nvSpPr>
+        <p:spPr>
+          <a:xfrm>
+            <a:off x="11094415" y="5294376"/>
+            <a:ext cx="292608" cy="292608"/>
+          </a:xfrm>
+          <a:prstGeom prst="ellipse">
+            <a:avLst/>
+          </a:prstGeom>
+          <a:solidFill>
+            <a:srgbClr val="4CAF7D"/>
+          </a:solidFill>
+          <a:ln/>
+        </p:spPr>
+      </p:sp>
+      <p:sp>
+        <p:nvSpPr>
+          <p:cNvPr id="34" name="Text 32"/>
+          <p:cNvSpPr/>
+          <p:nvPr/>
+        </p:nvSpPr>
+        <p:spPr>
+          <a:xfrm>
+            <a:off x="11094415" y="5294376"/>
+            <a:ext cx="292608" cy="292608"/>
           </a:xfrm>
           <a:prstGeom prst="rect">
             <a:avLst/>
@@ -2092,18 +2429,57 @@
           <a:bodyPr wrap="square" rtlCol="0" anchor="ctr"/>
           <a:lstStyle/>
           <a:p>
-            <a:pPr indent="0" marL="0">
-              <a:buNone/>
-            </a:pPr>
-            <a:r>
-              <a:rPr lang="en-US" sz="1300" b="1" dirty="0">
-                <a:solidFill>
-                  <a:srgbClr val="4CAF7D"/>
+            <a:pPr algn="ctr" indent="0" marL="0">
+              <a:buNone/>
+            </a:pPr>
+            <a:r>
+              <a:rPr lang="en-US" sz="1408" b="1" dirty="0">
+                <a:solidFill>
+                  <a:srgbClr val="1A1D24"/>
                 </a:solidFill>
                 <a:latin typeface="Bahnschrift" pitchFamily="34" charset="0"/>
                 <a:ea typeface="Bahnschrift" pitchFamily="34" charset="-122"/>
                 <a:cs typeface="Bahnschrift" pitchFamily="34" charset="-120"/>
               </a:rPr>
+              <a:t>+</a:t>
+            </a:r>
+            <a:endParaRPr lang="en-US" sz="1408" dirty="0"/>
+          </a:p>
+        </p:txBody>
+      </p:sp>
+      <p:sp>
+        <p:nvSpPr>
+          <p:cNvPr id="35" name="Text 33"/>
+          <p:cNvSpPr/>
+          <p:nvPr/>
+        </p:nvSpPr>
+        <p:spPr>
+          <a:xfrm>
+            <a:off x="6553048" y="5276088"/>
+            <a:ext cx="4769968" cy="365760"/>
+          </a:xfrm>
+          <a:prstGeom prst="rect">
+            <a:avLst/>
+          </a:prstGeom>
+          <a:noFill/>
+          <a:ln/>
+        </p:spPr>
+        <p:txBody>
+          <a:bodyPr wrap="square" rtlCol="0" anchor="ctr"/>
+          <a:lstStyle/>
+          <a:p>
+            <a:pPr indent="0" marL="0">
+              <a:buNone/>
+            </a:pPr>
+            <a:r>
+              <a:rPr lang="en-US" sz="1300" b="1" dirty="0">
+                <a:solidFill>
+                  <a:srgbClr val="4CAF7D"/>
+                </a:solidFill>
+                <a:latin typeface="Bahnschrift" pitchFamily="34" charset="0"/>
+                <a:ea typeface="Bahnschrift" pitchFamily="34" charset="-122"/>
+                <a:cs typeface="Bahnschrift" pitchFamily="34" charset="-120"/>
+              </a:rPr>
               <a:t>Ancrage CESTOM</a:t>
             </a:r>
             <a:endParaRPr lang="en-US" sz="1300" dirty="0"/>
@@ -2112,7 +2488,7 @@
       </p:sp>
       <p:sp>
         <p:nvSpPr>
-          <p:cNvPr id="23" name="Text 21"/>
+          <p:cNvPr id="36" name="Text 34"/>
           <p:cNvSpPr/>
           <p:nvPr/>
         </p:nvSpPr>
@@ -2151,7 +2527,7 @@
       </p:sp>
       <p:sp>
         <p:nvSpPr>
-          <p:cNvPr id="24" name="Text 22"/>
+          <p:cNvPr id="37" name="Text 35"/>
           <p:cNvSpPr/>
           <p:nvPr/>
         </p:nvSpPr>
@@ -2204,7 +2580,7 @@
       </p:sp>
       <p:sp>
         <p:nvSpPr>
-          <p:cNvPr id="25" name="Text 23"/>
+          <p:cNvPr id="38" name="Text 36"/>
           <p:cNvSpPr/>
           <p:nvPr/>
         </p:nvSpPr>
@@ -2429,14 +2805,73 @@
       </p:sp>
       <p:sp>
         <p:nvSpPr>
-          <p:cNvPr id="7" name="Text 5"/>
+          <p:cNvPr id="7" name="Shape 5"/>
+          <p:cNvSpPr/>
+          <p:nvPr/>
+        </p:nvSpPr>
+        <p:spPr>
+          <a:xfrm>
+            <a:off x="3765194" y="2084832"/>
+            <a:ext cx="274320" cy="274320"/>
+          </a:xfrm>
+          <a:prstGeom prst="ellipse">
+            <a:avLst/>
+          </a:prstGeom>
+          <a:solidFill>
+            <a:srgbClr val="F2C14E"/>
+          </a:solidFill>
+          <a:ln/>
+        </p:spPr>
+      </p:sp>
+      <p:sp>
+        <p:nvSpPr>
+          <p:cNvPr id="8" name="Text 6"/>
+          <p:cNvSpPr/>
+          <p:nvPr/>
+        </p:nvSpPr>
+        <p:spPr>
+          <a:xfrm>
+            <a:off x="3765194" y="2084832"/>
+            <a:ext cx="274320" cy="274320"/>
+          </a:xfrm>
+          <a:prstGeom prst="rect">
+            <a:avLst/>
+          </a:prstGeom>
+          <a:noFill/>
+          <a:ln/>
+        </p:spPr>
+        <p:txBody>
+          <a:bodyPr wrap="square" rtlCol="0" anchor="ctr"/>
+          <a:lstStyle/>
+          <a:p>
+            <a:pPr algn="ctr" indent="0" marL="0">
+              <a:buNone/>
+            </a:pPr>
+            <a:r>
+              <a:rPr lang="en-US" sz="1320" b="1" dirty="0">
+                <a:solidFill>
+                  <a:srgbClr val="1A1D24"/>
+                </a:solidFill>
+                <a:latin typeface="Bahnschrift" pitchFamily="34" charset="0"/>
+                <a:ea typeface="Bahnschrift" pitchFamily="34" charset="-122"/>
+                <a:cs typeface="Bahnschrift" pitchFamily="34" charset="-120"/>
+              </a:rPr>
+              <a:t>1</a:t>
+            </a:r>
+            <a:endParaRPr lang="en-US" sz="1320" dirty="0"/>
+          </a:p>
+        </p:txBody>
+      </p:sp>
+      <p:sp>
+        <p:nvSpPr>
+          <p:cNvPr id="9" name="Text 7"/>
           <p:cNvSpPr/>
           <p:nvPr/>
         </p:nvSpPr>
         <p:spPr>
           <a:xfrm>
             <a:off x="640080" y="2103120"/>
-            <a:ext cx="3454298" cy="274320"/>
+            <a:ext cx="3088538" cy="274320"/>
           </a:xfrm>
           <a:prstGeom prst="rect">
             <a:avLst/>
@@ -2468,7 +2903,7 @@
       </p:sp>
       <p:sp>
         <p:nvSpPr>
-          <p:cNvPr id="8" name="Text 6"/>
+          <p:cNvPr id="10" name="Text 8"/>
           <p:cNvSpPr/>
           <p:nvPr/>
         </p:nvSpPr>
@@ -2507,14 +2942,14 @@
       </p:sp>
       <p:sp>
         <p:nvSpPr>
-          <p:cNvPr id="9" name="Text 7"/>
+          <p:cNvPr id="11" name="Text 9"/>
           <p:cNvSpPr/>
           <p:nvPr/>
         </p:nvSpPr>
         <p:spPr>
           <a:xfrm>
             <a:off x="640080" y="3017520"/>
-            <a:ext cx="3454298" cy="1645920"/>
+            <a:ext cx="3454298" cy="1554480"/>
           </a:xfrm>
           <a:prstGeom prst="rect">
             <a:avLst/>
@@ -2549,7 +2984,7 @@
       </p:sp>
       <p:sp>
         <p:nvSpPr>
-          <p:cNvPr id="10" name="Shape 8"/>
+          <p:cNvPr id="12" name="Shape 10"/>
           <p:cNvSpPr/>
           <p:nvPr/>
         </p:nvSpPr>
@@ -2569,14 +3004,73 @@
       </p:sp>
       <p:sp>
         <p:nvSpPr>
-          <p:cNvPr id="11" name="Text 9"/>
+          <p:cNvPr id="13" name="Shape 11"/>
+          <p:cNvSpPr/>
+          <p:nvPr/>
+        </p:nvSpPr>
+        <p:spPr>
+          <a:xfrm>
+            <a:off x="7493813" y="2084832"/>
+            <a:ext cx="274320" cy="274320"/>
+          </a:xfrm>
+          <a:prstGeom prst="ellipse">
+            <a:avLst/>
+          </a:prstGeom>
+          <a:solidFill>
+            <a:srgbClr val="7DD3E0"/>
+          </a:solidFill>
+          <a:ln/>
+        </p:spPr>
+      </p:sp>
+      <p:sp>
+        <p:nvSpPr>
+          <p:cNvPr id="14" name="Text 12"/>
+          <p:cNvSpPr/>
+          <p:nvPr/>
+        </p:nvSpPr>
+        <p:spPr>
+          <a:xfrm>
+            <a:off x="7493813" y="2084832"/>
+            <a:ext cx="274320" cy="274320"/>
+          </a:xfrm>
+          <a:prstGeom prst="rect">
+            <a:avLst/>
+          </a:prstGeom>
+          <a:noFill/>
+          <a:ln/>
+        </p:spPr>
+        <p:txBody>
+          <a:bodyPr wrap="square" rtlCol="0" anchor="ctr"/>
+          <a:lstStyle/>
+          <a:p>
+            <a:pPr algn="ctr" indent="0" marL="0">
+              <a:buNone/>
+            </a:pPr>
+            <a:r>
+              <a:rPr lang="en-US" sz="1320" b="1" dirty="0">
+                <a:solidFill>
+                  <a:srgbClr val="1A1D24"/>
+                </a:solidFill>
+                <a:latin typeface="Bahnschrift" pitchFamily="34" charset="0"/>
+                <a:ea typeface="Bahnschrift" pitchFamily="34" charset="-122"/>
+                <a:cs typeface="Bahnschrift" pitchFamily="34" charset="-120"/>
+              </a:rPr>
+              <a:t>2</a:t>
+            </a:r>
+            <a:endParaRPr lang="en-US" sz="1320" dirty="0"/>
+          </a:p>
+        </p:txBody>
+      </p:sp>
+      <p:sp>
+        <p:nvSpPr>
+          <p:cNvPr id="15" name="Text 13"/>
           <p:cNvSpPr/>
           <p:nvPr/>
         </p:nvSpPr>
         <p:spPr>
           <a:xfrm>
             <a:off x="4368698" y="2103120"/>
-            <a:ext cx="3454298" cy="274320"/>
+            <a:ext cx="3088538" cy="274320"/>
           </a:xfrm>
           <a:prstGeom prst="rect">
             <a:avLst/>
@@ -2608,7 +3102,7 @@
       </p:sp>
       <p:sp>
         <p:nvSpPr>
-          <p:cNvPr id="12" name="Text 10"/>
+          <p:cNvPr id="16" name="Text 14"/>
           <p:cNvSpPr/>
           <p:nvPr/>
         </p:nvSpPr>
@@ -2647,14 +3141,14 @@
       </p:sp>
       <p:sp>
         <p:nvSpPr>
-          <p:cNvPr id="13" name="Text 11"/>
+          <p:cNvPr id="17" name="Text 15"/>
           <p:cNvSpPr/>
           <p:nvPr/>
         </p:nvSpPr>
         <p:spPr>
           <a:xfrm>
             <a:off x="4368698" y="3017520"/>
-            <a:ext cx="3454298" cy="1645920"/>
+            <a:ext cx="3454298" cy="1554480"/>
           </a:xfrm>
           <a:prstGeom prst="rect">
             <a:avLst/>
@@ -2689,7 +3183,7 @@
       </p:sp>
       <p:sp>
         <p:nvSpPr>
-          <p:cNvPr id="14" name="Shape 12"/>
+          <p:cNvPr id="18" name="Shape 16"/>
           <p:cNvSpPr/>
           <p:nvPr/>
         </p:nvSpPr>
@@ -2709,14 +3203,73 @@
       </p:sp>
       <p:sp>
         <p:nvSpPr>
-          <p:cNvPr id="15" name="Text 13"/>
+          <p:cNvPr id="19" name="Shape 17"/>
+          <p:cNvSpPr/>
+          <p:nvPr/>
+        </p:nvSpPr>
+        <p:spPr>
+          <a:xfrm>
+            <a:off x="11222431" y="2084832"/>
+            <a:ext cx="274320" cy="274320"/>
+          </a:xfrm>
+          <a:prstGeom prst="ellipse">
+            <a:avLst/>
+          </a:prstGeom>
+          <a:solidFill>
+            <a:srgbClr val="4CAF7D"/>
+          </a:solidFill>
+          <a:ln/>
+        </p:spPr>
+      </p:sp>
+      <p:sp>
+        <p:nvSpPr>
+          <p:cNvPr id="20" name="Text 18"/>
+          <p:cNvSpPr/>
+          <p:nvPr/>
+        </p:nvSpPr>
+        <p:spPr>
+          <a:xfrm>
+            <a:off x="11222431" y="2084832"/>
+            <a:ext cx="274320" cy="274320"/>
+          </a:xfrm>
+          <a:prstGeom prst="rect">
+            <a:avLst/>
+          </a:prstGeom>
+          <a:noFill/>
+          <a:ln/>
+        </p:spPr>
+        <p:txBody>
+          <a:bodyPr wrap="square" rtlCol="0" anchor="ctr"/>
+          <a:lstStyle/>
+          <a:p>
+            <a:pPr algn="ctr" indent="0" marL="0">
+              <a:buNone/>
+            </a:pPr>
+            <a:r>
+              <a:rPr lang="en-US" sz="1320" b="1" dirty="0">
+                <a:solidFill>
+                  <a:srgbClr val="1A1D24"/>
+                </a:solidFill>
+                <a:latin typeface="Bahnschrift" pitchFamily="34" charset="0"/>
+                <a:ea typeface="Bahnschrift" pitchFamily="34" charset="-122"/>
+                <a:cs typeface="Bahnschrift" pitchFamily="34" charset="-120"/>
+              </a:rPr>
+              <a:t>3</a:t>
+            </a:r>
+            <a:endParaRPr lang="en-US" sz="1320" dirty="0"/>
+          </a:p>
+        </p:txBody>
+      </p:sp>
+      <p:sp>
+        <p:nvSpPr>
+          <p:cNvPr id="21" name="Text 19"/>
           <p:cNvSpPr/>
           <p:nvPr/>
         </p:nvSpPr>
         <p:spPr>
           <a:xfrm>
             <a:off x="8097317" y="2103120"/>
-            <a:ext cx="3454298" cy="274320"/>
+            <a:ext cx="3088538" cy="274320"/>
           </a:xfrm>
           <a:prstGeom prst="rect">
             <a:avLst/>
@@ -2748,7 +3301,7 @@
       </p:sp>
       <p:sp>
         <p:nvSpPr>
-          <p:cNvPr id="16" name="Text 14"/>
+          <p:cNvPr id="22" name="Text 20"/>
           <p:cNvSpPr/>
           <p:nvPr/>
         </p:nvSpPr>
@@ -2787,14 +3340,14 @@
       </p:sp>
       <p:sp>
         <p:nvSpPr>
-          <p:cNvPr id="17" name="Text 15"/>
+          <p:cNvPr id="23" name="Text 21"/>
           <p:cNvSpPr/>
           <p:nvPr/>
         </p:nvSpPr>
         <p:spPr>
           <a:xfrm>
             <a:off x="8097317" y="3017520"/>
-            <a:ext cx="3454298" cy="1645920"/>
+            <a:ext cx="3454298" cy="1554480"/>
           </a:xfrm>
           <a:prstGeom prst="rect">
             <a:avLst/>
@@ -2829,18 +3382,18 @@
       </p:sp>
       <p:sp>
         <p:nvSpPr>
-          <p:cNvPr id="18" name="Shape 16"/>
-          <p:cNvSpPr/>
-          <p:nvPr/>
-        </p:nvSpPr>
-        <p:spPr>
-          <a:xfrm>
-            <a:off x="640080" y="5029200"/>
-            <a:ext cx="10911535" cy="1051560"/>
+          <p:cNvPr id="24" name="Shape 22"/>
+          <p:cNvSpPr/>
+          <p:nvPr/>
+        </p:nvSpPr>
+        <p:spPr>
+          <a:xfrm>
+            <a:off x="640080" y="4892040"/>
+            <a:ext cx="3566160" cy="1417320"/>
           </a:xfrm>
           <a:prstGeom prst="roundRect">
             <a:avLst>
-              <a:gd name="adj" fmla="val 6957"/>
+              <a:gd name="adj" fmla="val 5161"/>
             </a:avLst>
           </a:prstGeom>
           <a:solidFill>
@@ -2856,14 +3409,39 @@
       </p:sp>
       <p:sp>
         <p:nvSpPr>
-          <p:cNvPr id="19" name="Text 17"/>
-          <p:cNvSpPr/>
-          <p:nvPr/>
-        </p:nvSpPr>
-        <p:spPr>
-          <a:xfrm>
-            <a:off x="914400" y="5029200"/>
-            <a:ext cx="10362895" cy="1051560"/>
+          <p:cNvPr id="25" name="Shape 23"/>
+          <p:cNvSpPr/>
+          <p:nvPr/>
+        </p:nvSpPr>
+        <p:spPr>
+          <a:xfrm>
+            <a:off x="1444715" y="5416067"/>
+            <a:ext cx="237744" cy="237744"/>
+          </a:xfrm>
+          <a:prstGeom prst="ellipse">
+            <a:avLst/>
+          </a:prstGeom>
+          <a:solidFill>
+            <a:srgbClr val="F2C14E"/>
+          </a:solidFill>
+          <a:ln w="9525">
+            <a:solidFill>
+              <a:srgbClr val="1A1D24"/>
+            </a:solidFill>
+            <a:prstDash val="solid"/>
+          </a:ln>
+        </p:spPr>
+      </p:sp>
+      <p:sp>
+        <p:nvSpPr>
+          <p:cNvPr id="26" name="Text 24"/>
+          <p:cNvSpPr/>
+          <p:nvPr/>
+        </p:nvSpPr>
+        <p:spPr>
+          <a:xfrm>
+            <a:off x="1060667" y="5672099"/>
+            <a:ext cx="1005840" cy="146304"/>
           </a:xfrm>
           <a:prstGeom prst="rect">
             <a:avLst/>
@@ -2875,31 +3453,75 @@
           <a:bodyPr wrap="square" rtlCol="0" anchor="ctr"/>
           <a:lstStyle/>
           <a:p>
-            <a:pPr indent="0" marL="0">
-              <a:lnSpc>
-                <a:spcPct val="130000"/>
-              </a:lnSpc>
-              <a:buNone/>
-            </a:pPr>
-            <a:r>
-              <a:rPr lang="en-US" sz="1250" b="1" dirty="0">
-                <a:solidFill>
-                  <a:srgbClr val="F4F1EC"/>
+            <a:pPr algn="ctr" indent="0" marL="0">
+              <a:buNone/>
+            </a:pPr>
+            <a:r>
+              <a:rPr lang="en-US" sz="650" dirty="0">
+                <a:solidFill>
+                  <a:srgbClr val="9CA3AF"/>
                 </a:solidFill>
                 <a:latin typeface="Segoe UI" pitchFamily="34" charset="0"/>
                 <a:ea typeface="Segoe UI" pitchFamily="34" charset="-122"/>
                 <a:cs typeface="Segoe UI" pitchFamily="34" charset="-120"/>
               </a:rPr>
-              <a:t>Marché ciblé : </a:t>
-            </a:r>
-            <a:pPr indent="0" marL="0">
-              <a:lnSpc>
-                <a:spcPct val="130000"/>
-              </a:lnSpc>
-              <a:buNone/>
-            </a:pPr>
-            <a:r>
-              <a:rPr lang="en-US" sz="1250" dirty="0">
+              <a:t>Rabat</a:t>
+            </a:r>
+            <a:endParaRPr lang="en-US" sz="650" dirty="0"/>
+          </a:p>
+        </p:txBody>
+      </p:sp>
+      <p:sp>
+        <p:nvSpPr>
+          <p:cNvPr id="27" name="Shape 25"/>
+          <p:cNvSpPr/>
+          <p:nvPr/>
+        </p:nvSpPr>
+        <p:spPr>
+          <a:xfrm>
+            <a:off x="1178863" y="5516679"/>
+            <a:ext cx="216984" cy="216984"/>
+          </a:xfrm>
+          <a:prstGeom prst="ellipse">
+            <a:avLst/>
+          </a:prstGeom>
+          <a:solidFill>
+            <a:srgbClr val="F2C14E"/>
+          </a:solidFill>
+          <a:ln w="9525">
+            <a:solidFill>
+              <a:srgbClr val="1A1D24"/>
+            </a:solidFill>
+            <a:prstDash val="solid"/>
+          </a:ln>
+        </p:spPr>
+      </p:sp>
+      <p:sp>
+        <p:nvSpPr>
+          <p:cNvPr id="28" name="Text 26"/>
+          <p:cNvSpPr/>
+          <p:nvPr/>
+        </p:nvSpPr>
+        <p:spPr>
+          <a:xfrm>
+            <a:off x="784435" y="5751951"/>
+            <a:ext cx="1005840" cy="146304"/>
+          </a:xfrm>
+          <a:prstGeom prst="rect">
+            <a:avLst/>
+          </a:prstGeom>
+          <a:noFill/>
+          <a:ln/>
+        </p:spPr>
+        <p:txBody>
+          <a:bodyPr wrap="square" rtlCol="0" anchor="ctr"/>
+          <a:lstStyle/>
+          <a:p>
+            <a:pPr algn="ctr" indent="0" marL="0">
+              <a:buNone/>
+            </a:pPr>
+            <a:r>
+              <a:rPr lang="en-US" sz="650" dirty="0">
                 <a:solidFill>
                   <a:srgbClr val="9CA3AF"/>
                 </a:solidFill>
@@ -2907,22 +3529,47 @@
                 <a:ea typeface="Segoe UI" pitchFamily="34" charset="-122"/>
                 <a:cs typeface="Segoe UI" pitchFamily="34" charset="-120"/>
               </a:rPr>
-              <a:t>communauté étudiante togolaise au Maroc, structurée autour de la CESTOM. [Chiffres à confirmer avant dépôt final — voir docs/BUSINESS_PLAN.md]</a:t>
-            </a:r>
-            <a:endParaRPr lang="en-US" sz="1250" dirty="0"/>
-          </a:p>
-        </p:txBody>
-      </p:sp>
-      <p:sp>
-        <p:nvSpPr>
-          <p:cNvPr id="20" name="Text 18"/>
-          <p:cNvSpPr/>
-          <p:nvPr/>
-        </p:nvSpPr>
-        <p:spPr>
-          <a:xfrm>
-            <a:off x="640080" y="6400800"/>
-            <a:ext cx="6400800" cy="274320"/>
+              <a:t>Casablanca</a:t>
+            </a:r>
+            <a:endParaRPr lang="en-US" sz="650" dirty="0"/>
+          </a:p>
+        </p:txBody>
+      </p:sp>
+      <p:sp>
+        <p:nvSpPr>
+          <p:cNvPr id="29" name="Shape 27"/>
+          <p:cNvSpPr/>
+          <p:nvPr/>
+        </p:nvSpPr>
+        <p:spPr>
+          <a:xfrm>
+            <a:off x="1061409" y="5935161"/>
+            <a:ext cx="163182" cy="163182"/>
+          </a:xfrm>
+          <a:prstGeom prst="ellipse">
+            <a:avLst/>
+          </a:prstGeom>
+          <a:solidFill>
+            <a:srgbClr val="F2C14E"/>
+          </a:solidFill>
+          <a:ln w="9525">
+            <a:solidFill>
+              <a:srgbClr val="1A1D24"/>
+            </a:solidFill>
+            <a:prstDash val="solid"/>
+          </a:ln>
+        </p:spPr>
+      </p:sp>
+      <p:sp>
+        <p:nvSpPr>
+          <p:cNvPr id="30" name="Text 28"/>
+          <p:cNvSpPr/>
+          <p:nvPr/>
+        </p:nvSpPr>
+        <p:spPr>
+          <a:xfrm>
+            <a:off x="640080" y="6116631"/>
+            <a:ext cx="1005840" cy="146304"/>
           </a:xfrm>
           <a:prstGeom prst="rect">
             <a:avLst/>
@@ -2934,32 +3581,345 @@
           <a:bodyPr wrap="square" rtlCol="0" anchor="ctr"/>
           <a:lstStyle/>
           <a:p>
+            <a:pPr algn="ctr" indent="0" marL="0">
+              <a:buNone/>
+            </a:pPr>
+            <a:r>
+              <a:rPr lang="en-US" sz="650" dirty="0">
+                <a:solidFill>
+                  <a:srgbClr val="9CA3AF"/>
+                </a:solidFill>
+                <a:latin typeface="Segoe UI" pitchFamily="34" charset="0"/>
+                <a:ea typeface="Segoe UI" pitchFamily="34" charset="-122"/>
+                <a:cs typeface="Segoe UI" pitchFamily="34" charset="-120"/>
+              </a:rPr>
+              <a:t>Marrakech</a:t>
+            </a:r>
+            <a:endParaRPr lang="en-US" sz="650" dirty="0"/>
+          </a:p>
+        </p:txBody>
+      </p:sp>
+      <p:sp>
+        <p:nvSpPr>
+          <p:cNvPr id="31" name="Shape 29"/>
+          <p:cNvSpPr/>
+          <p:nvPr/>
+        </p:nvSpPr>
+        <p:spPr>
+          <a:xfrm>
+            <a:off x="2165425" y="5454774"/>
+            <a:ext cx="155452" cy="155452"/>
+          </a:xfrm>
+          <a:prstGeom prst="ellipse">
+            <a:avLst/>
+          </a:prstGeom>
+          <a:solidFill>
+            <a:srgbClr val="F2C14E"/>
+          </a:solidFill>
+          <a:ln w="9525">
+            <a:solidFill>
+              <a:srgbClr val="1A1D24"/>
+            </a:solidFill>
+            <a:prstDash val="solid"/>
+          </a:ln>
+        </p:spPr>
+      </p:sp>
+      <p:sp>
+        <p:nvSpPr>
+          <p:cNvPr id="32" name="Text 30"/>
+          <p:cNvSpPr/>
+          <p:nvPr/>
+        </p:nvSpPr>
+        <p:spPr>
+          <a:xfrm>
+            <a:off x="1740231" y="5628514"/>
+            <a:ext cx="1005840" cy="146304"/>
+          </a:xfrm>
+          <a:prstGeom prst="rect">
+            <a:avLst/>
+          </a:prstGeom>
+          <a:noFill/>
+          <a:ln/>
+        </p:spPr>
+        <p:txBody>
+          <a:bodyPr wrap="square" rtlCol="0" anchor="ctr"/>
+          <a:lstStyle/>
+          <a:p>
+            <a:pPr algn="ctr" indent="0" marL="0">
+              <a:buNone/>
+            </a:pPr>
+            <a:r>
+              <a:rPr lang="en-US" sz="650" dirty="0">
+                <a:solidFill>
+                  <a:srgbClr val="9CA3AF"/>
+                </a:solidFill>
+                <a:latin typeface="Segoe UI" pitchFamily="34" charset="0"/>
+                <a:ea typeface="Segoe UI" pitchFamily="34" charset="-122"/>
+                <a:cs typeface="Segoe UI" pitchFamily="34" charset="-120"/>
+              </a:rPr>
+              <a:t>Fès</a:t>
+            </a:r>
+            <a:endParaRPr lang="en-US" sz="650" dirty="0"/>
+          </a:p>
+        </p:txBody>
+      </p:sp>
+      <p:sp>
+        <p:nvSpPr>
+          <p:cNvPr id="33" name="Shape 31"/>
+          <p:cNvSpPr/>
+          <p:nvPr/>
+        </p:nvSpPr>
+        <p:spPr>
+          <a:xfrm>
+            <a:off x="1878987" y="5128144"/>
+            <a:ext cx="113007" cy="113007"/>
+          </a:xfrm>
+          <a:prstGeom prst="ellipse">
+            <a:avLst/>
+          </a:prstGeom>
+          <a:solidFill>
+            <a:srgbClr val="F2C14E"/>
+          </a:solidFill>
+          <a:ln w="9525">
+            <a:solidFill>
+              <a:srgbClr val="1A1D24"/>
+            </a:solidFill>
+            <a:prstDash val="solid"/>
+          </a:ln>
+        </p:spPr>
+      </p:sp>
+      <p:sp>
+        <p:nvSpPr>
+          <p:cNvPr id="34" name="Text 32"/>
+          <p:cNvSpPr/>
+          <p:nvPr/>
+        </p:nvSpPr>
+        <p:spPr>
+          <a:xfrm>
+            <a:off x="1432570" y="5259440"/>
+            <a:ext cx="1005840" cy="146304"/>
+          </a:xfrm>
+          <a:prstGeom prst="rect">
+            <a:avLst/>
+          </a:prstGeom>
+          <a:noFill/>
+          <a:ln/>
+        </p:spPr>
+        <p:txBody>
+          <a:bodyPr wrap="square" rtlCol="0" anchor="ctr"/>
+          <a:lstStyle/>
+          <a:p>
+            <a:pPr algn="ctr" indent="0" marL="0">
+              <a:buNone/>
+            </a:pPr>
+            <a:r>
+              <a:rPr lang="en-US" sz="650" dirty="0">
+                <a:solidFill>
+                  <a:srgbClr val="9CA3AF"/>
+                </a:solidFill>
+                <a:latin typeface="Segoe UI" pitchFamily="34" charset="0"/>
+                <a:ea typeface="Segoe UI" pitchFamily="34" charset="-122"/>
+                <a:cs typeface="Segoe UI" pitchFamily="34" charset="-120"/>
+              </a:rPr>
+              <a:t>Tanger</a:t>
+            </a:r>
+            <a:endParaRPr lang="en-US" sz="650" dirty="0"/>
+          </a:p>
+        </p:txBody>
+      </p:sp>
+      <p:sp>
+        <p:nvSpPr>
+          <p:cNvPr id="35" name="Shape 33"/>
+          <p:cNvSpPr/>
+          <p:nvPr/>
+        </p:nvSpPr>
+        <p:spPr>
+          <a:xfrm>
+            <a:off x="3332988" y="5350518"/>
+            <a:ext cx="100584" cy="100584"/>
+          </a:xfrm>
+          <a:prstGeom prst="ellipse">
+            <a:avLst/>
+          </a:prstGeom>
+          <a:solidFill>
+            <a:srgbClr val="F2C14E"/>
+          </a:solidFill>
+          <a:ln w="9525">
+            <a:solidFill>
+              <a:srgbClr val="1A1D24"/>
+            </a:solidFill>
+            <a:prstDash val="solid"/>
+          </a:ln>
+        </p:spPr>
+      </p:sp>
+      <p:sp>
+        <p:nvSpPr>
+          <p:cNvPr id="36" name="Text 34"/>
+          <p:cNvSpPr/>
+          <p:nvPr/>
+        </p:nvSpPr>
+        <p:spPr>
+          <a:xfrm>
+            <a:off x="2880360" y="5469390"/>
+            <a:ext cx="1005840" cy="146304"/>
+          </a:xfrm>
+          <a:prstGeom prst="rect">
+            <a:avLst/>
+          </a:prstGeom>
+          <a:noFill/>
+          <a:ln/>
+        </p:spPr>
+        <p:txBody>
+          <a:bodyPr wrap="square" rtlCol="0" anchor="ctr"/>
+          <a:lstStyle/>
+          <a:p>
+            <a:pPr algn="ctr" indent="0" marL="0">
+              <a:buNone/>
+            </a:pPr>
+            <a:r>
+              <a:rPr lang="en-US" sz="650" dirty="0">
+                <a:solidFill>
+                  <a:srgbClr val="9CA3AF"/>
+                </a:solidFill>
+                <a:latin typeface="Segoe UI" pitchFamily="34" charset="0"/>
+                <a:ea typeface="Segoe UI" pitchFamily="34" charset="-122"/>
+                <a:cs typeface="Segoe UI" pitchFamily="34" charset="-120"/>
+              </a:rPr>
+              <a:t>Oujda</a:t>
+            </a:r>
+            <a:endParaRPr lang="en-US" sz="650" dirty="0"/>
+          </a:p>
+        </p:txBody>
+      </p:sp>
+      <p:sp>
+        <p:nvSpPr>
+          <p:cNvPr id="37" name="Text 35"/>
+          <p:cNvSpPr/>
+          <p:nvPr/>
+        </p:nvSpPr>
+        <p:spPr>
+          <a:xfrm>
+            <a:off x="4480560" y="4892040"/>
+            <a:ext cx="7071055" cy="1417320"/>
+          </a:xfrm>
+          <a:prstGeom prst="rect">
+            <a:avLst/>
+          </a:prstGeom>
+          <a:noFill/>
+          <a:ln/>
+        </p:spPr>
+        <p:txBody>
+          <a:bodyPr wrap="square" rtlCol="0" anchor="ctr"/>
+          <a:lstStyle/>
+          <a:p>
             <a:pPr indent="0" marL="0">
-              <a:buNone/>
-            </a:pPr>
-            <a:r>
-              <a:rPr lang="en-US" sz="1000" b="1" spc="100" kern="0" dirty="0">
-                <a:solidFill>
-                  <a:srgbClr val="9CA3AF"/>
+              <a:lnSpc>
+                <a:spcPct val="115000"/>
+              </a:lnSpc>
+              <a:buNone/>
+            </a:pPr>
+            <a:r>
+              <a:rPr lang="en-US" sz="2600" b="1" dirty="0">
+                <a:solidFill>
+                  <a:srgbClr val="F2C14E"/>
                 </a:solidFill>
                 <a:latin typeface="Bahnschrift" pitchFamily="34" charset="0"/>
                 <a:ea typeface="Bahnschrift" pitchFamily="34" charset="-122"/>
                 <a:cs typeface="Bahnschrift" pitchFamily="34" charset="-120"/>
               </a:rPr>
-              <a:t>CESTOMCLASH228  </a:t>
-            </a:r>
+              <a:t>650</a:t>
+            </a:r>
+            <a:endParaRPr lang="en-US" sz="2600" dirty="0"/>
+          </a:p>
+          <a:p>
             <a:pPr indent="0" marL="0">
-              <a:buNone/>
-            </a:pPr>
-            <a:r>
-              <a:rPr lang="en-US" sz="1000" spc="100" kern="0" dirty="0">
-                <a:solidFill>
-                  <a:srgbClr val="9CA3AF"/>
+              <a:lnSpc>
+                <a:spcPct val="115000"/>
+              </a:lnSpc>
+              <a:buNone/>
+            </a:pPr>
+            <a:r>
+              <a:rPr lang="en-US" sz="1100" dirty="0">
+                <a:solidFill>
+                  <a:srgbClr val="F4F1EC"/>
                 </a:solidFill>
                 <a:latin typeface="Bahnschrift" pitchFamily="34" charset="0"/>
                 <a:ea typeface="Bahnschrift" pitchFamily="34" charset="-122"/>
                 <a:cs typeface="Bahnschrift" pitchFamily="34" charset="-120"/>
               </a:rPr>
+              <a:t>membres CESTOM, 6 villes</a:t>
+            </a:r>
+            <a:endParaRPr lang="en-US" sz="2600" dirty="0"/>
+          </a:p>
+          <a:p>
+            <a:pPr indent="0" marL="0">
+              <a:lnSpc>
+                <a:spcPct val="115000"/>
+              </a:lnSpc>
+              <a:buNone/>
+            </a:pPr>
+            <a:r>
+              <a:rPr lang="en-US" sz="900" dirty="0">
+                <a:solidFill>
+                  <a:srgbClr val="9CA3AF"/>
+                </a:solidFill>
+                <a:latin typeface="Bahnschrift" pitchFamily="34" charset="0"/>
+                <a:ea typeface="Bahnschrift" pitchFamily="34" charset="-122"/>
+                <a:cs typeface="Bahnschrift" pitchFamily="34" charset="-120"/>
+              </a:rPr>
+              <a:t>Source : cestom.org</a:t>
+            </a:r>
+            <a:endParaRPr lang="en-US" sz="2600" dirty="0"/>
+          </a:p>
+        </p:txBody>
+      </p:sp>
+      <p:sp>
+        <p:nvSpPr>
+          <p:cNvPr id="38" name="Text 36"/>
+          <p:cNvSpPr/>
+          <p:nvPr/>
+        </p:nvSpPr>
+        <p:spPr>
+          <a:xfrm>
+            <a:off x="640080" y="6400800"/>
+            <a:ext cx="6400800" cy="274320"/>
+          </a:xfrm>
+          <a:prstGeom prst="rect">
+            <a:avLst/>
+          </a:prstGeom>
+          <a:noFill/>
+          <a:ln/>
+        </p:spPr>
+        <p:txBody>
+          <a:bodyPr wrap="square" rtlCol="0" anchor="ctr"/>
+          <a:lstStyle/>
+          <a:p>
+            <a:pPr indent="0" marL="0">
+              <a:buNone/>
+            </a:pPr>
+            <a:r>
+              <a:rPr lang="en-US" sz="1000" b="1" spc="100" kern="0" dirty="0">
+                <a:solidFill>
+                  <a:srgbClr val="9CA3AF"/>
+                </a:solidFill>
+                <a:latin typeface="Bahnschrift" pitchFamily="34" charset="0"/>
+                <a:ea typeface="Bahnschrift" pitchFamily="34" charset="-122"/>
+                <a:cs typeface="Bahnschrift" pitchFamily="34" charset="-120"/>
+              </a:rPr>
+              <a:t>CESTOMCLASH228  </a:t>
+            </a:r>
+            <a:pPr indent="0" marL="0">
+              <a:buNone/>
+            </a:pPr>
+            <a:r>
+              <a:rPr lang="en-US" sz="1000" spc="100" kern="0" dirty="0">
+                <a:solidFill>
+                  <a:srgbClr val="9CA3AF"/>
+                </a:solidFill>
+                <a:latin typeface="Bahnschrift" pitchFamily="34" charset="0"/>
+                <a:ea typeface="Bahnschrift" pitchFamily="34" charset="-122"/>
+                <a:cs typeface="Bahnschrift" pitchFamily="34" charset="-120"/>
+              </a:rPr>
               <a:t>· Explore. Partage. Level-up.</a:t>
             </a:r>
             <a:endParaRPr lang="en-US" sz="1000" dirty="0"/>
@@ -2968,7 +3928,7 @@
       </p:sp>
       <p:sp>
         <p:nvSpPr>
-          <p:cNvPr id="21" name="Text 19"/>
+          <p:cNvPr id="39" name="Text 37"/>
           <p:cNvSpPr/>
           <p:nvPr/>
         </p:nvSpPr>
@@ -3045,6 +4005,28 @@
         </p:nvSpPr>
         <p:spPr>
           <a:xfrm>
+            <a:off x="11002975" y="2377440"/>
+            <a:ext cx="3291840" cy="3291840"/>
+          </a:xfrm>
+          <a:prstGeom prst="ellipse">
+            <a:avLst/>
+          </a:prstGeom>
+          <a:solidFill>
+            <a:srgbClr val="F2C14E">
+              <a:alpha val="8000"/>
+            </a:srgbClr>
+          </a:solidFill>
+          <a:ln/>
+        </p:spPr>
+      </p:sp>
+      <p:sp>
+        <p:nvSpPr>
+          <p:cNvPr id="3" name="Shape 1"/>
+          <p:cNvSpPr/>
+          <p:nvPr/>
+        </p:nvSpPr>
+        <p:spPr>
+          <a:xfrm>
             <a:off x="640080" y="502920"/>
             <a:ext cx="1005840" cy="54864"/>
           </a:xfrm>
@@ -3056,7 +4038,7 @@
       </p:sp>
       <p:sp>
         <p:nvSpPr>
-          <p:cNvPr id="3" name="Text 1"/>
+          <p:cNvPr id="4" name="Text 2"/>
           <p:cNvSpPr/>
           <p:nvPr/>
         </p:nvSpPr>
@@ -3095,7 +4077,7 @@
       </p:sp>
       <p:sp>
         <p:nvSpPr>
-          <p:cNvPr id="4" name="Text 2"/>
+          <p:cNvPr id="5" name="Text 3"/>
           <p:cNvSpPr/>
           <p:nvPr/>
         </p:nvSpPr>
@@ -3134,7 +4116,7 @@
       </p:sp>
       <p:sp>
         <p:nvSpPr>
-          <p:cNvPr id="5" name="Text 3"/>
+          <p:cNvPr id="6" name="Text 4"/>
           <p:cNvSpPr/>
           <p:nvPr/>
         </p:nvSpPr>
@@ -3240,7 +4222,7 @@
       </p:sp>
       <p:sp>
         <p:nvSpPr>
-          <p:cNvPr id="6" name="Shape 4"/>
+          <p:cNvPr id="7" name="Shape 5"/>
           <p:cNvSpPr/>
           <p:nvPr/>
         </p:nvSpPr>
@@ -3267,7 +4249,7 @@
       </p:sp>
       <p:sp>
         <p:nvSpPr>
-          <p:cNvPr id="7" name="Text 5"/>
+          <p:cNvPr id="8" name="Text 6"/>
           <p:cNvSpPr/>
           <p:nvPr/>
         </p:nvSpPr>
@@ -3326,7 +4308,7 @@
       </p:sp>
       <p:sp>
         <p:nvSpPr>
-          <p:cNvPr id="8" name="Text 6"/>
+          <p:cNvPr id="9" name="Text 7"/>
           <p:cNvSpPr/>
           <p:nvPr/>
         </p:nvSpPr>
@@ -3365,7 +4347,7 @@
       </p:sp>
       <p:sp>
         <p:nvSpPr>
-          <p:cNvPr id="9" name="Text 7"/>
+          <p:cNvPr id="10" name="Text 8"/>
           <p:cNvSpPr/>
           <p:nvPr/>
         </p:nvSpPr>
@@ -3418,7 +4400,7 @@
       </p:sp>
       <p:sp>
         <p:nvSpPr>
-          <p:cNvPr id="10" name="Text 8"/>
+          <p:cNvPr id="11" name="Text 9"/>
           <p:cNvSpPr/>
           <p:nvPr/>
         </p:nvSpPr>

--- a/pitch/CestomClash228-Pitch.pptx
+++ b/pitch/CestomClash228-Pitch.pptx
@@ -3434,46 +3434,7 @@
       </p:sp>
       <p:sp>
         <p:nvSpPr>
-          <p:cNvPr id="26" name="Text 24"/>
-          <p:cNvSpPr/>
-          <p:nvPr/>
-        </p:nvSpPr>
-        <p:spPr>
-          <a:xfrm>
-            <a:off x="1060667" y="5672099"/>
-            <a:ext cx="1005840" cy="146304"/>
-          </a:xfrm>
-          <a:prstGeom prst="rect">
-            <a:avLst/>
-          </a:prstGeom>
-          <a:noFill/>
-          <a:ln/>
-        </p:spPr>
-        <p:txBody>
-          <a:bodyPr wrap="square" rtlCol="0" anchor="ctr"/>
-          <a:lstStyle/>
-          <a:p>
-            <a:pPr algn="ctr" indent="0" marL="0">
-              <a:buNone/>
-            </a:pPr>
-            <a:r>
-              <a:rPr lang="en-US" sz="650" dirty="0">
-                <a:solidFill>
-                  <a:srgbClr val="9CA3AF"/>
-                </a:solidFill>
-                <a:latin typeface="Segoe UI" pitchFamily="34" charset="0"/>
-                <a:ea typeface="Segoe UI" pitchFamily="34" charset="-122"/>
-                <a:cs typeface="Segoe UI" pitchFamily="34" charset="-120"/>
-              </a:rPr>
-              <a:t>Rabat</a:t>
-            </a:r>
-            <a:endParaRPr lang="en-US" sz="650" dirty="0"/>
-          </a:p>
-        </p:txBody>
-      </p:sp>
-      <p:sp>
-        <p:nvSpPr>
-          <p:cNvPr id="27" name="Shape 25"/>
+          <p:cNvPr id="26" name="Shape 24"/>
           <p:cNvSpPr/>
           <p:nvPr/>
         </p:nvSpPr>
@@ -3498,46 +3459,7 @@
       </p:sp>
       <p:sp>
         <p:nvSpPr>
-          <p:cNvPr id="28" name="Text 26"/>
-          <p:cNvSpPr/>
-          <p:nvPr/>
-        </p:nvSpPr>
-        <p:spPr>
-          <a:xfrm>
-            <a:off x="784435" y="5751951"/>
-            <a:ext cx="1005840" cy="146304"/>
-          </a:xfrm>
-          <a:prstGeom prst="rect">
-            <a:avLst/>
-          </a:prstGeom>
-          <a:noFill/>
-          <a:ln/>
-        </p:spPr>
-        <p:txBody>
-          <a:bodyPr wrap="square" rtlCol="0" anchor="ctr"/>
-          <a:lstStyle/>
-          <a:p>
-            <a:pPr algn="ctr" indent="0" marL="0">
-              <a:buNone/>
-            </a:pPr>
-            <a:r>
-              <a:rPr lang="en-US" sz="650" dirty="0">
-                <a:solidFill>
-                  <a:srgbClr val="9CA3AF"/>
-                </a:solidFill>
-                <a:latin typeface="Segoe UI" pitchFamily="34" charset="0"/>
-                <a:ea typeface="Segoe UI" pitchFamily="34" charset="-122"/>
-                <a:cs typeface="Segoe UI" pitchFamily="34" charset="-120"/>
-              </a:rPr>
-              <a:t>Casablanca</a:t>
-            </a:r>
-            <a:endParaRPr lang="en-US" sz="650" dirty="0"/>
-          </a:p>
-        </p:txBody>
-      </p:sp>
-      <p:sp>
-        <p:nvSpPr>
-          <p:cNvPr id="29" name="Shape 27"/>
+          <p:cNvPr id="27" name="Shape 25"/>
           <p:cNvSpPr/>
           <p:nvPr/>
         </p:nvSpPr>
@@ -3562,46 +3484,7 @@
       </p:sp>
       <p:sp>
         <p:nvSpPr>
-          <p:cNvPr id="30" name="Text 28"/>
-          <p:cNvSpPr/>
-          <p:nvPr/>
-        </p:nvSpPr>
-        <p:spPr>
-          <a:xfrm>
-            <a:off x="640080" y="6116631"/>
-            <a:ext cx="1005840" cy="146304"/>
-          </a:xfrm>
-          <a:prstGeom prst="rect">
-            <a:avLst/>
-          </a:prstGeom>
-          <a:noFill/>
-          <a:ln/>
-        </p:spPr>
-        <p:txBody>
-          <a:bodyPr wrap="square" rtlCol="0" anchor="ctr"/>
-          <a:lstStyle/>
-          <a:p>
-            <a:pPr algn="ctr" indent="0" marL="0">
-              <a:buNone/>
-            </a:pPr>
-            <a:r>
-              <a:rPr lang="en-US" sz="650" dirty="0">
-                <a:solidFill>
-                  <a:srgbClr val="9CA3AF"/>
-                </a:solidFill>
-                <a:latin typeface="Segoe UI" pitchFamily="34" charset="0"/>
-                <a:ea typeface="Segoe UI" pitchFamily="34" charset="-122"/>
-                <a:cs typeface="Segoe UI" pitchFamily="34" charset="-120"/>
-              </a:rPr>
-              <a:t>Marrakech</a:t>
-            </a:r>
-            <a:endParaRPr lang="en-US" sz="650" dirty="0"/>
-          </a:p>
-        </p:txBody>
-      </p:sp>
-      <p:sp>
-        <p:nvSpPr>
-          <p:cNvPr id="31" name="Shape 29"/>
+          <p:cNvPr id="28" name="Shape 26"/>
           <p:cNvSpPr/>
           <p:nvPr/>
         </p:nvSpPr>
@@ -3626,46 +3509,7 @@
       </p:sp>
       <p:sp>
         <p:nvSpPr>
-          <p:cNvPr id="32" name="Text 30"/>
-          <p:cNvSpPr/>
-          <p:nvPr/>
-        </p:nvSpPr>
-        <p:spPr>
-          <a:xfrm>
-            <a:off x="1740231" y="5628514"/>
-            <a:ext cx="1005840" cy="146304"/>
-          </a:xfrm>
-          <a:prstGeom prst="rect">
-            <a:avLst/>
-          </a:prstGeom>
-          <a:noFill/>
-          <a:ln/>
-        </p:spPr>
-        <p:txBody>
-          <a:bodyPr wrap="square" rtlCol="0" anchor="ctr"/>
-          <a:lstStyle/>
-          <a:p>
-            <a:pPr algn="ctr" indent="0" marL="0">
-              <a:buNone/>
-            </a:pPr>
-            <a:r>
-              <a:rPr lang="en-US" sz="650" dirty="0">
-                <a:solidFill>
-                  <a:srgbClr val="9CA3AF"/>
-                </a:solidFill>
-                <a:latin typeface="Segoe UI" pitchFamily="34" charset="0"/>
-                <a:ea typeface="Segoe UI" pitchFamily="34" charset="-122"/>
-                <a:cs typeface="Segoe UI" pitchFamily="34" charset="-120"/>
-              </a:rPr>
-              <a:t>Fès</a:t>
-            </a:r>
-            <a:endParaRPr lang="en-US" sz="650" dirty="0"/>
-          </a:p>
-        </p:txBody>
-      </p:sp>
-      <p:sp>
-        <p:nvSpPr>
-          <p:cNvPr id="33" name="Shape 31"/>
+          <p:cNvPr id="29" name="Shape 27"/>
           <p:cNvSpPr/>
           <p:nvPr/>
         </p:nvSpPr>
@@ -3690,46 +3534,7 @@
       </p:sp>
       <p:sp>
         <p:nvSpPr>
-          <p:cNvPr id="34" name="Text 32"/>
-          <p:cNvSpPr/>
-          <p:nvPr/>
-        </p:nvSpPr>
-        <p:spPr>
-          <a:xfrm>
-            <a:off x="1432570" y="5259440"/>
-            <a:ext cx="1005840" cy="146304"/>
-          </a:xfrm>
-          <a:prstGeom prst="rect">
-            <a:avLst/>
-          </a:prstGeom>
-          <a:noFill/>
-          <a:ln/>
-        </p:spPr>
-        <p:txBody>
-          <a:bodyPr wrap="square" rtlCol="0" anchor="ctr"/>
-          <a:lstStyle/>
-          <a:p>
-            <a:pPr algn="ctr" indent="0" marL="0">
-              <a:buNone/>
-            </a:pPr>
-            <a:r>
-              <a:rPr lang="en-US" sz="650" dirty="0">
-                <a:solidFill>
-                  <a:srgbClr val="9CA3AF"/>
-                </a:solidFill>
-                <a:latin typeface="Segoe UI" pitchFamily="34" charset="0"/>
-                <a:ea typeface="Segoe UI" pitchFamily="34" charset="-122"/>
-                <a:cs typeface="Segoe UI" pitchFamily="34" charset="-120"/>
-              </a:rPr>
-              <a:t>Tanger</a:t>
-            </a:r>
-            <a:endParaRPr lang="en-US" sz="650" dirty="0"/>
-          </a:p>
-        </p:txBody>
-      </p:sp>
-      <p:sp>
-        <p:nvSpPr>
-          <p:cNvPr id="35" name="Shape 33"/>
+          <p:cNvPr id="30" name="Shape 28"/>
           <p:cNvSpPr/>
           <p:nvPr/>
         </p:nvSpPr>
@@ -3754,46 +3559,7 @@
       </p:sp>
       <p:sp>
         <p:nvSpPr>
-          <p:cNvPr id="36" name="Text 34"/>
-          <p:cNvSpPr/>
-          <p:nvPr/>
-        </p:nvSpPr>
-        <p:spPr>
-          <a:xfrm>
-            <a:off x="2880360" y="5469390"/>
-            <a:ext cx="1005840" cy="146304"/>
-          </a:xfrm>
-          <a:prstGeom prst="rect">
-            <a:avLst/>
-          </a:prstGeom>
-          <a:noFill/>
-          <a:ln/>
-        </p:spPr>
-        <p:txBody>
-          <a:bodyPr wrap="square" rtlCol="0" anchor="ctr"/>
-          <a:lstStyle/>
-          <a:p>
-            <a:pPr algn="ctr" indent="0" marL="0">
-              <a:buNone/>
-            </a:pPr>
-            <a:r>
-              <a:rPr lang="en-US" sz="650" dirty="0">
-                <a:solidFill>
-                  <a:srgbClr val="9CA3AF"/>
-                </a:solidFill>
-                <a:latin typeface="Segoe UI" pitchFamily="34" charset="0"/>
-                <a:ea typeface="Segoe UI" pitchFamily="34" charset="-122"/>
-                <a:cs typeface="Segoe UI" pitchFamily="34" charset="-120"/>
-              </a:rPr>
-              <a:t>Oujda</a:t>
-            </a:r>
-            <a:endParaRPr lang="en-US" sz="650" dirty="0"/>
-          </a:p>
-        </p:txBody>
-      </p:sp>
-      <p:sp>
-        <p:nvSpPr>
-          <p:cNvPr id="37" name="Text 35"/>
+          <p:cNvPr id="31" name="Text 29"/>
           <p:cNvSpPr/>
           <p:nvPr/>
         </p:nvSpPr>
@@ -3859,7 +3625,7 @@
               <a:buNone/>
             </a:pPr>
             <a:r>
-              <a:rPr lang="en-US" sz="900" dirty="0">
+              <a:rPr lang="en-US" sz="850" dirty="0">
                 <a:solidFill>
                   <a:srgbClr val="9CA3AF"/>
                 </a:solidFill>
@@ -3867,38 +3633,19 @@
                 <a:ea typeface="Bahnschrift" pitchFamily="34" charset="-122"/>
                 <a:cs typeface="Bahnschrift" pitchFamily="34" charset="-120"/>
               </a:rPr>
-              <a:t>Source : cestom.org</a:t>
+              <a:t>Rabat 220  ·  Casablanca 180  ·  Marrakech 95  ·  Fès 85  ·  Tanger 40  ·  Oujda 30</a:t>
             </a:r>
             <a:endParaRPr lang="en-US" sz="2600" dirty="0"/>
           </a:p>
-        </p:txBody>
-      </p:sp>
-      <p:sp>
-        <p:nvSpPr>
-          <p:cNvPr id="38" name="Text 36"/>
-          <p:cNvSpPr/>
-          <p:nvPr/>
-        </p:nvSpPr>
-        <p:spPr>
-          <a:xfrm>
-            <a:off x="640080" y="6400800"/>
-            <a:ext cx="6400800" cy="274320"/>
-          </a:xfrm>
-          <a:prstGeom prst="rect">
-            <a:avLst/>
-          </a:prstGeom>
-          <a:noFill/>
-          <a:ln/>
-        </p:spPr>
-        <p:txBody>
-          <a:bodyPr wrap="square" rtlCol="0" anchor="ctr"/>
-          <a:lstStyle/>
           <a:p>
             <a:pPr indent="0" marL="0">
-              <a:buNone/>
-            </a:pPr>
-            <a:r>
-              <a:rPr lang="en-US" sz="1000" b="1" spc="100" kern="0" dirty="0">
+              <a:lnSpc>
+                <a:spcPct val="115000"/>
+              </a:lnSpc>
+              <a:buNone/>
+            </a:pPr>
+            <a:r>
+              <a:rPr lang="en-US" sz="800" dirty="0">
                 <a:solidFill>
                   <a:srgbClr val="9CA3AF"/>
                 </a:solidFill>
@@ -3906,13 +3653,38 @@
                 <a:ea typeface="Bahnschrift" pitchFamily="34" charset="-122"/>
                 <a:cs typeface="Bahnschrift" pitchFamily="34" charset="-120"/>
               </a:rPr>
-              <a:t>CESTOMCLASH228  </a:t>
-            </a:r>
+              <a:t>Source : cestom.org</a:t>
+            </a:r>
+            <a:endParaRPr lang="en-US" sz="2600" dirty="0"/>
+          </a:p>
+        </p:txBody>
+      </p:sp>
+      <p:sp>
+        <p:nvSpPr>
+          <p:cNvPr id="32" name="Text 30"/>
+          <p:cNvSpPr/>
+          <p:nvPr/>
+        </p:nvSpPr>
+        <p:spPr>
+          <a:xfrm>
+            <a:off x="640080" y="6400800"/>
+            <a:ext cx="6400800" cy="274320"/>
+          </a:xfrm>
+          <a:prstGeom prst="rect">
+            <a:avLst/>
+          </a:prstGeom>
+          <a:noFill/>
+          <a:ln/>
+        </p:spPr>
+        <p:txBody>
+          <a:bodyPr wrap="square" rtlCol="0" anchor="ctr"/>
+          <a:lstStyle/>
+          <a:p>
             <a:pPr indent="0" marL="0">
               <a:buNone/>
             </a:pPr>
             <a:r>
-              <a:rPr lang="en-US" sz="1000" spc="100" kern="0" dirty="0">
+              <a:rPr lang="en-US" sz="1000" b="1" spc="100" kern="0" dirty="0">
                 <a:solidFill>
                   <a:srgbClr val="9CA3AF"/>
                 </a:solidFill>
@@ -3920,6 +3692,20 @@
                 <a:ea typeface="Bahnschrift" pitchFamily="34" charset="-122"/>
                 <a:cs typeface="Bahnschrift" pitchFamily="34" charset="-120"/>
               </a:rPr>
+              <a:t>CESTOMCLASH228  </a:t>
+            </a:r>
+            <a:pPr indent="0" marL="0">
+              <a:buNone/>
+            </a:pPr>
+            <a:r>
+              <a:rPr lang="en-US" sz="1000" spc="100" kern="0" dirty="0">
+                <a:solidFill>
+                  <a:srgbClr val="9CA3AF"/>
+                </a:solidFill>
+                <a:latin typeface="Bahnschrift" pitchFamily="34" charset="0"/>
+                <a:ea typeface="Bahnschrift" pitchFamily="34" charset="-122"/>
+                <a:cs typeface="Bahnschrift" pitchFamily="34" charset="-120"/>
+              </a:rPr>
               <a:t>· Explore. Partage. Level-up.</a:t>
             </a:r>
             <a:endParaRPr lang="en-US" sz="1000" dirty="0"/>
@@ -3928,7 +3714,7 @@
       </p:sp>
       <p:sp>
         <p:nvSpPr>
-          <p:cNvPr id="39" name="Text 37"/>
+          <p:cNvPr id="33" name="Text 31"/>
           <p:cNvSpPr/>
           <p:nvPr/>
         </p:nvSpPr>

--- a/pitch/CestomClash228-Pitch.pptx
+++ b/pitch/CestomClash228-Pitch.pptx
@@ -9,9 +9,10 @@
     <p:sldId id="257" r:id="rId3"/>
     <p:sldId id="258" r:id="rId4"/>
     <p:sldId id="259" r:id="rId5"/>
+    <p:sldId id="260" r:id="rId6"/>
   </p:sldIdLst>
   <p:notesMasterIdLst>
-    <p:notesMasterId r:id="rId6"/>
+    <p:notesMasterId r:id="rId7"/>
   </p:notesMasterIdLst>
   <p:sldSz cx="12191695" cy="6858000"/>
   <p:notesSz cx="6858000" cy="12191695"/>
@@ -811,6 +812,94 @@
 </p:notes>
 </file>
 
+<file path=ppt/notesSlides/notesSlide5.xml><?xml version="1.0" encoding="utf-8"?>
+<p:notes xmlns:a="http://schemas.openxmlformats.org/drawingml/2006/main" xmlns:r="http://schemas.openxmlformats.org/officeDocument/2006/relationships" xmlns:p="http://schemas.openxmlformats.org/presentationml/2006/main">
+  <p:cSld>
+    <p:spTree>
+      <p:nvGrpSpPr>
+        <p:cNvPr id="1" name=""/>
+        <p:cNvGrpSpPr/>
+        <p:nvPr/>
+      </p:nvGrpSpPr>
+      <p:grpSpPr>
+        <a:xfrm>
+          <a:off x="0" y="0"/>
+          <a:ext cx="0" cy="0"/>
+          <a:chOff x="0" y="0"/>
+          <a:chExt cx="0" cy="0"/>
+        </a:xfrm>
+      </p:grpSpPr>
+      <p:sp>
+        <p:nvSpPr>
+          <p:cNvPr id="2" name="Slide Image Placeholder 1"/>
+          <p:cNvSpPr>
+            <a:spLocks noGrp="1" noRot="1" noChangeAspect="1"/>
+          </p:cNvSpPr>
+          <p:nvPr>
+            <p:ph type="sldImg"/>
+          </p:nvPr>
+        </p:nvSpPr>
+        <p:spPr/>
+      </p:sp>
+      <p:sp>
+        <p:nvSpPr>
+          <p:cNvPr id="3" name="Notes Placeholder 2"/>
+          <p:cNvSpPr>
+            <a:spLocks noGrp="1"/>
+          </p:cNvSpPr>
+          <p:nvPr>
+            <p:ph type="body" idx="1"/>
+          </p:nvPr>
+        </p:nvSpPr>
+        <p:spPr/>
+        <p:txBody>
+          <a:bodyPr/>
+          <a:lstStyle/>
+          <a:p>
+            <a:r>
+              <a:rPr lang="en-US" dirty="0"/>
+              <a:t/>
+            </a:r>
+            <a:endParaRPr lang="en-US" dirty="0"/>
+          </a:p>
+        </p:txBody>
+      </p:sp>
+      <p:sp>
+        <p:nvSpPr>
+          <p:cNvPr id="4" name="Slide Number Placeholder 3"/>
+          <p:cNvSpPr>
+            <a:spLocks noGrp="1"/>
+          </p:cNvSpPr>
+          <p:nvPr>
+            <p:ph type="sldNum" sz="quarter" idx="10"/>
+          </p:nvPr>
+        </p:nvSpPr>
+        <p:spPr/>
+        <p:txBody>
+          <a:bodyPr/>
+          <a:lstStyle/>
+          <a:p>
+            <a:fld id="{F7021451-1387-4CA6-816F-3879F97B5CBC}" type="slidenum">
+              <a:rPr lang="en-US"/>
+              <a:t>5</a:t>
+            </a:fld>
+            <a:endParaRPr lang="en-US"/>
+          </a:p>
+        </p:txBody>
+      </p:sp>
+    </p:spTree>
+    <p:extLst>
+      <p:ext uri="{BB962C8B-B14F-4D97-AF65-F5344CB8AC3E}">
+        <p14:creationId xmlns:p14="http://schemas.microsoft.com/office/powerpoint/2010/main" val="1024086991"/>
+      </p:ext>
+    </p:extLst>
+  </p:cSld>
+  <p:clrMapOvr>
+    <a:masterClrMapping/>
+  </p:clrMapOvr>
+</p:notes>
+</file>
+
 <file path=ppt/slideLayouts/slideLayout1.xml><?xml version="1.0" encoding="utf-8"?>
 <p:sldLayout xmlns:a="http://schemas.openxmlformats.org/drawingml/2006/main" xmlns:r="http://schemas.openxmlformats.org/officeDocument/2006/relationships" xmlns:p="http://schemas.openxmlformats.org/presentationml/2006/main" preserve="1">
   <p:cSld name="DEFAULT">
@@ -1124,7 +1213,7 @@
     <p:bg>
       <p:bgPr>
         <a:solidFill>
-          <a:srgbClr val="1A1D24"/>
+          <a:srgbClr val="14161C"/>
         </a:solidFill>
       </p:bgPr>
     </p:bg>
@@ -1161,7 +1250,205 @@
       </p:sp>
       <p:sp>
         <p:nvSpPr>
-          <p:cNvPr id="3" name="Text 1"/>
+          <p:cNvPr id="3" name="Shape 1"/>
+          <p:cNvSpPr/>
+          <p:nvPr/>
+        </p:nvSpPr>
+        <p:spPr>
+          <a:xfrm>
+            <a:off x="10561320" y="365760"/>
+            <a:ext cx="749808" cy="374904"/>
+          </a:xfrm>
+          <a:prstGeom prst="diamond">
+            <a:avLst/>
+          </a:prstGeom>
+          <a:solidFill>
+            <a:srgbClr val="3FE0FF">
+              <a:alpha val="85000"/>
+            </a:srgbClr>
+          </a:solidFill>
+          <a:ln/>
+        </p:spPr>
+      </p:sp>
+      <p:sp>
+        <p:nvSpPr>
+          <p:cNvPr id="4" name="Shape 2"/>
+          <p:cNvSpPr/>
+          <p:nvPr/>
+        </p:nvSpPr>
+        <p:spPr>
+          <a:xfrm flipH="1">
+            <a:off x="10561320" y="560710"/>
+            <a:ext cx="389900" cy="464881"/>
+          </a:xfrm>
+          <a:prstGeom prst="parallelogram">
+            <a:avLst/>
+          </a:prstGeom>
+          <a:solidFill>
+            <a:srgbClr val="3FE0FF">
+              <a:alpha val="40000"/>
+            </a:srgbClr>
+          </a:solidFill>
+          <a:ln/>
+        </p:spPr>
+      </p:sp>
+      <p:sp>
+        <p:nvSpPr>
+          <p:cNvPr id="5" name="Shape 3"/>
+          <p:cNvSpPr/>
+          <p:nvPr/>
+        </p:nvSpPr>
+        <p:spPr>
+          <a:xfrm>
+            <a:off x="10921228" y="560710"/>
+            <a:ext cx="389900" cy="464881"/>
+          </a:xfrm>
+          <a:prstGeom prst="parallelogram">
+            <a:avLst/>
+          </a:prstGeom>
+          <a:solidFill>
+            <a:srgbClr val="3FE0FF">
+              <a:alpha val="60000"/>
+            </a:srgbClr>
+          </a:solidFill>
+          <a:ln/>
+        </p:spPr>
+      </p:sp>
+      <p:sp>
+        <p:nvSpPr>
+          <p:cNvPr id="6" name="Shape 4"/>
+          <p:cNvSpPr/>
+          <p:nvPr/>
+        </p:nvSpPr>
+        <p:spPr>
+          <a:xfrm>
+            <a:off x="9646920" y="713232"/>
+            <a:ext cx="530352" cy="265176"/>
+          </a:xfrm>
+          <a:prstGeom prst="diamond">
+            <a:avLst/>
+          </a:prstGeom>
+          <a:solidFill>
+            <a:srgbClr val="FFC94D">
+              <a:alpha val="85000"/>
+            </a:srgbClr>
+          </a:solidFill>
+          <a:ln/>
+        </p:spPr>
+      </p:sp>
+      <p:sp>
+        <p:nvSpPr>
+          <p:cNvPr id="7" name="Shape 5"/>
+          <p:cNvSpPr/>
+          <p:nvPr/>
+        </p:nvSpPr>
+        <p:spPr>
+          <a:xfrm flipH="1">
+            <a:off x="9646920" y="851124"/>
+            <a:ext cx="275783" cy="328818"/>
+          </a:xfrm>
+          <a:prstGeom prst="parallelogram">
+            <a:avLst/>
+          </a:prstGeom>
+          <a:solidFill>
+            <a:srgbClr val="FFC94D">
+              <a:alpha val="40000"/>
+            </a:srgbClr>
+          </a:solidFill>
+          <a:ln/>
+        </p:spPr>
+      </p:sp>
+      <p:sp>
+        <p:nvSpPr>
+          <p:cNvPr id="8" name="Shape 6"/>
+          <p:cNvSpPr/>
+          <p:nvPr/>
+        </p:nvSpPr>
+        <p:spPr>
+          <a:xfrm>
+            <a:off x="9901489" y="851124"/>
+            <a:ext cx="275783" cy="328818"/>
+          </a:xfrm>
+          <a:prstGeom prst="parallelogram">
+            <a:avLst/>
+          </a:prstGeom>
+          <a:solidFill>
+            <a:srgbClr val="FFC94D">
+              <a:alpha val="60000"/>
+            </a:srgbClr>
+          </a:solidFill>
+          <a:ln/>
+        </p:spPr>
+      </p:sp>
+      <p:sp>
+        <p:nvSpPr>
+          <p:cNvPr id="9" name="Shape 7"/>
+          <p:cNvSpPr/>
+          <p:nvPr/>
+        </p:nvSpPr>
+        <p:spPr>
+          <a:xfrm>
+            <a:off x="10835640" y="1024128"/>
+            <a:ext cx="420624" cy="210312"/>
+          </a:xfrm>
+          <a:prstGeom prst="diamond">
+            <a:avLst/>
+          </a:prstGeom>
+          <a:solidFill>
+            <a:srgbClr val="2FE894">
+              <a:alpha val="85000"/>
+            </a:srgbClr>
+          </a:solidFill>
+          <a:ln/>
+        </p:spPr>
+      </p:sp>
+      <p:sp>
+        <p:nvSpPr>
+          <p:cNvPr id="10" name="Shape 8"/>
+          <p:cNvSpPr/>
+          <p:nvPr/>
+        </p:nvSpPr>
+        <p:spPr>
+          <a:xfrm flipH="1">
+            <a:off x="10835640" y="1133490"/>
+            <a:ext cx="218724" cy="260787"/>
+          </a:xfrm>
+          <a:prstGeom prst="parallelogram">
+            <a:avLst/>
+          </a:prstGeom>
+          <a:solidFill>
+            <a:srgbClr val="2FE894">
+              <a:alpha val="40000"/>
+            </a:srgbClr>
+          </a:solidFill>
+          <a:ln/>
+        </p:spPr>
+      </p:sp>
+      <p:sp>
+        <p:nvSpPr>
+          <p:cNvPr id="11" name="Shape 9"/>
+          <p:cNvSpPr/>
+          <p:nvPr/>
+        </p:nvSpPr>
+        <p:spPr>
+          <a:xfrm>
+            <a:off x="11037540" y="1133490"/>
+            <a:ext cx="218724" cy="260787"/>
+          </a:xfrm>
+          <a:prstGeom prst="parallelogram">
+            <a:avLst/>
+          </a:prstGeom>
+          <a:solidFill>
+            <a:srgbClr val="2FE894">
+              <a:alpha val="60000"/>
+            </a:srgbClr>
+          </a:solidFill>
+          <a:ln/>
+        </p:spPr>
+      </p:sp>
+      <p:sp>
+        <p:nvSpPr>
+          <p:cNvPr id="12" name="Text 10"/>
           <p:cNvSpPr/>
           <p:nvPr/>
         </p:nvSpPr>
@@ -1186,7 +1473,7 @@
             <a:r>
               <a:rPr lang="en-US" sz="5200" b="1" spc="100" kern="0" dirty="0">
                 <a:solidFill>
-                  <a:srgbClr val="F4F1EC"/>
+                  <a:srgbClr val="F5F3EE"/>
                 </a:solidFill>
                 <a:latin typeface="Bahnschrift" pitchFamily="34" charset="0"/>
                 <a:ea typeface="Bahnschrift" pitchFamily="34" charset="-122"/>
@@ -1200,7 +1487,7 @@
             <a:r>
               <a:rPr lang="en-US" sz="5200" b="1" spc="100" kern="0" dirty="0">
                 <a:solidFill>
-                  <a:srgbClr val="F2C14E"/>
+                  <a:srgbClr val="FFC94D"/>
                 </a:solidFill>
                 <a:latin typeface="Bahnschrift" pitchFamily="34" charset="0"/>
                 <a:ea typeface="Bahnschrift" pitchFamily="34" charset="-122"/>
@@ -1214,7 +1501,7 @@
       </p:sp>
       <p:sp>
         <p:nvSpPr>
-          <p:cNvPr id="4" name="Text 2"/>
+          <p:cNvPr id="13" name="Text 11"/>
           <p:cNvSpPr/>
           <p:nvPr/>
         </p:nvSpPr>
@@ -1239,7 +1526,7 @@
             <a:r>
               <a:rPr lang="en-US" sz="2000" dirty="0">
                 <a:solidFill>
-                  <a:srgbClr val="7DD3E0"/>
+                  <a:srgbClr val="3FE0FF"/>
                 </a:solidFill>
                 <a:latin typeface="Segoe UI" pitchFamily="34" charset="0"/>
                 <a:ea typeface="Segoe UI" pitchFamily="34" charset="-122"/>
@@ -1253,7 +1540,7 @@
       </p:sp>
       <p:sp>
         <p:nvSpPr>
-          <p:cNvPr id="5" name="Text 3"/>
+          <p:cNvPr id="14" name="Text 12"/>
           <p:cNvSpPr/>
           <p:nvPr/>
         </p:nvSpPr>
@@ -1278,7 +1565,7 @@
             <a:r>
               <a:rPr lang="en-US" sz="1300" dirty="0">
                 <a:solidFill>
-                  <a:srgbClr val="9CA3AF"/>
+                  <a:srgbClr val="A3ABBD"/>
                 </a:solidFill>
                 <a:latin typeface="Segoe UI" pitchFamily="34" charset="0"/>
                 <a:ea typeface="Segoe UI" pitchFamily="34" charset="-122"/>
@@ -1292,7 +1579,7 @@
       </p:sp>
       <p:pic>
         <p:nvPicPr>
-          <p:cNvPr id="6" name="Image 0" descr="C:\Users\Wilfried\OneDrive\Bureau\Wilfried\professionnel\CreaAfrica\assets\brand\CESTOM.png">    </p:cNvPr>
+          <p:cNvPr id="15" name="Image 0" descr="C:\Users\Wilfried\OneDrive\Bureau\Wilfried\professionnel\CreaAfrica\assets\brand\CESTOM.png">    </p:cNvPr>
           <p:cNvPicPr>
             <a:picLocks noChangeAspect="1"/>
           </p:cNvPicPr>
@@ -1316,7 +1603,7 @@
       </p:pic>
       <p:sp>
         <p:nvSpPr>
-          <p:cNvPr id="7" name="Text 4"/>
+          <p:cNvPr id="16" name="Text 13"/>
           <p:cNvSpPr/>
           <p:nvPr/>
         </p:nvSpPr>
@@ -1341,7 +1628,7 @@
             <a:r>
               <a:rPr lang="en-US" sz="1200" dirty="0">
                 <a:solidFill>
-                  <a:srgbClr val="9CA3AF"/>
+                  <a:srgbClr val="A3ABBD"/>
                 </a:solidFill>
                 <a:latin typeface="Segoe UI" pitchFamily="34" charset="0"/>
                 <a:ea typeface="Segoe UI" pitchFamily="34" charset="-122"/>
@@ -1367,7 +1654,7 @@
     <p:bg>
       <p:bgPr>
         <a:solidFill>
-          <a:srgbClr val="1A1D24"/>
+          <a:srgbClr val="14161C"/>
         </a:solidFill>
       </p:bgPr>
     </p:bg>
@@ -1400,7 +1687,7 @@
             <a:avLst/>
           </a:prstGeom>
           <a:solidFill>
-            <a:srgbClr val="7DD3E0">
+            <a:srgbClr val="FF4D5E">
               <a:alpha val="8000"/>
             </a:srgbClr>
           </a:solidFill>
@@ -1449,17 +1736,17 @@
               <a:buNone/>
             </a:pPr>
             <a:r>
-              <a:rPr lang="en-US" sz="2800" b="1" dirty="0">
-                <a:solidFill>
-                  <a:srgbClr val="F4F1EC"/>
+              <a:rPr lang="en-US" sz="2700" b="1" dirty="0">
+                <a:solidFill>
+                  <a:srgbClr val="F5F3EE"/>
                 </a:solidFill>
                 <a:latin typeface="Bahnschrift" pitchFamily="34" charset="0"/>
                 <a:ea typeface="Bahnschrift" pitchFamily="34" charset="-122"/>
                 <a:cs typeface="Bahnschrift" pitchFamily="34" charset="-120"/>
               </a:rPr>
-              <a:t>Le problème, et notre réponse directe</a:t>
-            </a:r>
-            <a:endParaRPr lang="en-US" sz="2800" dirty="0"/>
+              <a:t>Le problème</a:t>
+            </a:r>
+            <a:endParaRPr lang="en-US" sz="2700" dirty="0"/>
           </a:p>
         </p:txBody>
       </p:sp>
@@ -1490,13 +1777,13 @@
             <a:r>
               <a:rPr lang="en-US" sz="1300" dirty="0">
                 <a:solidFill>
-                  <a:srgbClr val="9CA3AF"/>
+                  <a:srgbClr val="A3ABBD"/>
                 </a:solidFill>
                 <a:latin typeface="Segoe UI" pitchFamily="34" charset="0"/>
                 <a:ea typeface="Segoe UI" pitchFamily="34" charset="-122"/>
                 <a:cs typeface="Segoe UI" pitchFamily="34" charset="-120"/>
               </a:rPr>
-              <a:t>Chaque problème identifié a une réponse produit concrète — pas un vœu pieux</a:t>
+              <a:t>Trois frictions réelles, vécues chaque semaine par un étudiant togolais au Maroc</a:t>
             </a:r>
             <a:endParaRPr lang="en-US" sz="1300" dirty="0"/>
           </a:p>
@@ -1529,7 +1816,7 @@
             <a:r>
               <a:rPr lang="en-US" sz="1100" b="1" spc="100" kern="0" dirty="0">
                 <a:solidFill>
-                  <a:srgbClr val="9CA3AF"/>
+                  <a:srgbClr val="A3ABBD"/>
                 </a:solidFill>
                 <a:latin typeface="Bahnschrift" pitchFamily="34" charset="0"/>
                 <a:ea typeface="Bahnschrift" pitchFamily="34" charset="-122"/>
@@ -1549,23 +1836,29 @@
         </p:nvSpPr>
         <p:spPr>
           <a:xfrm>
-            <a:off x="640080" y="1965960"/>
-            <a:ext cx="5227168" cy="1417320"/>
+            <a:off x="640080" y="2057400"/>
+            <a:ext cx="3454298" cy="1965960"/>
           </a:xfrm>
           <a:prstGeom prst="roundRect">
             <a:avLst>
-              <a:gd name="adj" fmla="val 4516"/>
+              <a:gd name="adj" fmla="val 3256"/>
             </a:avLst>
           </a:prstGeom>
-          <a:solidFill>
-            <a:srgbClr val="242832"/>
-          </a:solidFill>
           <a:ln w="12700">
             <a:solidFill>
-              <a:srgbClr val="E5484D"/>
+              <a:srgbClr val="FF4D5E">
+                <a:alpha val="70000"/>
+              </a:srgbClr>
             </a:solidFill>
             <a:prstDash val="solid"/>
           </a:ln>
+          <a:effectLst>
+            <a:outerShdw sx="100000" sy="100000" kx="0" ky="0" algn="bl" rotWithShape="0" blurRad="101600" dist="50800" dir="16200000">
+              <a:srgbClr val="FF4D5E">
+                <a:alpha val="28000"/>
+              </a:srgbClr>
+            </a:outerShdw>
+          </a:effectLst>
         </p:spPr>
       </p:sp>
       <p:sp>
@@ -1576,27 +1869,56 @@
         </p:nvSpPr>
         <p:spPr>
           <a:xfrm>
-            <a:off x="5410048" y="2093976"/>
+            <a:off x="832744" y="2066544"/>
+            <a:ext cx="3068970" cy="18288"/>
+          </a:xfrm>
+          <a:prstGeom prst="rect">
+            <a:avLst/>
+          </a:prstGeom>
+          <a:solidFill>
+            <a:srgbClr val="FF4D5E">
+              <a:alpha val="65000"/>
+            </a:srgbClr>
+          </a:solidFill>
+          <a:ln/>
+        </p:spPr>
+      </p:sp>
+      <p:sp>
+        <p:nvSpPr>
+          <p:cNvPr id="9" name="Shape 7"/>
+          <p:cNvSpPr/>
+          <p:nvPr/>
+        </p:nvSpPr>
+        <p:spPr>
+          <a:xfrm>
+            <a:off x="3692042" y="2203704"/>
             <a:ext cx="292608" cy="292608"/>
           </a:xfrm>
           <a:prstGeom prst="ellipse">
             <a:avLst/>
           </a:prstGeom>
           <a:solidFill>
-            <a:srgbClr val="E5484D"/>
-          </a:solidFill>
-          <a:ln/>
-        </p:spPr>
-      </p:sp>
-      <p:sp>
-        <p:nvSpPr>
-          <p:cNvPr id="9" name="Text 7"/>
-          <p:cNvSpPr/>
-          <p:nvPr/>
-        </p:nvSpPr>
-        <p:spPr>
-          <a:xfrm>
-            <a:off x="5410048" y="2093976"/>
+            <a:srgbClr val="FF4D5E"/>
+          </a:solidFill>
+          <a:ln/>
+          <a:effectLst>
+            <a:outerShdw sx="100000" sy="100000" kx="0" ky="0" algn="bl" rotWithShape="0" blurRad="76200" dist="50800" dir="16200000">
+              <a:srgbClr val="FF4D5E">
+                <a:alpha val="50000"/>
+              </a:srgbClr>
+            </a:outerShdw>
+          </a:effectLst>
+        </p:spPr>
+      </p:sp>
+      <p:sp>
+        <p:nvSpPr>
+          <p:cNvPr id="10" name="Text 8"/>
+          <p:cNvSpPr/>
+          <p:nvPr/>
+        </p:nvSpPr>
+        <p:spPr>
+          <a:xfrm>
+            <a:off x="3692042" y="2203704"/>
             <a:ext cx="292608" cy="292608"/>
           </a:xfrm>
           <a:prstGeom prst="rect">
@@ -1615,7 +1937,7 @@
             <a:r>
               <a:rPr lang="en-US" sz="1408" b="1" dirty="0">
                 <a:solidFill>
-                  <a:srgbClr val="1A1D24"/>
+                  <a:srgbClr val="14161C"/>
                 </a:solidFill>
                 <a:latin typeface="Bahnschrift" pitchFamily="34" charset="0"/>
                 <a:ea typeface="Bahnschrift" pitchFamily="34" charset="-122"/>
@@ -1629,32 +1951,32 @@
       </p:sp>
       <p:sp>
         <p:nvSpPr>
-          <p:cNvPr id="10" name="Text 8"/>
-          <p:cNvSpPr/>
-          <p:nvPr/>
-        </p:nvSpPr>
-        <p:spPr>
-          <a:xfrm>
-            <a:off x="868680" y="2075688"/>
-            <a:ext cx="4769968" cy="365760"/>
-          </a:xfrm>
-          <a:prstGeom prst="rect">
-            <a:avLst/>
-          </a:prstGeom>
-          <a:noFill/>
-          <a:ln/>
-        </p:spPr>
-        <p:txBody>
-          <a:bodyPr wrap="square" rtlCol="0" anchor="ctr"/>
+          <p:cNvPr id="11" name="Text 9"/>
+          <p:cNvSpPr/>
+          <p:nvPr/>
+        </p:nvSpPr>
+        <p:spPr>
+          <a:xfrm>
+            <a:off x="868680" y="2203704"/>
+            <a:ext cx="2905658" cy="502920"/>
+          </a:xfrm>
+          <a:prstGeom prst="rect">
+            <a:avLst/>
+          </a:prstGeom>
+          <a:noFill/>
+          <a:ln/>
+        </p:spPr>
+        <p:txBody>
+          <a:bodyPr wrap="square" rtlCol="0" anchor="t"/>
           <a:lstStyle/>
           <a:p>
             <a:pPr indent="0" marL="0">
               <a:buNone/>
             </a:pPr>
             <a:r>
-              <a:rPr lang="en-US" sz="1300" b="1" dirty="0">
-                <a:solidFill>
-                  <a:srgbClr val="E5484D"/>
+              <a:rPr lang="en-US" sz="1350" b="1" dirty="0">
+                <a:solidFill>
+                  <a:srgbClr val="FF4D5E"/>
                 </a:solidFill>
                 <a:latin typeface="Bahnschrift" pitchFamily="34" charset="0"/>
                 <a:ea typeface="Bahnschrift" pitchFamily="34" charset="-122"/>
@@ -1662,20 +1984,20 @@
               </a:rPr>
               <a:t>Information fragmentée</a:t>
             </a:r>
-            <a:endParaRPr lang="en-US" sz="1300" dirty="0"/>
-          </a:p>
-        </p:txBody>
-      </p:sp>
-      <p:sp>
-        <p:nvSpPr>
-          <p:cNvPr id="11" name="Text 9"/>
-          <p:cNvSpPr/>
-          <p:nvPr/>
-        </p:nvSpPr>
-        <p:spPr>
-          <a:xfrm>
-            <a:off x="868680" y="2441448"/>
-            <a:ext cx="4769968" cy="868680"/>
+            <a:endParaRPr lang="en-US" sz="1350" dirty="0"/>
+          </a:p>
+        </p:txBody>
+      </p:sp>
+      <p:sp>
+        <p:nvSpPr>
+          <p:cNvPr id="12" name="Text 10"/>
+          <p:cNvSpPr/>
+          <p:nvPr/>
+        </p:nvSpPr>
+        <p:spPr>
+          <a:xfrm>
+            <a:off x="868680" y="2679192"/>
+            <a:ext cx="2997098" cy="1188720"/>
           </a:xfrm>
           <a:prstGeom prst="rect">
             <a:avLst/>
@@ -1688,12 +2010,15 @@
           <a:lstStyle/>
           <a:p>
             <a:pPr indent="0" marL="0">
-              <a:buNone/>
-            </a:pPr>
-            <a:r>
-              <a:rPr lang="en-US" sz="1050" dirty="0">
-                <a:solidFill>
-                  <a:srgbClr val="9CA3AF"/>
+              <a:lnSpc>
+                <a:spcPct val="125000"/>
+              </a:lnSpc>
+              <a:buNone/>
+            </a:pPr>
+            <a:r>
+              <a:rPr lang="en-US" sz="1100" dirty="0">
+                <a:solidFill>
+                  <a:srgbClr val="A3ABBD"/>
                 </a:solidFill>
                 <a:latin typeface="Segoe UI" pitchFamily="34" charset="0"/>
                 <a:ea typeface="Segoe UI" pitchFamily="34" charset="-122"/>
@@ -1701,66 +2026,101 @@
               </a:rPr>
               <a:t>WhatsApp non indexable, non consultable après coup, aucune valeur générée pour personne.</a:t>
             </a:r>
-            <a:endParaRPr lang="en-US" sz="1050" dirty="0"/>
-          </a:p>
-        </p:txBody>
-      </p:sp>
-      <p:sp>
-        <p:nvSpPr>
-          <p:cNvPr id="12" name="Shape 10"/>
-          <p:cNvSpPr/>
-          <p:nvPr/>
-        </p:nvSpPr>
-        <p:spPr>
-          <a:xfrm>
-            <a:off x="6324448" y="1965960"/>
-            <a:ext cx="5227168" cy="1417320"/>
+            <a:endParaRPr lang="en-US" sz="1100" dirty="0"/>
+          </a:p>
+        </p:txBody>
+      </p:sp>
+      <p:sp>
+        <p:nvSpPr>
+          <p:cNvPr id="13" name="Shape 11"/>
+          <p:cNvSpPr/>
+          <p:nvPr/>
+        </p:nvSpPr>
+        <p:spPr>
+          <a:xfrm>
+            <a:off x="4368698" y="2057400"/>
+            <a:ext cx="3454298" cy="1965960"/>
           </a:xfrm>
           <a:prstGeom prst="roundRect">
             <a:avLst>
-              <a:gd name="adj" fmla="val 4516"/>
+              <a:gd name="adj" fmla="val 3256"/>
             </a:avLst>
           </a:prstGeom>
-          <a:solidFill>
-            <a:srgbClr val="242832"/>
-          </a:solidFill>
           <a:ln w="12700">
             <a:solidFill>
-              <a:srgbClr val="4CAF7D"/>
+              <a:srgbClr val="FF4D5E">
+                <a:alpha val="70000"/>
+              </a:srgbClr>
             </a:solidFill>
             <a:prstDash val="solid"/>
           </a:ln>
-        </p:spPr>
-      </p:sp>
-      <p:sp>
-        <p:nvSpPr>
-          <p:cNvPr id="13" name="Shape 11"/>
-          <p:cNvSpPr/>
-          <p:nvPr/>
-        </p:nvSpPr>
-        <p:spPr>
-          <a:xfrm>
-            <a:off x="11094415" y="2093976"/>
+          <a:effectLst>
+            <a:outerShdw sx="100000" sy="100000" kx="0" ky="0" algn="bl" rotWithShape="0" blurRad="101600" dist="50800" dir="16200000">
+              <a:srgbClr val="FF4D5E">
+                <a:alpha val="28000"/>
+              </a:srgbClr>
+            </a:outerShdw>
+          </a:effectLst>
+        </p:spPr>
+      </p:sp>
+      <p:sp>
+        <p:nvSpPr>
+          <p:cNvPr id="14" name="Shape 12"/>
+          <p:cNvSpPr/>
+          <p:nvPr/>
+        </p:nvSpPr>
+        <p:spPr>
+          <a:xfrm>
+            <a:off x="4561362" y="2066544"/>
+            <a:ext cx="3068970" cy="18288"/>
+          </a:xfrm>
+          <a:prstGeom prst="rect">
+            <a:avLst/>
+          </a:prstGeom>
+          <a:solidFill>
+            <a:srgbClr val="FF4D5E">
+              <a:alpha val="65000"/>
+            </a:srgbClr>
+          </a:solidFill>
+          <a:ln/>
+        </p:spPr>
+      </p:sp>
+      <p:sp>
+        <p:nvSpPr>
+          <p:cNvPr id="15" name="Shape 13"/>
+          <p:cNvSpPr/>
+          <p:nvPr/>
+        </p:nvSpPr>
+        <p:spPr>
+          <a:xfrm>
+            <a:off x="7420661" y="2203704"/>
             <a:ext cx="292608" cy="292608"/>
           </a:xfrm>
           <a:prstGeom prst="ellipse">
             <a:avLst/>
           </a:prstGeom>
           <a:solidFill>
-            <a:srgbClr val="4CAF7D"/>
-          </a:solidFill>
-          <a:ln/>
-        </p:spPr>
-      </p:sp>
-      <p:sp>
-        <p:nvSpPr>
-          <p:cNvPr id="14" name="Text 12"/>
-          <p:cNvSpPr/>
-          <p:nvPr/>
-        </p:nvSpPr>
-        <p:spPr>
-          <a:xfrm>
-            <a:off x="11094415" y="2093976"/>
+            <a:srgbClr val="FF4D5E"/>
+          </a:solidFill>
+          <a:ln/>
+          <a:effectLst>
+            <a:outerShdw sx="100000" sy="100000" kx="0" ky="0" algn="bl" rotWithShape="0" blurRad="76200" dist="50800" dir="16200000">
+              <a:srgbClr val="FF4D5E">
+                <a:alpha val="50000"/>
+              </a:srgbClr>
+            </a:outerShdw>
+          </a:effectLst>
+        </p:spPr>
+      </p:sp>
+      <p:sp>
+        <p:nvSpPr>
+          <p:cNvPr id="16" name="Text 14"/>
+          <p:cNvSpPr/>
+          <p:nvPr/>
+        </p:nvSpPr>
+        <p:spPr>
+          <a:xfrm>
+            <a:off x="7420661" y="2203704"/>
             <a:ext cx="292608" cy="292608"/>
           </a:xfrm>
           <a:prstGeom prst="rect">
@@ -1779,13 +2139,13 @@
             <a:r>
               <a:rPr lang="en-US" sz="1408" b="1" dirty="0">
                 <a:solidFill>
-                  <a:srgbClr val="1A1D24"/>
+                  <a:srgbClr val="14161C"/>
                 </a:solidFill>
                 <a:latin typeface="Bahnschrift" pitchFamily="34" charset="0"/>
                 <a:ea typeface="Bahnschrift" pitchFamily="34" charset="-122"/>
                 <a:cs typeface="Bahnschrift" pitchFamily="34" charset="-120"/>
               </a:rPr>
-              <a:t>+</a:t>
+              <a:t>!</a:t>
             </a:r>
             <a:endParaRPr lang="en-US" sz="1408" dirty="0"/>
           </a:p>
@@ -1793,53 +2153,53 @@
       </p:sp>
       <p:sp>
         <p:nvSpPr>
-          <p:cNvPr id="15" name="Text 13"/>
-          <p:cNvSpPr/>
-          <p:nvPr/>
-        </p:nvSpPr>
-        <p:spPr>
-          <a:xfrm>
-            <a:off x="6553048" y="2075688"/>
-            <a:ext cx="4769968" cy="365760"/>
-          </a:xfrm>
-          <a:prstGeom prst="rect">
-            <a:avLst/>
-          </a:prstGeom>
-          <a:noFill/>
-          <a:ln/>
-        </p:spPr>
-        <p:txBody>
-          <a:bodyPr wrap="square" rtlCol="0" anchor="ctr"/>
+          <p:cNvPr id="17" name="Text 15"/>
+          <p:cNvSpPr/>
+          <p:nvPr/>
+        </p:nvSpPr>
+        <p:spPr>
+          <a:xfrm>
+            <a:off x="4597298" y="2203704"/>
+            <a:ext cx="2905658" cy="502920"/>
+          </a:xfrm>
+          <a:prstGeom prst="rect">
+            <a:avLst/>
+          </a:prstGeom>
+          <a:noFill/>
+          <a:ln/>
+        </p:spPr>
+        <p:txBody>
+          <a:bodyPr wrap="square" rtlCol="0" anchor="t"/>
           <a:lstStyle/>
           <a:p>
             <a:pPr indent="0" marL="0">
               <a:buNone/>
             </a:pPr>
             <a:r>
-              <a:rPr lang="en-US" sz="1300" b="1" dirty="0">
-                <a:solidFill>
-                  <a:srgbClr val="4CAF7D"/>
+              <a:rPr lang="en-US" sz="1350" b="1" dirty="0">
+                <a:solidFill>
+                  <a:srgbClr val="FF4D5E"/>
                 </a:solidFill>
                 <a:latin typeface="Bahnschrift" pitchFamily="34" charset="0"/>
                 <a:ea typeface="Bahnschrift" pitchFamily="34" charset="-122"/>
                 <a:cs typeface="Bahnschrift" pitchFamily="34" charset="-120"/>
               </a:rPr>
-              <a:t>Carte par ville + Pins</a:t>
-            </a:r>
-            <a:endParaRPr lang="en-US" sz="1300" dirty="0"/>
-          </a:p>
-        </p:txBody>
-      </p:sp>
-      <p:sp>
-        <p:nvSpPr>
-          <p:cNvPr id="16" name="Text 14"/>
-          <p:cNvSpPr/>
-          <p:nvPr/>
-        </p:nvSpPr>
-        <p:spPr>
-          <a:xfrm>
-            <a:off x="6553048" y="2441448"/>
-            <a:ext cx="4769968" cy="868680"/>
+              <a:t>Aide rendue non valorisée</a:t>
+            </a:r>
+            <a:endParaRPr lang="en-US" sz="1350" dirty="0"/>
+          </a:p>
+        </p:txBody>
+      </p:sp>
+      <p:sp>
+        <p:nvSpPr>
+          <p:cNvPr id="18" name="Text 16"/>
+          <p:cNvSpPr/>
+          <p:nvPr/>
+        </p:nvSpPr>
+        <p:spPr>
+          <a:xfrm>
+            <a:off x="4597298" y="2679192"/>
+            <a:ext cx="2997098" cy="1188720"/>
           </a:xfrm>
           <a:prstGeom prst="rect">
             <a:avLst/>
@@ -1852,79 +2212,117 @@
           <a:lstStyle/>
           <a:p>
             <a:pPr indent="0" marL="0">
-              <a:buNone/>
-            </a:pPr>
-            <a:r>
-              <a:rPr lang="en-US" sz="1050" dirty="0">
-                <a:solidFill>
-                  <a:srgbClr val="9CA3AF"/>
+              <a:lnSpc>
+                <a:spcPct val="125000"/>
+              </a:lnSpc>
+              <a:buNone/>
+            </a:pPr>
+            <a:r>
+              <a:rPr lang="en-US" sz="1100" dirty="0">
+                <a:solidFill>
+                  <a:srgbClr val="A3ABBD"/>
                 </a:solidFill>
                 <a:latin typeface="Segoe UI" pitchFamily="34" charset="0"/>
                 <a:ea typeface="Segoe UI" pitchFamily="34" charset="-122"/>
                 <a:cs typeface="Segoe UI" pitchFamily="34" charset="-120"/>
               </a:rPr>
-              <a:t>Informations pratiques persistantes, consultables par tous, ancrées à un lieu précis.</a:t>
-            </a:r>
-            <a:endParaRPr lang="en-US" sz="1050" dirty="0"/>
-          </a:p>
-        </p:txBody>
-      </p:sp>
-      <p:sp>
-        <p:nvSpPr>
-          <p:cNvPr id="17" name="Shape 15"/>
-          <p:cNvSpPr/>
-          <p:nvPr/>
-        </p:nvSpPr>
-        <p:spPr>
-          <a:xfrm>
-            <a:off x="640080" y="3566160"/>
-            <a:ext cx="5227168" cy="1417320"/>
+              <a:t>Celui qui aide un pair n'obtient aujourd'hui aucune reconnaissance durable, aucune trace.</a:t>
+            </a:r>
+            <a:endParaRPr lang="en-US" sz="1100" dirty="0"/>
+          </a:p>
+        </p:txBody>
+      </p:sp>
+      <p:sp>
+        <p:nvSpPr>
+          <p:cNvPr id="19" name="Shape 17"/>
+          <p:cNvSpPr/>
+          <p:nvPr/>
+        </p:nvSpPr>
+        <p:spPr>
+          <a:xfrm>
+            <a:off x="8097317" y="2057400"/>
+            <a:ext cx="3454298" cy="1965960"/>
           </a:xfrm>
           <a:prstGeom prst="roundRect">
             <a:avLst>
-              <a:gd name="adj" fmla="val 4516"/>
+              <a:gd name="adj" fmla="val 3256"/>
             </a:avLst>
           </a:prstGeom>
-          <a:solidFill>
-            <a:srgbClr val="242832"/>
-          </a:solidFill>
           <a:ln w="12700">
             <a:solidFill>
-              <a:srgbClr val="E5484D"/>
+              <a:srgbClr val="FF4D5E">
+                <a:alpha val="70000"/>
+              </a:srgbClr>
             </a:solidFill>
             <a:prstDash val="solid"/>
           </a:ln>
-        </p:spPr>
-      </p:sp>
-      <p:sp>
-        <p:nvSpPr>
-          <p:cNvPr id="18" name="Shape 16"/>
-          <p:cNvSpPr/>
-          <p:nvPr/>
-        </p:nvSpPr>
-        <p:spPr>
-          <a:xfrm>
-            <a:off x="5410048" y="3694176"/>
+          <a:effectLst>
+            <a:outerShdw sx="100000" sy="100000" kx="0" ky="0" algn="bl" rotWithShape="0" blurRad="101600" dist="50800" dir="16200000">
+              <a:srgbClr val="FF4D5E">
+                <a:alpha val="28000"/>
+              </a:srgbClr>
+            </a:outerShdw>
+          </a:effectLst>
+        </p:spPr>
+      </p:sp>
+      <p:sp>
+        <p:nvSpPr>
+          <p:cNvPr id="20" name="Shape 18"/>
+          <p:cNvSpPr/>
+          <p:nvPr/>
+        </p:nvSpPr>
+        <p:spPr>
+          <a:xfrm>
+            <a:off x="8289981" y="2066544"/>
+            <a:ext cx="3068970" cy="18288"/>
+          </a:xfrm>
+          <a:prstGeom prst="rect">
+            <a:avLst/>
+          </a:prstGeom>
+          <a:solidFill>
+            <a:srgbClr val="FF4D5E">
+              <a:alpha val="65000"/>
+            </a:srgbClr>
+          </a:solidFill>
+          <a:ln/>
+        </p:spPr>
+      </p:sp>
+      <p:sp>
+        <p:nvSpPr>
+          <p:cNvPr id="21" name="Shape 19"/>
+          <p:cNvSpPr/>
+          <p:nvPr/>
+        </p:nvSpPr>
+        <p:spPr>
+          <a:xfrm>
+            <a:off x="11149279" y="2203704"/>
             <a:ext cx="292608" cy="292608"/>
           </a:xfrm>
           <a:prstGeom prst="ellipse">
             <a:avLst/>
           </a:prstGeom>
           <a:solidFill>
-            <a:srgbClr val="E5484D"/>
-          </a:solidFill>
-          <a:ln/>
-        </p:spPr>
-      </p:sp>
-      <p:sp>
-        <p:nvSpPr>
-          <p:cNvPr id="19" name="Text 17"/>
-          <p:cNvSpPr/>
-          <p:nvPr/>
-        </p:nvSpPr>
-        <p:spPr>
-          <a:xfrm>
-            <a:off x="5410048" y="3694176"/>
+            <a:srgbClr val="FF4D5E"/>
+          </a:solidFill>
+          <a:ln/>
+          <a:effectLst>
+            <a:outerShdw sx="100000" sy="100000" kx="0" ky="0" algn="bl" rotWithShape="0" blurRad="76200" dist="50800" dir="16200000">
+              <a:srgbClr val="FF4D5E">
+                <a:alpha val="50000"/>
+              </a:srgbClr>
+            </a:outerShdw>
+          </a:effectLst>
+        </p:spPr>
+      </p:sp>
+      <p:sp>
+        <p:nvSpPr>
+          <p:cNvPr id="22" name="Text 20"/>
+          <p:cNvSpPr/>
+          <p:nvPr/>
+        </p:nvSpPr>
+        <p:spPr>
+          <a:xfrm>
+            <a:off x="11149279" y="2203704"/>
             <a:ext cx="292608" cy="292608"/>
           </a:xfrm>
           <a:prstGeom prst="rect">
@@ -1943,7 +2341,7 @@
             <a:r>
               <a:rPr lang="en-US" sz="1408" b="1" dirty="0">
                 <a:solidFill>
-                  <a:srgbClr val="1A1D24"/>
+                  <a:srgbClr val="14161C"/>
                 </a:solidFill>
                 <a:latin typeface="Bahnschrift" pitchFamily="34" charset="0"/>
                 <a:ea typeface="Bahnschrift" pitchFamily="34" charset="-122"/>
@@ -1957,53 +2355,53 @@
       </p:sp>
       <p:sp>
         <p:nvSpPr>
-          <p:cNvPr id="20" name="Text 18"/>
-          <p:cNvSpPr/>
-          <p:nvPr/>
-        </p:nvSpPr>
-        <p:spPr>
-          <a:xfrm>
-            <a:off x="868680" y="3675888"/>
-            <a:ext cx="4769968" cy="365760"/>
-          </a:xfrm>
-          <a:prstGeom prst="rect">
-            <a:avLst/>
-          </a:prstGeom>
-          <a:noFill/>
-          <a:ln/>
-        </p:spPr>
-        <p:txBody>
-          <a:bodyPr wrap="square" rtlCol="0" anchor="ctr"/>
+          <p:cNvPr id="23" name="Text 21"/>
+          <p:cNvSpPr/>
+          <p:nvPr/>
+        </p:nvSpPr>
+        <p:spPr>
+          <a:xfrm>
+            <a:off x="8325917" y="2203704"/>
+            <a:ext cx="2905658" cy="502920"/>
+          </a:xfrm>
+          <a:prstGeom prst="rect">
+            <a:avLst/>
+          </a:prstGeom>
+          <a:noFill/>
+          <a:ln/>
+        </p:spPr>
+        <p:txBody>
+          <a:bodyPr wrap="square" rtlCol="0" anchor="t"/>
           <a:lstStyle/>
           <a:p>
             <a:pPr indent="0" marL="0">
               <a:buNone/>
             </a:pPr>
             <a:r>
-              <a:rPr lang="en-US" sz="1300" b="1" dirty="0">
-                <a:solidFill>
-                  <a:srgbClr val="E5484D"/>
+              <a:rPr lang="en-US" sz="1350" b="1" dirty="0">
+                <a:solidFill>
+                  <a:srgbClr val="FF4D5E"/>
                 </a:solidFill>
                 <a:latin typeface="Bahnschrift" pitchFamily="34" charset="0"/>
                 <a:ea typeface="Bahnschrift" pitchFamily="34" charset="-122"/>
                 <a:cs typeface="Bahnschrift" pitchFamily="34" charset="-120"/>
               </a:rPr>
-              <a:t>Aide rendue non valorisée</a:t>
-            </a:r>
-            <a:endParaRPr lang="en-US" sz="1300" dirty="0"/>
-          </a:p>
-        </p:txBody>
-      </p:sp>
-      <p:sp>
-        <p:nvSpPr>
-          <p:cNvPr id="21" name="Text 19"/>
-          <p:cNvSpPr/>
-          <p:nvPr/>
-        </p:nvSpPr>
-        <p:spPr>
-          <a:xfrm>
-            <a:off x="868680" y="4041648"/>
-            <a:ext cx="4769968" cy="868680"/>
+              <a:t>Isolement à l'arrivée</a:t>
+            </a:r>
+            <a:endParaRPr lang="en-US" sz="1350" dirty="0"/>
+          </a:p>
+        </p:txBody>
+      </p:sp>
+      <p:sp>
+        <p:nvSpPr>
+          <p:cNvPr id="24" name="Text 22"/>
+          <p:cNvSpPr/>
+          <p:nvPr/>
+        </p:nvSpPr>
+        <p:spPr>
+          <a:xfrm>
+            <a:off x="8325917" y="2679192"/>
+            <a:ext cx="2997098" cy="1188720"/>
           </a:xfrm>
           <a:prstGeom prst="rect">
             <a:avLst/>
@@ -2016,80 +2414,72 @@
           <a:lstStyle/>
           <a:p>
             <a:pPr indent="0" marL="0">
-              <a:buNone/>
-            </a:pPr>
-            <a:r>
-              <a:rPr lang="en-US" sz="1050" dirty="0">
-                <a:solidFill>
-                  <a:srgbClr val="9CA3AF"/>
+              <a:lnSpc>
+                <a:spcPct val="125000"/>
+              </a:lnSpc>
+              <a:buNone/>
+            </a:pPr>
+            <a:r>
+              <a:rPr lang="en-US" sz="1100" dirty="0">
+                <a:solidFill>
+                  <a:srgbClr val="A3ABBD"/>
                 </a:solidFill>
                 <a:latin typeface="Segoe UI" pitchFamily="34" charset="0"/>
                 <a:ea typeface="Segoe UI" pitchFamily="34" charset="-122"/>
                 <a:cs typeface="Segoe UI" pitchFamily="34" charset="-120"/>
               </a:rPr>
-              <a:t>Celui qui aide un pair n'obtient aujourd'hui aucune reconnaissance durable, aucune trace.</a:t>
-            </a:r>
-            <a:endParaRPr lang="en-US" sz="1050" dirty="0"/>
-          </a:p>
-        </p:txBody>
-      </p:sp>
-      <p:sp>
-        <p:nvSpPr>
-          <p:cNvPr id="22" name="Shape 20"/>
-          <p:cNvSpPr/>
-          <p:nvPr/>
-        </p:nvSpPr>
-        <p:spPr>
-          <a:xfrm>
-            <a:off x="6324448" y="3566160"/>
-            <a:ext cx="5227168" cy="1417320"/>
+              <a:t>Un nouvel arrivant manque des codes locaux essentiels au moment où il en a le plus besoin.</a:t>
+            </a:r>
+            <a:endParaRPr lang="en-US" sz="1100" dirty="0"/>
+          </a:p>
+        </p:txBody>
+      </p:sp>
+      <p:sp>
+        <p:nvSpPr>
+          <p:cNvPr id="25" name="Shape 23"/>
+          <p:cNvSpPr/>
+          <p:nvPr/>
+        </p:nvSpPr>
+        <p:spPr>
+          <a:xfrm>
+            <a:off x="640080" y="4343400"/>
+            <a:ext cx="10911535" cy="1051560"/>
           </a:xfrm>
           <a:prstGeom prst="roundRect">
             <a:avLst>
-              <a:gd name="adj" fmla="val 4516"/>
+              <a:gd name="adj" fmla="val 6957"/>
             </a:avLst>
           </a:prstGeom>
           <a:solidFill>
-            <a:srgbClr val="242832"/>
+            <a:srgbClr val="242836"/>
           </a:solidFill>
           <a:ln w="12700">
             <a:solidFill>
-              <a:srgbClr val="4CAF7D"/>
+              <a:srgbClr val="FF4D5E">
+                <a:alpha val="70000"/>
+              </a:srgbClr>
             </a:solidFill>
             <a:prstDash val="solid"/>
           </a:ln>
-        </p:spPr>
-      </p:sp>
-      <p:sp>
-        <p:nvSpPr>
-          <p:cNvPr id="23" name="Shape 21"/>
-          <p:cNvSpPr/>
-          <p:nvPr/>
-        </p:nvSpPr>
-        <p:spPr>
-          <a:xfrm>
-            <a:off x="11094415" y="3694176"/>
-            <a:ext cx="292608" cy="292608"/>
-          </a:xfrm>
-          <a:prstGeom prst="ellipse">
-            <a:avLst/>
-          </a:prstGeom>
-          <a:solidFill>
-            <a:srgbClr val="4CAF7D"/>
-          </a:solidFill>
-          <a:ln/>
-        </p:spPr>
-      </p:sp>
-      <p:sp>
-        <p:nvSpPr>
-          <p:cNvPr id="24" name="Text 22"/>
-          <p:cNvSpPr/>
-          <p:nvPr/>
-        </p:nvSpPr>
-        <p:spPr>
-          <a:xfrm>
-            <a:off x="11094415" y="3694176"/>
-            <a:ext cx="292608" cy="292608"/>
+          <a:effectLst>
+            <a:outerShdw sx="100000" sy="100000" kx="0" ky="0" algn="bl" rotWithShape="0" blurRad="101600" dist="50800" dir="16200000">
+              <a:srgbClr val="FF4D5E">
+                <a:alpha val="25000"/>
+              </a:srgbClr>
+            </a:outerShdw>
+          </a:effectLst>
+        </p:spPr>
+      </p:sp>
+      <p:sp>
+        <p:nvSpPr>
+          <p:cNvPr id="26" name="Text 24"/>
+          <p:cNvSpPr/>
+          <p:nvPr/>
+        </p:nvSpPr>
+        <p:spPr>
+          <a:xfrm>
+            <a:off x="960120" y="4343400"/>
+            <a:ext cx="10271455" cy="1051560"/>
           </a:xfrm>
           <a:prstGeom prst="rect">
             <a:avLst/>
@@ -2101,517 +2491,111 @@
           <a:bodyPr wrap="square" rtlCol="0" anchor="ctr"/>
           <a:lstStyle/>
           <a:p>
-            <a:pPr algn="ctr" indent="0" marL="0">
-              <a:buNone/>
-            </a:pPr>
-            <a:r>
-              <a:rPr lang="en-US" sz="1408" b="1" dirty="0">
-                <a:solidFill>
-                  <a:srgbClr val="1A1D24"/>
+            <a:pPr indent="0" marL="0">
+              <a:buNone/>
+            </a:pPr>
+            <a:r>
+              <a:rPr lang="en-US" sz="1500" i="1" dirty="0">
+                <a:solidFill>
+                  <a:srgbClr val="F5F3EE"/>
+                </a:solidFill>
+                <a:latin typeface="Segoe UI" pitchFamily="34" charset="0"/>
+                <a:ea typeface="Segoe UI" pitchFamily="34" charset="-122"/>
+                <a:cs typeface="Segoe UI" pitchFamily="34" charset="-120"/>
+              </a:rPr>
+              <a:t>"Je suis coincé à la gare de Casa-Voyageurs à 23h, qui peut m'héberger ?"</a:t>
+            </a:r>
+            <a:endParaRPr lang="en-US" sz="1500" dirty="0"/>
+          </a:p>
+        </p:txBody>
+      </p:sp>
+      <p:sp>
+        <p:nvSpPr>
+          <p:cNvPr id="27" name="Text 25"/>
+          <p:cNvSpPr/>
+          <p:nvPr/>
+        </p:nvSpPr>
+        <p:spPr>
+          <a:xfrm>
+            <a:off x="640080" y="6400800"/>
+            <a:ext cx="6400800" cy="274320"/>
+          </a:xfrm>
+          <a:prstGeom prst="rect">
+            <a:avLst/>
+          </a:prstGeom>
+          <a:noFill/>
+          <a:ln/>
+        </p:spPr>
+        <p:txBody>
+          <a:bodyPr wrap="square" rtlCol="0" anchor="ctr"/>
+          <a:lstStyle/>
+          <a:p>
+            <a:pPr indent="0" marL="0">
+              <a:buNone/>
+            </a:pPr>
+            <a:r>
+              <a:rPr lang="en-US" sz="1000" b="1" spc="100" kern="0" dirty="0">
+                <a:solidFill>
+                  <a:srgbClr val="A3ABBD"/>
                 </a:solidFill>
                 <a:latin typeface="Bahnschrift" pitchFamily="34" charset="0"/>
                 <a:ea typeface="Bahnschrift" pitchFamily="34" charset="-122"/>
                 <a:cs typeface="Bahnschrift" pitchFamily="34" charset="-120"/>
               </a:rPr>
-              <a:t>+</a:t>
-            </a:r>
-            <a:endParaRPr lang="en-US" sz="1408" dirty="0"/>
-          </a:p>
-        </p:txBody>
-      </p:sp>
-      <p:sp>
-        <p:nvSpPr>
-          <p:cNvPr id="25" name="Text 23"/>
-          <p:cNvSpPr/>
-          <p:nvPr/>
-        </p:nvSpPr>
-        <p:spPr>
-          <a:xfrm>
-            <a:off x="6553048" y="3675888"/>
-            <a:ext cx="4769968" cy="365760"/>
-          </a:xfrm>
-          <a:prstGeom prst="rect">
-            <a:avLst/>
-          </a:prstGeom>
-          <a:noFill/>
-          <a:ln/>
-        </p:spPr>
-        <p:txBody>
-          <a:bodyPr wrap="square" rtlCol="0" anchor="ctr"/>
-          <a:lstStyle/>
-          <a:p>
+              <a:t>CESTOMCLASH228  </a:t>
+            </a:r>
             <a:pPr indent="0" marL="0">
               <a:buNone/>
             </a:pPr>
             <a:r>
-              <a:rPr lang="en-US" sz="1300" b="1" dirty="0">
-                <a:solidFill>
-                  <a:srgbClr val="4CAF7D"/>
+              <a:rPr lang="en-US" sz="1000" spc="100" kern="0" dirty="0">
+                <a:solidFill>
+                  <a:srgbClr val="A3ABBD"/>
                 </a:solidFill>
                 <a:latin typeface="Bahnschrift" pitchFamily="34" charset="0"/>
                 <a:ea typeface="Bahnschrift" pitchFamily="34" charset="-122"/>
                 <a:cs typeface="Bahnschrift" pitchFamily="34" charset="-120"/>
               </a:rPr>
-              <a:t>Bounties + Notation</a:t>
-            </a:r>
-            <a:endParaRPr lang="en-US" sz="1300" dirty="0"/>
-          </a:p>
-        </p:txBody>
-      </p:sp>
-      <p:sp>
-        <p:nvSpPr>
-          <p:cNvPr id="26" name="Text 24"/>
-          <p:cNvSpPr/>
-          <p:nvPr/>
-        </p:nvSpPr>
-        <p:spPr>
-          <a:xfrm>
-            <a:off x="6553048" y="4041648"/>
-            <a:ext cx="4769968" cy="868680"/>
-          </a:xfrm>
-          <a:prstGeom prst="rect">
-            <a:avLst/>
-          </a:prstGeom>
-          <a:noFill/>
-          <a:ln/>
-        </p:spPr>
-        <p:txBody>
-          <a:bodyPr wrap="square" rtlCol="0" anchor="t"/>
-          <a:lstStyle/>
-          <a:p>
-            <a:pPr indent="0" marL="0">
-              <a:buNone/>
-            </a:pPr>
-            <a:r>
-              <a:rPr lang="en-US" sz="1050" dirty="0">
-                <a:solidFill>
-                  <a:srgbClr val="9CA3AF"/>
+              <a:t>· Explore. Partage. Level-up.</a:t>
+            </a:r>
+            <a:endParaRPr lang="en-US" sz="1000" dirty="0"/>
+          </a:p>
+        </p:txBody>
+      </p:sp>
+      <p:sp>
+        <p:nvSpPr>
+          <p:cNvPr id="28" name="Text 26"/>
+          <p:cNvSpPr/>
+          <p:nvPr/>
+        </p:nvSpPr>
+        <p:spPr>
+          <a:xfrm>
+            <a:off x="7894015" y="6400800"/>
+            <a:ext cx="3657600" cy="274320"/>
+          </a:xfrm>
+          <a:prstGeom prst="rect">
+            <a:avLst/>
+          </a:prstGeom>
+          <a:noFill/>
+          <a:ln/>
+        </p:spPr>
+        <p:txBody>
+          <a:bodyPr wrap="square" rtlCol="0" anchor="ctr"/>
+          <a:lstStyle/>
+          <a:p>
+            <a:pPr algn="r" indent="0" marL="0">
+              <a:buNone/>
+            </a:pPr>
+            <a:r>
+              <a:rPr lang="en-US" sz="1000" dirty="0">
+                <a:solidFill>
+                  <a:srgbClr val="A3ABBD"/>
                 </a:solidFill>
                 <a:latin typeface="Segoe UI" pitchFamily="34" charset="0"/>
                 <a:ea typeface="Segoe UI" pitchFamily="34" charset="-122"/>
                 <a:cs typeface="Segoe UI" pitchFamily="34" charset="-120"/>
               </a:rPr>
-              <a:t>Demande d'aide résolue → note publique (1-5) → réputation qui se construit dans la durée.</a:t>
-            </a:r>
-            <a:endParaRPr lang="en-US" sz="1050" dirty="0"/>
-          </a:p>
-        </p:txBody>
-      </p:sp>
-      <p:sp>
-        <p:nvSpPr>
-          <p:cNvPr id="27" name="Shape 25"/>
-          <p:cNvSpPr/>
-          <p:nvPr/>
-        </p:nvSpPr>
-        <p:spPr>
-          <a:xfrm>
-            <a:off x="640080" y="5166360"/>
-            <a:ext cx="5227168" cy="1417320"/>
-          </a:xfrm>
-          <a:prstGeom prst="roundRect">
-            <a:avLst>
-              <a:gd name="adj" fmla="val 4516"/>
-            </a:avLst>
-          </a:prstGeom>
-          <a:solidFill>
-            <a:srgbClr val="242832"/>
-          </a:solidFill>
-          <a:ln w="12700">
-            <a:solidFill>
-              <a:srgbClr val="E5484D"/>
-            </a:solidFill>
-            <a:prstDash val="solid"/>
-          </a:ln>
-        </p:spPr>
-      </p:sp>
-      <p:sp>
-        <p:nvSpPr>
-          <p:cNvPr id="28" name="Shape 26"/>
-          <p:cNvSpPr/>
-          <p:nvPr/>
-        </p:nvSpPr>
-        <p:spPr>
-          <a:xfrm>
-            <a:off x="5410048" y="5294376"/>
-            <a:ext cx="292608" cy="292608"/>
-          </a:xfrm>
-          <a:prstGeom prst="ellipse">
-            <a:avLst/>
-          </a:prstGeom>
-          <a:solidFill>
-            <a:srgbClr val="E5484D"/>
-          </a:solidFill>
-          <a:ln/>
-        </p:spPr>
-      </p:sp>
-      <p:sp>
-        <p:nvSpPr>
-          <p:cNvPr id="29" name="Text 27"/>
-          <p:cNvSpPr/>
-          <p:nvPr/>
-        </p:nvSpPr>
-        <p:spPr>
-          <a:xfrm>
-            <a:off x="5410048" y="5294376"/>
-            <a:ext cx="292608" cy="292608"/>
-          </a:xfrm>
-          <a:prstGeom prst="rect">
-            <a:avLst/>
-          </a:prstGeom>
-          <a:noFill/>
-          <a:ln/>
-        </p:spPr>
-        <p:txBody>
-          <a:bodyPr wrap="square" rtlCol="0" anchor="ctr"/>
-          <a:lstStyle/>
-          <a:p>
-            <a:pPr algn="ctr" indent="0" marL="0">
-              <a:buNone/>
-            </a:pPr>
-            <a:r>
-              <a:rPr lang="en-US" sz="1408" b="1" dirty="0">
-                <a:solidFill>
-                  <a:srgbClr val="1A1D24"/>
-                </a:solidFill>
-                <a:latin typeface="Bahnschrift" pitchFamily="34" charset="0"/>
-                <a:ea typeface="Bahnschrift" pitchFamily="34" charset="-122"/>
-                <a:cs typeface="Bahnschrift" pitchFamily="34" charset="-120"/>
-              </a:rPr>
-              <a:t>!</a:t>
-            </a:r>
-            <a:endParaRPr lang="en-US" sz="1408" dirty="0"/>
-          </a:p>
-        </p:txBody>
-      </p:sp>
-      <p:sp>
-        <p:nvSpPr>
-          <p:cNvPr id="30" name="Text 28"/>
-          <p:cNvSpPr/>
-          <p:nvPr/>
-        </p:nvSpPr>
-        <p:spPr>
-          <a:xfrm>
-            <a:off x="868680" y="5276088"/>
-            <a:ext cx="4769968" cy="365760"/>
-          </a:xfrm>
-          <a:prstGeom prst="rect">
-            <a:avLst/>
-          </a:prstGeom>
-          <a:noFill/>
-          <a:ln/>
-        </p:spPr>
-        <p:txBody>
-          <a:bodyPr wrap="square" rtlCol="0" anchor="ctr"/>
-          <a:lstStyle/>
-          <a:p>
-            <a:pPr indent="0" marL="0">
-              <a:buNone/>
-            </a:pPr>
-            <a:r>
-              <a:rPr lang="en-US" sz="1300" b="1" dirty="0">
-                <a:solidFill>
-                  <a:srgbClr val="E5484D"/>
-                </a:solidFill>
-                <a:latin typeface="Bahnschrift" pitchFamily="34" charset="0"/>
-                <a:ea typeface="Bahnschrift" pitchFamily="34" charset="-122"/>
-                <a:cs typeface="Bahnschrift" pitchFamily="34" charset="-120"/>
-              </a:rPr>
-              <a:t>Isolement à l'arrivée</a:t>
-            </a:r>
-            <a:endParaRPr lang="en-US" sz="1300" dirty="0"/>
-          </a:p>
-        </p:txBody>
-      </p:sp>
-      <p:sp>
-        <p:nvSpPr>
-          <p:cNvPr id="31" name="Text 29"/>
-          <p:cNvSpPr/>
-          <p:nvPr/>
-        </p:nvSpPr>
-        <p:spPr>
-          <a:xfrm>
-            <a:off x="868680" y="5641848"/>
-            <a:ext cx="4769968" cy="868680"/>
-          </a:xfrm>
-          <a:prstGeom prst="rect">
-            <a:avLst/>
-          </a:prstGeom>
-          <a:noFill/>
-          <a:ln/>
-        </p:spPr>
-        <p:txBody>
-          <a:bodyPr wrap="square" rtlCol="0" anchor="t"/>
-          <a:lstStyle/>
-          <a:p>
-            <a:pPr indent="0" marL="0">
-              <a:buNone/>
-            </a:pPr>
-            <a:r>
-              <a:rPr lang="en-US" sz="1050" dirty="0">
-                <a:solidFill>
-                  <a:srgbClr val="9CA3AF"/>
-                </a:solidFill>
-                <a:latin typeface="Segoe UI" pitchFamily="34" charset="0"/>
-                <a:ea typeface="Segoe UI" pitchFamily="34" charset="-122"/>
-                <a:cs typeface="Segoe UI" pitchFamily="34" charset="-120"/>
-              </a:rPr>
-              <a:t>Un nouvel arrivant manque des codes locaux essentiels au moment où il en a le plus besoin.</a:t>
-            </a:r>
-            <a:endParaRPr lang="en-US" sz="1050" dirty="0"/>
-          </a:p>
-        </p:txBody>
-      </p:sp>
-      <p:sp>
-        <p:nvSpPr>
-          <p:cNvPr id="32" name="Shape 30"/>
-          <p:cNvSpPr/>
-          <p:nvPr/>
-        </p:nvSpPr>
-        <p:spPr>
-          <a:xfrm>
-            <a:off x="6324448" y="5166360"/>
-            <a:ext cx="5227168" cy="1417320"/>
-          </a:xfrm>
-          <a:prstGeom prst="roundRect">
-            <a:avLst>
-              <a:gd name="adj" fmla="val 4516"/>
-            </a:avLst>
-          </a:prstGeom>
-          <a:solidFill>
-            <a:srgbClr val="242832"/>
-          </a:solidFill>
-          <a:ln w="12700">
-            <a:solidFill>
-              <a:srgbClr val="4CAF7D"/>
-            </a:solidFill>
-            <a:prstDash val="solid"/>
-          </a:ln>
-        </p:spPr>
-      </p:sp>
-      <p:sp>
-        <p:nvSpPr>
-          <p:cNvPr id="33" name="Shape 31"/>
-          <p:cNvSpPr/>
-          <p:nvPr/>
-        </p:nvSpPr>
-        <p:spPr>
-          <a:xfrm>
-            <a:off x="11094415" y="5294376"/>
-            <a:ext cx="292608" cy="292608"/>
-          </a:xfrm>
-          <a:prstGeom prst="ellipse">
-            <a:avLst/>
-          </a:prstGeom>
-          <a:solidFill>
-            <a:srgbClr val="4CAF7D"/>
-          </a:solidFill>
-          <a:ln/>
-        </p:spPr>
-      </p:sp>
-      <p:sp>
-        <p:nvSpPr>
-          <p:cNvPr id="34" name="Text 32"/>
-          <p:cNvSpPr/>
-          <p:nvPr/>
-        </p:nvSpPr>
-        <p:spPr>
-          <a:xfrm>
-            <a:off x="11094415" y="5294376"/>
-            <a:ext cx="292608" cy="292608"/>
-          </a:xfrm>
-          <a:prstGeom prst="rect">
-            <a:avLst/>
-          </a:prstGeom>
-          <a:noFill/>
-          <a:ln/>
-        </p:spPr>
-        <p:txBody>
-          <a:bodyPr wrap="square" rtlCol="0" anchor="ctr"/>
-          <a:lstStyle/>
-          <a:p>
-            <a:pPr algn="ctr" indent="0" marL="0">
-              <a:buNone/>
-            </a:pPr>
-            <a:r>
-              <a:rPr lang="en-US" sz="1408" b="1" dirty="0">
-                <a:solidFill>
-                  <a:srgbClr val="1A1D24"/>
-                </a:solidFill>
-                <a:latin typeface="Bahnschrift" pitchFamily="34" charset="0"/>
-                <a:ea typeface="Bahnschrift" pitchFamily="34" charset="-122"/>
-                <a:cs typeface="Bahnschrift" pitchFamily="34" charset="-120"/>
-              </a:rPr>
-              <a:t>+</a:t>
-            </a:r>
-            <a:endParaRPr lang="en-US" sz="1408" dirty="0"/>
-          </a:p>
-        </p:txBody>
-      </p:sp>
-      <p:sp>
-        <p:nvSpPr>
-          <p:cNvPr id="35" name="Text 33"/>
-          <p:cNvSpPr/>
-          <p:nvPr/>
-        </p:nvSpPr>
-        <p:spPr>
-          <a:xfrm>
-            <a:off x="6553048" y="5276088"/>
-            <a:ext cx="4769968" cy="365760"/>
-          </a:xfrm>
-          <a:prstGeom prst="rect">
-            <a:avLst/>
-          </a:prstGeom>
-          <a:noFill/>
-          <a:ln/>
-        </p:spPr>
-        <p:txBody>
-          <a:bodyPr wrap="square" rtlCol="0" anchor="ctr"/>
-          <a:lstStyle/>
-          <a:p>
-            <a:pPr indent="0" marL="0">
-              <a:buNone/>
-            </a:pPr>
-            <a:r>
-              <a:rPr lang="en-US" sz="1300" b="1" dirty="0">
-                <a:solidFill>
-                  <a:srgbClr val="4CAF7D"/>
-                </a:solidFill>
-                <a:latin typeface="Bahnschrift" pitchFamily="34" charset="0"/>
-                <a:ea typeface="Bahnschrift" pitchFamily="34" charset="-122"/>
-                <a:cs typeface="Bahnschrift" pitchFamily="34" charset="-120"/>
-              </a:rPr>
-              <a:t>Ancrage CESTOM</a:t>
-            </a:r>
-            <a:endParaRPr lang="en-US" sz="1300" dirty="0"/>
-          </a:p>
-        </p:txBody>
-      </p:sp>
-      <p:sp>
-        <p:nvSpPr>
-          <p:cNvPr id="36" name="Text 34"/>
-          <p:cNvSpPr/>
-          <p:nvPr/>
-        </p:nvSpPr>
-        <p:spPr>
-          <a:xfrm>
-            <a:off x="6553048" y="5641848"/>
-            <a:ext cx="4769968" cy="868680"/>
-          </a:xfrm>
-          <a:prstGeom prst="rect">
-            <a:avLst/>
-          </a:prstGeom>
-          <a:noFill/>
-          <a:ln/>
-        </p:spPr>
-        <p:txBody>
-          <a:bodyPr wrap="square" rtlCol="0" anchor="t"/>
-          <a:lstStyle/>
-          <a:p>
-            <a:pPr indent="0" marL="0">
-              <a:buNone/>
-            </a:pPr>
-            <a:r>
-              <a:rPr lang="en-US" sz="1050" dirty="0">
-                <a:solidFill>
-                  <a:srgbClr val="9CA3AF"/>
-                </a:solidFill>
-                <a:latin typeface="Segoe UI" pitchFamily="34" charset="0"/>
-                <a:ea typeface="Segoe UI" pitchFamily="34" charset="-122"/>
-                <a:cs typeface="Segoe UI" pitchFamily="34" charset="-120"/>
-              </a:rPr>
-              <a:t>Porté par une communauté déjà organisée sur le terrain — pas une app anonyme de plus.</a:t>
-            </a:r>
-            <a:endParaRPr lang="en-US" sz="1050" dirty="0"/>
-          </a:p>
-        </p:txBody>
-      </p:sp>
-      <p:sp>
-        <p:nvSpPr>
-          <p:cNvPr id="37" name="Text 35"/>
-          <p:cNvSpPr/>
-          <p:nvPr/>
-        </p:nvSpPr>
-        <p:spPr>
-          <a:xfrm>
-            <a:off x="640080" y="6400800"/>
-            <a:ext cx="6400800" cy="274320"/>
-          </a:xfrm>
-          <a:prstGeom prst="rect">
-            <a:avLst/>
-          </a:prstGeom>
-          <a:noFill/>
-          <a:ln/>
-        </p:spPr>
-        <p:txBody>
-          <a:bodyPr wrap="square" rtlCol="0" anchor="ctr"/>
-          <a:lstStyle/>
-          <a:p>
-            <a:pPr indent="0" marL="0">
-              <a:buNone/>
-            </a:pPr>
-            <a:r>
-              <a:rPr lang="en-US" sz="1000" b="1" spc="100" kern="0" dirty="0">
-                <a:solidFill>
-                  <a:srgbClr val="9CA3AF"/>
-                </a:solidFill>
-                <a:latin typeface="Bahnschrift" pitchFamily="34" charset="0"/>
-                <a:ea typeface="Bahnschrift" pitchFamily="34" charset="-122"/>
-                <a:cs typeface="Bahnschrift" pitchFamily="34" charset="-120"/>
-              </a:rPr>
-              <a:t>CESTOMCLASH228  </a:t>
-            </a:r>
-            <a:pPr indent="0" marL="0">
-              <a:buNone/>
-            </a:pPr>
-            <a:r>
-              <a:rPr lang="en-US" sz="1000" spc="100" kern="0" dirty="0">
-                <a:solidFill>
-                  <a:srgbClr val="9CA3AF"/>
-                </a:solidFill>
-                <a:latin typeface="Bahnschrift" pitchFamily="34" charset="0"/>
-                <a:ea typeface="Bahnschrift" pitchFamily="34" charset="-122"/>
-                <a:cs typeface="Bahnschrift" pitchFamily="34" charset="-120"/>
-              </a:rPr>
-              <a:t>· Explore. Partage. Level-up.</a:t>
-            </a:r>
-            <a:endParaRPr lang="en-US" sz="1000" dirty="0"/>
-          </a:p>
-        </p:txBody>
-      </p:sp>
-      <p:sp>
-        <p:nvSpPr>
-          <p:cNvPr id="38" name="Text 36"/>
-          <p:cNvSpPr/>
-          <p:nvPr/>
-        </p:nvSpPr>
-        <p:spPr>
-          <a:xfrm>
-            <a:off x="7894015" y="6400800"/>
-            <a:ext cx="3657600" cy="274320"/>
-          </a:xfrm>
-          <a:prstGeom prst="rect">
-            <a:avLst/>
-          </a:prstGeom>
-          <a:noFill/>
-          <a:ln/>
-        </p:spPr>
-        <p:txBody>
-          <a:bodyPr wrap="square" rtlCol="0" anchor="ctr"/>
-          <a:lstStyle/>
-          <a:p>
-            <a:pPr algn="r" indent="0" marL="0">
-              <a:buNone/>
-            </a:pPr>
-            <a:r>
-              <a:rPr lang="en-US" sz="1000" dirty="0">
-                <a:solidFill>
-                  <a:srgbClr val="9CA3AF"/>
-                </a:solidFill>
-                <a:latin typeface="Segoe UI" pitchFamily="34" charset="0"/>
-                <a:ea typeface="Segoe UI" pitchFamily="34" charset="-122"/>
-                <a:cs typeface="Segoe UI" pitchFamily="34" charset="-120"/>
-              </a:rPr>
-              <a:t>02 · Problème → Solution</a:t>
+              <a:t>02 · Problème</a:t>
             </a:r>
             <a:endParaRPr lang="en-US" sz="1000" dirty="0"/>
           </a:p>
@@ -2631,7 +2615,7 @@
     <p:bg>
       <p:bgPr>
         <a:solidFill>
-          <a:srgbClr val="1A1D24"/>
+          <a:srgbClr val="14161C"/>
         </a:solidFill>
       </p:bgPr>
     </p:bg>
@@ -2657,6 +2641,28 @@
         </p:nvSpPr>
         <p:spPr>
           <a:xfrm>
+            <a:off x="11002975" y="2377440"/>
+            <a:ext cx="3291840" cy="3291840"/>
+          </a:xfrm>
+          <a:prstGeom prst="ellipse">
+            <a:avLst/>
+          </a:prstGeom>
+          <a:solidFill>
+            <a:srgbClr val="2FE894">
+              <a:alpha val="8000"/>
+            </a:srgbClr>
+          </a:solidFill>
+          <a:ln/>
+        </p:spPr>
+      </p:sp>
+      <p:sp>
+        <p:nvSpPr>
+          <p:cNvPr id="3" name="Shape 1"/>
+          <p:cNvSpPr/>
+          <p:nvPr/>
+        </p:nvSpPr>
+        <p:spPr>
+          <a:xfrm>
             <a:off x="640080" y="502920"/>
             <a:ext cx="1005840" cy="54864"/>
           </a:xfrm>
@@ -2668,7 +2674,7 @@
       </p:sp>
       <p:sp>
         <p:nvSpPr>
-          <p:cNvPr id="3" name="Text 1"/>
+          <p:cNvPr id="4" name="Text 2"/>
           <p:cNvSpPr/>
           <p:nvPr/>
         </p:nvSpPr>
@@ -2691,23 +2697,23 @@
               <a:buNone/>
             </a:pPr>
             <a:r>
-              <a:rPr lang="en-US" sz="2800" b="1" dirty="0">
-                <a:solidFill>
-                  <a:srgbClr val="F4F1EC"/>
+              <a:rPr lang="en-US" sz="2700" b="1" dirty="0">
+                <a:solidFill>
+                  <a:srgbClr val="F5F3EE"/>
                 </a:solidFill>
                 <a:latin typeface="Bahnschrift" pitchFamily="34" charset="0"/>
                 <a:ea typeface="Bahnschrift" pitchFamily="34" charset="-122"/>
                 <a:cs typeface="Bahnschrift" pitchFamily="34" charset="-120"/>
               </a:rPr>
-              <a:t>Modèle économique : l'impact d'abord, prouvé dès le jour 1</a:t>
-            </a:r>
-            <a:endParaRPr lang="en-US" sz="2800" dirty="0"/>
-          </a:p>
-        </p:txBody>
-      </p:sp>
-      <p:sp>
-        <p:nvSpPr>
-          <p:cNvPr id="4" name="Text 2"/>
+              <a:t>Notre réponse directe</a:t>
+            </a:r>
+            <a:endParaRPr lang="en-US" sz="2700" dirty="0"/>
+          </a:p>
+        </p:txBody>
+      </p:sp>
+      <p:sp>
+        <p:nvSpPr>
+          <p:cNvPr id="5" name="Text 3"/>
           <p:cNvSpPr/>
           <p:nvPr/>
         </p:nvSpPr>
@@ -2732,13 +2738,13 @@
             <a:r>
               <a:rPr lang="en-US" sz="1300" dirty="0">
                 <a:solidFill>
-                  <a:srgbClr val="9CA3AF"/>
+                  <a:srgbClr val="A3ABBD"/>
                 </a:solidFill>
                 <a:latin typeface="Segoe UI" pitchFamily="34" charset="0"/>
                 <a:ea typeface="Segoe UI" pitchFamily="34" charset="-122"/>
                 <a:cs typeface="Segoe UI" pitchFamily="34" charset="-120"/>
               </a:rPr>
-              <a:t>Pas de bénévolat — un flux monétaire construit dès la version présentée au concours</a:t>
+              <a:t>Chaque problème identifié a une réponse produit concrète, déjà en code — pas un vœu pieux</a:t>
             </a:r>
             <a:endParaRPr lang="en-US" sz="1300" dirty="0"/>
           </a:p>
@@ -2746,7 +2752,7 @@
       </p:sp>
       <p:sp>
         <p:nvSpPr>
-          <p:cNvPr id="5" name="Text 3"/>
+          <p:cNvPr id="6" name="Text 4"/>
           <p:cNvSpPr/>
           <p:nvPr/>
         </p:nvSpPr>
@@ -2771,7 +2777,7 @@
             <a:r>
               <a:rPr lang="en-US" sz="1100" b="1" spc="100" kern="0" dirty="0">
                 <a:solidFill>
-                  <a:srgbClr val="9CA3AF"/>
+                  <a:srgbClr val="A3ABBD"/>
                 </a:solidFill>
                 <a:latin typeface="Bahnschrift" pitchFamily="34" charset="0"/>
                 <a:ea typeface="Bahnschrift" pitchFamily="34" charset="-122"/>
@@ -2785,54 +2791,96 @@
       </p:sp>
       <p:sp>
         <p:nvSpPr>
-          <p:cNvPr id="6" name="Shape 4"/>
-          <p:cNvSpPr/>
-          <p:nvPr/>
-        </p:nvSpPr>
-        <p:spPr>
-          <a:xfrm>
-            <a:off x="640080" y="1965960"/>
-            <a:ext cx="3454298" cy="54864"/>
-          </a:xfrm>
-          <a:prstGeom prst="rect">
-            <a:avLst/>
-          </a:prstGeom>
-          <a:solidFill>
-            <a:srgbClr val="F2C14E"/>
-          </a:solidFill>
-          <a:ln/>
-        </p:spPr>
-      </p:sp>
-      <p:sp>
-        <p:nvSpPr>
           <p:cNvPr id="7" name="Shape 5"/>
           <p:cNvSpPr/>
           <p:nvPr/>
         </p:nvSpPr>
         <p:spPr>
           <a:xfrm>
-            <a:off x="3765194" y="2084832"/>
-            <a:ext cx="274320" cy="274320"/>
+            <a:off x="640080" y="2057400"/>
+            <a:ext cx="3454298" cy="1965960"/>
+          </a:xfrm>
+          <a:prstGeom prst="roundRect">
+            <a:avLst>
+              <a:gd name="adj" fmla="val 3256"/>
+            </a:avLst>
+          </a:prstGeom>
+          <a:ln w="12700">
+            <a:solidFill>
+              <a:srgbClr val="2FE894">
+                <a:alpha val="70000"/>
+              </a:srgbClr>
+            </a:solidFill>
+            <a:prstDash val="solid"/>
+          </a:ln>
+          <a:effectLst>
+            <a:outerShdw sx="100000" sy="100000" kx="0" ky="0" algn="bl" rotWithShape="0" blurRad="101600" dist="50800" dir="16200000">
+              <a:srgbClr val="2FE894">
+                <a:alpha val="28000"/>
+              </a:srgbClr>
+            </a:outerShdw>
+          </a:effectLst>
+        </p:spPr>
+      </p:sp>
+      <p:sp>
+        <p:nvSpPr>
+          <p:cNvPr id="8" name="Shape 6"/>
+          <p:cNvSpPr/>
+          <p:nvPr/>
+        </p:nvSpPr>
+        <p:spPr>
+          <a:xfrm>
+            <a:off x="832744" y="2066544"/>
+            <a:ext cx="3068970" cy="18288"/>
+          </a:xfrm>
+          <a:prstGeom prst="rect">
+            <a:avLst/>
+          </a:prstGeom>
+          <a:solidFill>
+            <a:srgbClr val="2FE894">
+              <a:alpha val="65000"/>
+            </a:srgbClr>
+          </a:solidFill>
+          <a:ln/>
+        </p:spPr>
+      </p:sp>
+      <p:sp>
+        <p:nvSpPr>
+          <p:cNvPr id="9" name="Shape 7"/>
+          <p:cNvSpPr/>
+          <p:nvPr/>
+        </p:nvSpPr>
+        <p:spPr>
+          <a:xfrm>
+            <a:off x="3692042" y="2203704"/>
+            <a:ext cx="292608" cy="292608"/>
           </a:xfrm>
           <a:prstGeom prst="ellipse">
             <a:avLst/>
           </a:prstGeom>
           <a:solidFill>
-            <a:srgbClr val="F2C14E"/>
-          </a:solidFill>
-          <a:ln/>
-        </p:spPr>
-      </p:sp>
-      <p:sp>
-        <p:nvSpPr>
-          <p:cNvPr id="8" name="Text 6"/>
-          <p:cNvSpPr/>
-          <p:nvPr/>
-        </p:nvSpPr>
-        <p:spPr>
-          <a:xfrm>
-            <a:off x="3765194" y="2084832"/>
-            <a:ext cx="274320" cy="274320"/>
+            <a:srgbClr val="2FE894"/>
+          </a:solidFill>
+          <a:ln/>
+          <a:effectLst>
+            <a:outerShdw sx="100000" sy="100000" kx="0" ky="0" algn="bl" rotWithShape="0" blurRad="76200" dist="50800" dir="16200000">
+              <a:srgbClr val="2FE894">
+                <a:alpha val="50000"/>
+              </a:srgbClr>
+            </a:outerShdw>
+          </a:effectLst>
+        </p:spPr>
+      </p:sp>
+      <p:sp>
+        <p:nvSpPr>
+          <p:cNvPr id="10" name="Text 8"/>
+          <p:cNvSpPr/>
+          <p:nvPr/>
+        </p:nvSpPr>
+        <p:spPr>
+          <a:xfrm>
+            <a:off x="3692042" y="2203704"/>
+            <a:ext cx="292608" cy="292608"/>
           </a:xfrm>
           <a:prstGeom prst="rect">
             <a:avLst/>
@@ -2848,108 +2896,271 @@
               <a:buNone/>
             </a:pPr>
             <a:r>
-              <a:rPr lang="en-US" sz="1320" b="1" dirty="0">
-                <a:solidFill>
-                  <a:srgbClr val="1A1D24"/>
+              <a:rPr lang="en-US" sz="1408" b="1" dirty="0">
+                <a:solidFill>
+                  <a:srgbClr val="14161C"/>
                 </a:solidFill>
                 <a:latin typeface="Bahnschrift" pitchFamily="34" charset="0"/>
                 <a:ea typeface="Bahnschrift" pitchFamily="34" charset="-122"/>
                 <a:cs typeface="Bahnschrift" pitchFamily="34" charset="-120"/>
               </a:rPr>
-              <a:t>1</a:t>
-            </a:r>
-            <a:endParaRPr lang="en-US" sz="1320" dirty="0"/>
-          </a:p>
-        </p:txBody>
-      </p:sp>
-      <p:sp>
-        <p:nvSpPr>
-          <p:cNvPr id="9" name="Text 7"/>
-          <p:cNvSpPr/>
-          <p:nvPr/>
-        </p:nvSpPr>
-        <p:spPr>
-          <a:xfrm>
-            <a:off x="640080" y="2103120"/>
-            <a:ext cx="3088538" cy="274320"/>
-          </a:xfrm>
-          <a:prstGeom prst="rect">
-            <a:avLst/>
-          </a:prstGeom>
-          <a:noFill/>
-          <a:ln/>
-        </p:spPr>
-        <p:txBody>
-          <a:bodyPr wrap="square" rtlCol="0" anchor="ctr"/>
+              <a:t>+</a:t>
+            </a:r>
+            <a:endParaRPr lang="en-US" sz="1408" dirty="0"/>
+          </a:p>
+        </p:txBody>
+      </p:sp>
+      <p:sp>
+        <p:nvSpPr>
+          <p:cNvPr id="11" name="Text 9"/>
+          <p:cNvSpPr/>
+          <p:nvPr/>
+        </p:nvSpPr>
+        <p:spPr>
+          <a:xfrm>
+            <a:off x="868680" y="2203704"/>
+            <a:ext cx="2905658" cy="502920"/>
+          </a:xfrm>
+          <a:prstGeom prst="rect">
+            <a:avLst/>
+          </a:prstGeom>
+          <a:noFill/>
+          <a:ln/>
+        </p:spPr>
+        <p:txBody>
+          <a:bodyPr wrap="square" rtlCol="0" anchor="t"/>
           <a:lstStyle/>
           <a:p>
             <a:pPr indent="0" marL="0">
               <a:buNone/>
             </a:pPr>
             <a:r>
-              <a:rPr lang="en-US" sz="1000" dirty="0">
-                <a:solidFill>
-                  <a:srgbClr val="F2C14E"/>
+              <a:rPr lang="en-US" sz="1350" b="1" dirty="0">
+                <a:solidFill>
+                  <a:srgbClr val="2FE894"/>
+                </a:solidFill>
+                <a:latin typeface="Bahnschrift" pitchFamily="34" charset="0"/>
+                <a:ea typeface="Bahnschrift" pitchFamily="34" charset="-122"/>
+                <a:cs typeface="Bahnschrift" pitchFamily="34" charset="-120"/>
+              </a:rPr>
+              <a:t>Carte par ville + Pins</a:t>
+            </a:r>
+            <a:endParaRPr lang="en-US" sz="1350" dirty="0"/>
+          </a:p>
+        </p:txBody>
+      </p:sp>
+      <p:sp>
+        <p:nvSpPr>
+          <p:cNvPr id="12" name="Text 10"/>
+          <p:cNvSpPr/>
+          <p:nvPr/>
+        </p:nvSpPr>
+        <p:spPr>
+          <a:xfrm>
+            <a:off x="868680" y="2679192"/>
+            <a:ext cx="2997098" cy="1188720"/>
+          </a:xfrm>
+          <a:prstGeom prst="rect">
+            <a:avLst/>
+          </a:prstGeom>
+          <a:noFill/>
+          <a:ln/>
+        </p:spPr>
+        <p:txBody>
+          <a:bodyPr wrap="square" rtlCol="0" anchor="t"/>
+          <a:lstStyle/>
+          <a:p>
+            <a:pPr indent="0" marL="0">
+              <a:lnSpc>
+                <a:spcPct val="125000"/>
+              </a:lnSpc>
+              <a:buNone/>
+            </a:pPr>
+            <a:r>
+              <a:rPr lang="en-US" sz="1100" dirty="0">
+                <a:solidFill>
+                  <a:srgbClr val="A3ABBD"/>
                 </a:solidFill>
                 <a:latin typeface="Segoe UI" pitchFamily="34" charset="0"/>
                 <a:ea typeface="Segoe UI" pitchFamily="34" charset="-122"/>
                 <a:cs typeface="Segoe UI" pitchFamily="34" charset="-120"/>
               </a:rPr>
-              <a:t>Phase 1 — Maintenant</a:t>
-            </a:r>
-            <a:endParaRPr lang="en-US" sz="1000" dirty="0"/>
-          </a:p>
-        </p:txBody>
-      </p:sp>
-      <p:sp>
-        <p:nvSpPr>
-          <p:cNvPr id="10" name="Text 8"/>
-          <p:cNvSpPr/>
-          <p:nvPr/>
-        </p:nvSpPr>
-        <p:spPr>
-          <a:xfrm>
-            <a:off x="640080" y="2377440"/>
-            <a:ext cx="3454298" cy="594360"/>
-          </a:xfrm>
-          <a:prstGeom prst="rect">
-            <a:avLst/>
-          </a:prstGeom>
-          <a:noFill/>
-          <a:ln/>
-        </p:spPr>
-        <p:txBody>
-          <a:bodyPr wrap="square" rtlCol="0" anchor="t"/>
-          <a:lstStyle/>
-          <a:p>
-            <a:pPr indent="0" marL="0">
-              <a:buNone/>
-            </a:pPr>
-            <a:r>
-              <a:rPr lang="en-US" sz="1400" b="1" dirty="0">
-                <a:solidFill>
-                  <a:srgbClr val="F4F1EC"/>
+              <a:t>Informations pratiques persistantes, consultables par tous, ancrées à un lieu précis.</a:t>
+            </a:r>
+            <a:endParaRPr lang="en-US" sz="1100" dirty="0"/>
+          </a:p>
+        </p:txBody>
+      </p:sp>
+      <p:sp>
+        <p:nvSpPr>
+          <p:cNvPr id="13" name="Shape 11"/>
+          <p:cNvSpPr/>
+          <p:nvPr/>
+        </p:nvSpPr>
+        <p:spPr>
+          <a:xfrm>
+            <a:off x="4368698" y="2057400"/>
+            <a:ext cx="3454298" cy="1965960"/>
+          </a:xfrm>
+          <a:prstGeom prst="roundRect">
+            <a:avLst>
+              <a:gd name="adj" fmla="val 3256"/>
+            </a:avLst>
+          </a:prstGeom>
+          <a:ln w="12700">
+            <a:solidFill>
+              <a:srgbClr val="2FE894">
+                <a:alpha val="70000"/>
+              </a:srgbClr>
+            </a:solidFill>
+            <a:prstDash val="solid"/>
+          </a:ln>
+          <a:effectLst>
+            <a:outerShdw sx="100000" sy="100000" kx="0" ky="0" algn="bl" rotWithShape="0" blurRad="101600" dist="50800" dir="16200000">
+              <a:srgbClr val="2FE894">
+                <a:alpha val="28000"/>
+              </a:srgbClr>
+            </a:outerShdw>
+          </a:effectLst>
+        </p:spPr>
+      </p:sp>
+      <p:sp>
+        <p:nvSpPr>
+          <p:cNvPr id="14" name="Shape 12"/>
+          <p:cNvSpPr/>
+          <p:nvPr/>
+        </p:nvSpPr>
+        <p:spPr>
+          <a:xfrm>
+            <a:off x="4561362" y="2066544"/>
+            <a:ext cx="3068970" cy="18288"/>
+          </a:xfrm>
+          <a:prstGeom prst="rect">
+            <a:avLst/>
+          </a:prstGeom>
+          <a:solidFill>
+            <a:srgbClr val="2FE894">
+              <a:alpha val="65000"/>
+            </a:srgbClr>
+          </a:solidFill>
+          <a:ln/>
+        </p:spPr>
+      </p:sp>
+      <p:sp>
+        <p:nvSpPr>
+          <p:cNvPr id="15" name="Shape 13"/>
+          <p:cNvSpPr/>
+          <p:nvPr/>
+        </p:nvSpPr>
+        <p:spPr>
+          <a:xfrm>
+            <a:off x="7420661" y="2203704"/>
+            <a:ext cx="292608" cy="292608"/>
+          </a:xfrm>
+          <a:prstGeom prst="ellipse">
+            <a:avLst/>
+          </a:prstGeom>
+          <a:solidFill>
+            <a:srgbClr val="2FE894"/>
+          </a:solidFill>
+          <a:ln/>
+          <a:effectLst>
+            <a:outerShdw sx="100000" sy="100000" kx="0" ky="0" algn="bl" rotWithShape="0" blurRad="76200" dist="50800" dir="16200000">
+              <a:srgbClr val="2FE894">
+                <a:alpha val="50000"/>
+              </a:srgbClr>
+            </a:outerShdw>
+          </a:effectLst>
+        </p:spPr>
+      </p:sp>
+      <p:sp>
+        <p:nvSpPr>
+          <p:cNvPr id="16" name="Text 14"/>
+          <p:cNvSpPr/>
+          <p:nvPr/>
+        </p:nvSpPr>
+        <p:spPr>
+          <a:xfrm>
+            <a:off x="7420661" y="2203704"/>
+            <a:ext cx="292608" cy="292608"/>
+          </a:xfrm>
+          <a:prstGeom prst="rect">
+            <a:avLst/>
+          </a:prstGeom>
+          <a:noFill/>
+          <a:ln/>
+        </p:spPr>
+        <p:txBody>
+          <a:bodyPr wrap="square" rtlCol="0" anchor="ctr"/>
+          <a:lstStyle/>
+          <a:p>
+            <a:pPr algn="ctr" indent="0" marL="0">
+              <a:buNone/>
+            </a:pPr>
+            <a:r>
+              <a:rPr lang="en-US" sz="1408" b="1" dirty="0">
+                <a:solidFill>
+                  <a:srgbClr val="14161C"/>
                 </a:solidFill>
                 <a:latin typeface="Bahnschrift" pitchFamily="34" charset="0"/>
                 <a:ea typeface="Bahnschrift" pitchFamily="34" charset="-122"/>
                 <a:cs typeface="Bahnschrift" pitchFamily="34" charset="-120"/>
               </a:rPr>
-              <a:t>Sponsoring vérifié</a:t>
-            </a:r>
-            <a:endParaRPr lang="en-US" sz="1400" dirty="0"/>
-          </a:p>
-        </p:txBody>
-      </p:sp>
-      <p:sp>
-        <p:nvSpPr>
-          <p:cNvPr id="11" name="Text 9"/>
-          <p:cNvSpPr/>
-          <p:nvPr/>
-        </p:nvSpPr>
-        <p:spPr>
-          <a:xfrm>
-            <a:off x="640080" y="3017520"/>
-            <a:ext cx="3454298" cy="1554480"/>
+              <a:t>+</a:t>
+            </a:r>
+            <a:endParaRPr lang="en-US" sz="1408" dirty="0"/>
+          </a:p>
+        </p:txBody>
+      </p:sp>
+      <p:sp>
+        <p:nvSpPr>
+          <p:cNvPr id="17" name="Text 15"/>
+          <p:cNvSpPr/>
+          <p:nvPr/>
+        </p:nvSpPr>
+        <p:spPr>
+          <a:xfrm>
+            <a:off x="4597298" y="2203704"/>
+            <a:ext cx="2905658" cy="502920"/>
+          </a:xfrm>
+          <a:prstGeom prst="rect">
+            <a:avLst/>
+          </a:prstGeom>
+          <a:noFill/>
+          <a:ln/>
+        </p:spPr>
+        <p:txBody>
+          <a:bodyPr wrap="square" rtlCol="0" anchor="t"/>
+          <a:lstStyle/>
+          <a:p>
+            <a:pPr indent="0" marL="0">
+              <a:buNone/>
+            </a:pPr>
+            <a:r>
+              <a:rPr lang="en-US" sz="1350" b="1" dirty="0">
+                <a:solidFill>
+                  <a:srgbClr val="2FE894"/>
+                </a:solidFill>
+                <a:latin typeface="Bahnschrift" pitchFamily="34" charset="0"/>
+                <a:ea typeface="Bahnschrift" pitchFamily="34" charset="-122"/>
+                <a:cs typeface="Bahnschrift" pitchFamily="34" charset="-120"/>
+              </a:rPr>
+              <a:t>Bounties + Notation</a:t>
+            </a:r>
+            <a:endParaRPr lang="en-US" sz="1350" dirty="0"/>
+          </a:p>
+        </p:txBody>
+      </p:sp>
+      <p:sp>
+        <p:nvSpPr>
+          <p:cNvPr id="18" name="Text 16"/>
+          <p:cNvSpPr/>
+          <p:nvPr/>
+        </p:nvSpPr>
+        <p:spPr>
+          <a:xfrm>
+            <a:off x="4597298" y="2679192"/>
+            <a:ext cx="2997098" cy="1188720"/>
           </a:xfrm>
           <a:prstGeom prst="rect">
             <a:avLst/>
@@ -2963,75 +3174,117 @@
           <a:p>
             <a:pPr indent="0" marL="0">
               <a:lnSpc>
-                <a:spcPct val="120000"/>
+                <a:spcPct val="125000"/>
               </a:lnSpc>
               <a:buNone/>
             </a:pPr>
             <a:r>
-              <a:rPr lang="en-US" sz="1050" dirty="0">
-                <a:solidFill>
-                  <a:srgbClr val="9CA3AF"/>
+              <a:rPr lang="en-US" sz="1100" dirty="0">
+                <a:solidFill>
+                  <a:srgbClr val="A3ABBD"/>
                 </a:solidFill>
                 <a:latin typeface="Segoe UI" pitchFamily="34" charset="0"/>
                 <a:ea typeface="Segoe UI" pitchFamily="34" charset="-122"/>
                 <a:cs typeface="Segoe UI" pitchFamily="34" charset="-120"/>
               </a:rPr>
-              <a:t>Un acteur qui veut un privilège (Pin mis en avant) fait un virement réel vers un compte CESTOM dédié, soumet une preuve dans l'app, un vérificateur valide. 0 % prélevé par une passerelle de paiement tierce — tout reste dans le circuit CESTOM.</a:t>
-            </a:r>
-            <a:endParaRPr lang="en-US" sz="1050" dirty="0"/>
-          </a:p>
-        </p:txBody>
-      </p:sp>
-      <p:sp>
-        <p:nvSpPr>
-          <p:cNvPr id="12" name="Shape 10"/>
-          <p:cNvSpPr/>
-          <p:nvPr/>
-        </p:nvSpPr>
-        <p:spPr>
-          <a:xfrm>
-            <a:off x="4368698" y="1965960"/>
-            <a:ext cx="3454298" cy="54864"/>
-          </a:xfrm>
-          <a:prstGeom prst="rect">
-            <a:avLst/>
-          </a:prstGeom>
-          <a:solidFill>
-            <a:srgbClr val="7DD3E0"/>
-          </a:solidFill>
-          <a:ln/>
-        </p:spPr>
-      </p:sp>
-      <p:sp>
-        <p:nvSpPr>
-          <p:cNvPr id="13" name="Shape 11"/>
-          <p:cNvSpPr/>
-          <p:nvPr/>
-        </p:nvSpPr>
-        <p:spPr>
-          <a:xfrm>
-            <a:off x="7493813" y="2084832"/>
-            <a:ext cx="274320" cy="274320"/>
+              <a:t>Demande d'aide résolue → note publique (1-5) → réputation qui se construit dans la durée.</a:t>
+            </a:r>
+            <a:endParaRPr lang="en-US" sz="1100" dirty="0"/>
+          </a:p>
+        </p:txBody>
+      </p:sp>
+      <p:sp>
+        <p:nvSpPr>
+          <p:cNvPr id="19" name="Shape 17"/>
+          <p:cNvSpPr/>
+          <p:nvPr/>
+        </p:nvSpPr>
+        <p:spPr>
+          <a:xfrm>
+            <a:off x="8097317" y="2057400"/>
+            <a:ext cx="3454298" cy="1965960"/>
+          </a:xfrm>
+          <a:prstGeom prst="roundRect">
+            <a:avLst>
+              <a:gd name="adj" fmla="val 3256"/>
+            </a:avLst>
+          </a:prstGeom>
+          <a:ln w="12700">
+            <a:solidFill>
+              <a:srgbClr val="2FE894">
+                <a:alpha val="70000"/>
+              </a:srgbClr>
+            </a:solidFill>
+            <a:prstDash val="solid"/>
+          </a:ln>
+          <a:effectLst>
+            <a:outerShdw sx="100000" sy="100000" kx="0" ky="0" algn="bl" rotWithShape="0" blurRad="101600" dist="50800" dir="16200000">
+              <a:srgbClr val="2FE894">
+                <a:alpha val="28000"/>
+              </a:srgbClr>
+            </a:outerShdw>
+          </a:effectLst>
+        </p:spPr>
+      </p:sp>
+      <p:sp>
+        <p:nvSpPr>
+          <p:cNvPr id="20" name="Shape 18"/>
+          <p:cNvSpPr/>
+          <p:nvPr/>
+        </p:nvSpPr>
+        <p:spPr>
+          <a:xfrm>
+            <a:off x="8289981" y="2066544"/>
+            <a:ext cx="3068970" cy="18288"/>
+          </a:xfrm>
+          <a:prstGeom prst="rect">
+            <a:avLst/>
+          </a:prstGeom>
+          <a:solidFill>
+            <a:srgbClr val="2FE894">
+              <a:alpha val="65000"/>
+            </a:srgbClr>
+          </a:solidFill>
+          <a:ln/>
+        </p:spPr>
+      </p:sp>
+      <p:sp>
+        <p:nvSpPr>
+          <p:cNvPr id="21" name="Shape 19"/>
+          <p:cNvSpPr/>
+          <p:nvPr/>
+        </p:nvSpPr>
+        <p:spPr>
+          <a:xfrm>
+            <a:off x="11149279" y="2203704"/>
+            <a:ext cx="292608" cy="292608"/>
           </a:xfrm>
           <a:prstGeom prst="ellipse">
             <a:avLst/>
           </a:prstGeom>
           <a:solidFill>
-            <a:srgbClr val="7DD3E0"/>
-          </a:solidFill>
-          <a:ln/>
-        </p:spPr>
-      </p:sp>
-      <p:sp>
-        <p:nvSpPr>
-          <p:cNvPr id="14" name="Text 12"/>
-          <p:cNvSpPr/>
-          <p:nvPr/>
-        </p:nvSpPr>
-        <p:spPr>
-          <a:xfrm>
-            <a:off x="7493813" y="2084832"/>
-            <a:ext cx="274320" cy="274320"/>
+            <a:srgbClr val="2FE894"/>
+          </a:solidFill>
+          <a:ln/>
+          <a:effectLst>
+            <a:outerShdw sx="100000" sy="100000" kx="0" ky="0" algn="bl" rotWithShape="0" blurRad="76200" dist="50800" dir="16200000">
+              <a:srgbClr val="2FE894">
+                <a:alpha val="50000"/>
+              </a:srgbClr>
+            </a:outerShdw>
+          </a:effectLst>
+        </p:spPr>
+      </p:sp>
+      <p:sp>
+        <p:nvSpPr>
+          <p:cNvPr id="22" name="Text 20"/>
+          <p:cNvSpPr/>
+          <p:nvPr/>
+        </p:nvSpPr>
+        <p:spPr>
+          <a:xfrm>
+            <a:off x="11149279" y="2203704"/>
+            <a:ext cx="292608" cy="292608"/>
           </a:xfrm>
           <a:prstGeom prst="rect">
             <a:avLst/>
@@ -3047,135 +3300,496 @@
               <a:buNone/>
             </a:pPr>
             <a:r>
-              <a:rPr lang="en-US" sz="1320" b="1" dirty="0">
-                <a:solidFill>
-                  <a:srgbClr val="1A1D24"/>
+              <a:rPr lang="en-US" sz="1408" b="1" dirty="0">
+                <a:solidFill>
+                  <a:srgbClr val="14161C"/>
                 </a:solidFill>
                 <a:latin typeface="Bahnschrift" pitchFamily="34" charset="0"/>
                 <a:ea typeface="Bahnschrift" pitchFamily="34" charset="-122"/>
                 <a:cs typeface="Bahnschrift" pitchFamily="34" charset="-120"/>
               </a:rPr>
-              <a:t>2</a:t>
-            </a:r>
-            <a:endParaRPr lang="en-US" sz="1320" dirty="0"/>
-          </a:p>
-        </p:txBody>
-      </p:sp>
-      <p:sp>
-        <p:nvSpPr>
-          <p:cNvPr id="15" name="Text 13"/>
-          <p:cNvSpPr/>
-          <p:nvPr/>
-        </p:nvSpPr>
-        <p:spPr>
-          <a:xfrm>
-            <a:off x="4368698" y="2103120"/>
-            <a:ext cx="3088538" cy="274320"/>
-          </a:xfrm>
-          <a:prstGeom prst="rect">
-            <a:avLst/>
-          </a:prstGeom>
-          <a:noFill/>
-          <a:ln/>
-        </p:spPr>
-        <p:txBody>
-          <a:bodyPr wrap="square" rtlCol="0" anchor="ctr"/>
+              <a:t>+</a:t>
+            </a:r>
+            <a:endParaRPr lang="en-US" sz="1408" dirty="0"/>
+          </a:p>
+        </p:txBody>
+      </p:sp>
+      <p:sp>
+        <p:nvSpPr>
+          <p:cNvPr id="23" name="Text 21"/>
+          <p:cNvSpPr/>
+          <p:nvPr/>
+        </p:nvSpPr>
+        <p:spPr>
+          <a:xfrm>
+            <a:off x="8325917" y="2203704"/>
+            <a:ext cx="2905658" cy="502920"/>
+          </a:xfrm>
+          <a:prstGeom prst="rect">
+            <a:avLst/>
+          </a:prstGeom>
+          <a:noFill/>
+          <a:ln/>
+        </p:spPr>
+        <p:txBody>
+          <a:bodyPr wrap="square" rtlCol="0" anchor="t"/>
           <a:lstStyle/>
           <a:p>
             <a:pPr indent="0" marL="0">
               <a:buNone/>
             </a:pPr>
             <a:r>
-              <a:rPr lang="en-US" sz="1000" dirty="0">
-                <a:solidFill>
-                  <a:srgbClr val="7DD3E0"/>
+              <a:rPr lang="en-US" sz="1350" b="1" dirty="0">
+                <a:solidFill>
+                  <a:srgbClr val="2FE894"/>
+                </a:solidFill>
+                <a:latin typeface="Bahnschrift" pitchFamily="34" charset="0"/>
+                <a:ea typeface="Bahnschrift" pitchFamily="34" charset="-122"/>
+                <a:cs typeface="Bahnschrift" pitchFamily="34" charset="-120"/>
+              </a:rPr>
+              <a:t>Ancrage CESTOM</a:t>
+            </a:r>
+            <a:endParaRPr lang="en-US" sz="1350" dirty="0"/>
+          </a:p>
+        </p:txBody>
+      </p:sp>
+      <p:sp>
+        <p:nvSpPr>
+          <p:cNvPr id="24" name="Text 22"/>
+          <p:cNvSpPr/>
+          <p:nvPr/>
+        </p:nvSpPr>
+        <p:spPr>
+          <a:xfrm>
+            <a:off x="8325917" y="2679192"/>
+            <a:ext cx="2997098" cy="1188720"/>
+          </a:xfrm>
+          <a:prstGeom prst="rect">
+            <a:avLst/>
+          </a:prstGeom>
+          <a:noFill/>
+          <a:ln/>
+        </p:spPr>
+        <p:txBody>
+          <a:bodyPr wrap="square" rtlCol="0" anchor="t"/>
+          <a:lstStyle/>
+          <a:p>
+            <a:pPr indent="0" marL="0">
+              <a:lnSpc>
+                <a:spcPct val="125000"/>
+              </a:lnSpc>
+              <a:buNone/>
+            </a:pPr>
+            <a:r>
+              <a:rPr lang="en-US" sz="1100" dirty="0">
+                <a:solidFill>
+                  <a:srgbClr val="A3ABBD"/>
                 </a:solidFill>
                 <a:latin typeface="Segoe UI" pitchFamily="34" charset="0"/>
                 <a:ea typeface="Segoe UI" pitchFamily="34" charset="-122"/>
                 <a:cs typeface="Segoe UI" pitchFamily="34" charset="-120"/>
               </a:rPr>
-              <a:t>Phase 2 — Après traction</a:t>
-            </a:r>
-            <a:endParaRPr lang="en-US" sz="1000" dirty="0"/>
-          </a:p>
-        </p:txBody>
-      </p:sp>
-      <p:sp>
-        <p:nvSpPr>
-          <p:cNvPr id="16" name="Text 14"/>
-          <p:cNvSpPr/>
-          <p:nvPr/>
-        </p:nvSpPr>
-        <p:spPr>
-          <a:xfrm>
-            <a:off x="4368698" y="2377440"/>
-            <a:ext cx="3454298" cy="594360"/>
-          </a:xfrm>
-          <a:prstGeom prst="rect">
-            <a:avLst/>
-          </a:prstGeom>
-          <a:noFill/>
-          <a:ln/>
-        </p:spPr>
-        <p:txBody>
-          <a:bodyPr wrap="square" rtlCol="0" anchor="t"/>
-          <a:lstStyle/>
-          <a:p>
-            <a:pPr indent="0" marL="0">
-              <a:buNone/>
-            </a:pPr>
-            <a:r>
-              <a:rPr lang="en-US" sz="1400" b="1" dirty="0">
-                <a:solidFill>
-                  <a:srgbClr val="F4F1EC"/>
+              <a:t>Porté par une communauté déjà organisée sur le terrain — pas une app anonyme de plus.</a:t>
+            </a:r>
+            <a:endParaRPr lang="en-US" sz="1100" dirty="0"/>
+          </a:p>
+        </p:txBody>
+      </p:sp>
+      <p:sp>
+        <p:nvSpPr>
+          <p:cNvPr id="25" name="Shape 23"/>
+          <p:cNvSpPr/>
+          <p:nvPr/>
+        </p:nvSpPr>
+        <p:spPr>
+          <a:xfrm>
+            <a:off x="2986888" y="4526280"/>
+            <a:ext cx="512064" cy="512064"/>
+          </a:xfrm>
+          <a:prstGeom prst="ellipse">
+            <a:avLst/>
+          </a:prstGeom>
+          <a:solidFill>
+            <a:srgbClr val="3FE0FF"/>
+          </a:solidFill>
+          <a:ln/>
+          <a:effectLst>
+            <a:outerShdw sx="100000" sy="100000" kx="0" ky="0" algn="bl" rotWithShape="0" blurRad="76200" dist="50800" dir="16200000">
+              <a:srgbClr val="3FE0FF">
+                <a:alpha val="50000"/>
+              </a:srgbClr>
+            </a:outerShdw>
+          </a:effectLst>
+        </p:spPr>
+      </p:sp>
+      <p:sp>
+        <p:nvSpPr>
+          <p:cNvPr id="26" name="Text 24"/>
+          <p:cNvSpPr/>
+          <p:nvPr/>
+        </p:nvSpPr>
+        <p:spPr>
+          <a:xfrm>
+            <a:off x="2986888" y="4526280"/>
+            <a:ext cx="512064" cy="512064"/>
+          </a:xfrm>
+          <a:prstGeom prst="rect">
+            <a:avLst/>
+          </a:prstGeom>
+          <a:noFill/>
+          <a:ln/>
+        </p:spPr>
+        <p:txBody>
+          <a:bodyPr wrap="square" rtlCol="0" anchor="ctr"/>
+          <a:lstStyle/>
+          <a:p>
+            <a:pPr algn="ctr" indent="0" marL="0">
+              <a:buNone/>
+            </a:pPr>
+            <a:r>
+              <a:rPr lang="en-US" sz="2464" b="1" dirty="0">
+                <a:solidFill>
+                  <a:srgbClr val="14161C"/>
                 </a:solidFill>
                 <a:latin typeface="Bahnschrift" pitchFamily="34" charset="0"/>
                 <a:ea typeface="Bahnschrift" pitchFamily="34" charset="-122"/>
                 <a:cs typeface="Bahnschrift" pitchFamily="34" charset="-120"/>
               </a:rPr>
-              <a:t>Commission sur services rendus</a:t>
-            </a:r>
-            <a:endParaRPr lang="en-US" sz="1400" dirty="0"/>
-          </a:p>
-        </p:txBody>
-      </p:sp>
-      <p:sp>
-        <p:nvSpPr>
-          <p:cNvPr id="17" name="Text 15"/>
-          <p:cNvSpPr/>
-          <p:nvPr/>
-        </p:nvSpPr>
-        <p:spPr>
-          <a:xfrm>
-            <a:off x="4368698" y="3017520"/>
-            <a:ext cx="3454298" cy="1554480"/>
-          </a:xfrm>
-          <a:prstGeom prst="rect">
-            <a:avLst/>
-          </a:prstGeom>
-          <a:noFill/>
-          <a:ln/>
-        </p:spPr>
-        <p:txBody>
-          <a:bodyPr wrap="square" rtlCol="0" anchor="t"/>
-          <a:lstStyle/>
-          <a:p>
-            <a:pPr indent="0" marL="0">
-              <a:lnSpc>
-                <a:spcPct val="120000"/>
-              </a:lnSpc>
+              <a:t>1</a:t>
+            </a:r>
+            <a:endParaRPr lang="en-US" sz="2464" dirty="0"/>
+          </a:p>
+        </p:txBody>
+      </p:sp>
+      <p:sp>
+        <p:nvSpPr>
+          <p:cNvPr id="27" name="Text 25"/>
+          <p:cNvSpPr/>
+          <p:nvPr/>
+        </p:nvSpPr>
+        <p:spPr>
+          <a:xfrm>
+            <a:off x="2255368" y="5111496"/>
+            <a:ext cx="1975104" cy="274320"/>
+          </a:xfrm>
+          <a:prstGeom prst="rect">
+            <a:avLst/>
+          </a:prstGeom>
+          <a:noFill/>
+          <a:ln/>
+        </p:spPr>
+        <p:txBody>
+          <a:bodyPr wrap="square" rtlCol="0" anchor="ctr"/>
+          <a:lstStyle/>
+          <a:p>
+            <a:pPr algn="ctr" indent="0" marL="0">
+              <a:buNone/>
+            </a:pPr>
+            <a:r>
+              <a:rPr lang="en-US" sz="1200" b="1" dirty="0">
+                <a:solidFill>
+                  <a:srgbClr val="F5F3EE"/>
+                </a:solidFill>
+                <a:latin typeface="Bahnschrift" pitchFamily="34" charset="0"/>
+                <a:ea typeface="Bahnschrift" pitchFamily="34" charset="-122"/>
+                <a:cs typeface="Bahnschrift" pitchFamily="34" charset="-120"/>
+              </a:rPr>
+              <a:t>Explore</a:t>
+            </a:r>
+            <a:endParaRPr lang="en-US" sz="1200" dirty="0"/>
+          </a:p>
+        </p:txBody>
+      </p:sp>
+      <p:sp>
+        <p:nvSpPr>
+          <p:cNvPr id="28" name="Shape 26"/>
+          <p:cNvSpPr/>
+          <p:nvPr/>
+        </p:nvSpPr>
+        <p:spPr>
+          <a:xfrm>
+            <a:off x="3498952" y="4782312"/>
+            <a:ext cx="2596896" cy="0"/>
+          </a:xfrm>
+          <a:prstGeom prst="line">
+            <a:avLst/>
+          </a:prstGeom>
+          <a:noFill/>
+          <a:ln w="19050">
+            <a:solidFill>
+              <a:srgbClr val="363C4C"/>
+            </a:solidFill>
+            <a:prstDash val="sysDot"/>
+          </a:ln>
+        </p:spPr>
+      </p:sp>
+      <p:sp>
+        <p:nvSpPr>
+          <p:cNvPr id="29" name="Shape 27"/>
+          <p:cNvSpPr/>
+          <p:nvPr/>
+        </p:nvSpPr>
+        <p:spPr>
+          <a:xfrm>
+            <a:off x="6095848" y="4526280"/>
+            <a:ext cx="512064" cy="512064"/>
+          </a:xfrm>
+          <a:prstGeom prst="ellipse">
+            <a:avLst/>
+          </a:prstGeom>
+          <a:solidFill>
+            <a:srgbClr val="FFC94D"/>
+          </a:solidFill>
+          <a:ln/>
+          <a:effectLst>
+            <a:outerShdw sx="100000" sy="100000" kx="0" ky="0" algn="bl" rotWithShape="0" blurRad="76200" dist="50800" dir="16200000">
+              <a:srgbClr val="FFC94D">
+                <a:alpha val="50000"/>
+              </a:srgbClr>
+            </a:outerShdw>
+          </a:effectLst>
+        </p:spPr>
+      </p:sp>
+      <p:sp>
+        <p:nvSpPr>
+          <p:cNvPr id="30" name="Text 28"/>
+          <p:cNvSpPr/>
+          <p:nvPr/>
+        </p:nvSpPr>
+        <p:spPr>
+          <a:xfrm>
+            <a:off x="6095848" y="4526280"/>
+            <a:ext cx="512064" cy="512064"/>
+          </a:xfrm>
+          <a:prstGeom prst="rect">
+            <a:avLst/>
+          </a:prstGeom>
+          <a:noFill/>
+          <a:ln/>
+        </p:spPr>
+        <p:txBody>
+          <a:bodyPr wrap="square" rtlCol="0" anchor="ctr"/>
+          <a:lstStyle/>
+          <a:p>
+            <a:pPr algn="ctr" indent="0" marL="0">
+              <a:buNone/>
+            </a:pPr>
+            <a:r>
+              <a:rPr lang="en-US" sz="2464" b="1" dirty="0">
+                <a:solidFill>
+                  <a:srgbClr val="14161C"/>
+                </a:solidFill>
+                <a:latin typeface="Bahnschrift" pitchFamily="34" charset="0"/>
+                <a:ea typeface="Bahnschrift" pitchFamily="34" charset="-122"/>
+                <a:cs typeface="Bahnschrift" pitchFamily="34" charset="-120"/>
+              </a:rPr>
+              <a:t>2</a:t>
+            </a:r>
+            <a:endParaRPr lang="en-US" sz="2464" dirty="0"/>
+          </a:p>
+        </p:txBody>
+      </p:sp>
+      <p:sp>
+        <p:nvSpPr>
+          <p:cNvPr id="31" name="Text 29"/>
+          <p:cNvSpPr/>
+          <p:nvPr/>
+        </p:nvSpPr>
+        <p:spPr>
+          <a:xfrm>
+            <a:off x="5364328" y="5111496"/>
+            <a:ext cx="1975104" cy="274320"/>
+          </a:xfrm>
+          <a:prstGeom prst="rect">
+            <a:avLst/>
+          </a:prstGeom>
+          <a:noFill/>
+          <a:ln/>
+        </p:spPr>
+        <p:txBody>
+          <a:bodyPr wrap="square" rtlCol="0" anchor="ctr"/>
+          <a:lstStyle/>
+          <a:p>
+            <a:pPr algn="ctr" indent="0" marL="0">
+              <a:buNone/>
+            </a:pPr>
+            <a:r>
+              <a:rPr lang="en-US" sz="1200" b="1" dirty="0">
+                <a:solidFill>
+                  <a:srgbClr val="F5F3EE"/>
+                </a:solidFill>
+                <a:latin typeface="Bahnschrift" pitchFamily="34" charset="0"/>
+                <a:ea typeface="Bahnschrift" pitchFamily="34" charset="-122"/>
+                <a:cs typeface="Bahnschrift" pitchFamily="34" charset="-120"/>
+              </a:rPr>
+              <a:t>Partage</a:t>
+            </a:r>
+            <a:endParaRPr lang="en-US" sz="1200" dirty="0"/>
+          </a:p>
+        </p:txBody>
+      </p:sp>
+      <p:sp>
+        <p:nvSpPr>
+          <p:cNvPr id="32" name="Shape 30"/>
+          <p:cNvSpPr/>
+          <p:nvPr/>
+        </p:nvSpPr>
+        <p:spPr>
+          <a:xfrm>
+            <a:off x="6607912" y="4782312"/>
+            <a:ext cx="2596896" cy="0"/>
+          </a:xfrm>
+          <a:prstGeom prst="line">
+            <a:avLst/>
+          </a:prstGeom>
+          <a:noFill/>
+          <a:ln w="19050">
+            <a:solidFill>
+              <a:srgbClr val="363C4C"/>
+            </a:solidFill>
+            <a:prstDash val="sysDot"/>
+          </a:ln>
+        </p:spPr>
+      </p:sp>
+      <p:sp>
+        <p:nvSpPr>
+          <p:cNvPr id="33" name="Shape 31"/>
+          <p:cNvSpPr/>
+          <p:nvPr/>
+        </p:nvSpPr>
+        <p:spPr>
+          <a:xfrm>
+            <a:off x="9204808" y="4526280"/>
+            <a:ext cx="512064" cy="512064"/>
+          </a:xfrm>
+          <a:prstGeom prst="ellipse">
+            <a:avLst/>
+          </a:prstGeom>
+          <a:solidFill>
+            <a:srgbClr val="2FE894"/>
+          </a:solidFill>
+          <a:ln/>
+          <a:effectLst>
+            <a:outerShdw sx="100000" sy="100000" kx="0" ky="0" algn="bl" rotWithShape="0" blurRad="76200" dist="50800" dir="16200000">
+              <a:srgbClr val="2FE894">
+                <a:alpha val="50000"/>
+              </a:srgbClr>
+            </a:outerShdw>
+          </a:effectLst>
+        </p:spPr>
+      </p:sp>
+      <p:sp>
+        <p:nvSpPr>
+          <p:cNvPr id="34" name="Text 32"/>
+          <p:cNvSpPr/>
+          <p:nvPr/>
+        </p:nvSpPr>
+        <p:spPr>
+          <a:xfrm>
+            <a:off x="9204808" y="4526280"/>
+            <a:ext cx="512064" cy="512064"/>
+          </a:xfrm>
+          <a:prstGeom prst="rect">
+            <a:avLst/>
+          </a:prstGeom>
+          <a:noFill/>
+          <a:ln/>
+        </p:spPr>
+        <p:txBody>
+          <a:bodyPr wrap="square" rtlCol="0" anchor="ctr"/>
+          <a:lstStyle/>
+          <a:p>
+            <a:pPr algn="ctr" indent="0" marL="0">
+              <a:buNone/>
+            </a:pPr>
+            <a:r>
+              <a:rPr lang="en-US" sz="2464" b="1" dirty="0">
+                <a:solidFill>
+                  <a:srgbClr val="14161C"/>
+                </a:solidFill>
+                <a:latin typeface="Bahnschrift" pitchFamily="34" charset="0"/>
+                <a:ea typeface="Bahnschrift" pitchFamily="34" charset="-122"/>
+                <a:cs typeface="Bahnschrift" pitchFamily="34" charset="-120"/>
+              </a:rPr>
+              <a:t>3</a:t>
+            </a:r>
+            <a:endParaRPr lang="en-US" sz="2464" dirty="0"/>
+          </a:p>
+        </p:txBody>
+      </p:sp>
+      <p:sp>
+        <p:nvSpPr>
+          <p:cNvPr id="35" name="Text 33"/>
+          <p:cNvSpPr/>
+          <p:nvPr/>
+        </p:nvSpPr>
+        <p:spPr>
+          <a:xfrm>
+            <a:off x="8473288" y="5111496"/>
+            <a:ext cx="1975104" cy="274320"/>
+          </a:xfrm>
+          <a:prstGeom prst="rect">
+            <a:avLst/>
+          </a:prstGeom>
+          <a:noFill/>
+          <a:ln/>
+        </p:spPr>
+        <p:txBody>
+          <a:bodyPr wrap="square" rtlCol="0" anchor="ctr"/>
+          <a:lstStyle/>
+          <a:p>
+            <a:pPr algn="ctr" indent="0" marL="0">
+              <a:buNone/>
+            </a:pPr>
+            <a:r>
+              <a:rPr lang="en-US" sz="1200" b="1" dirty="0">
+                <a:solidFill>
+                  <a:srgbClr val="F5F3EE"/>
+                </a:solidFill>
+                <a:latin typeface="Bahnschrift" pitchFamily="34" charset="0"/>
+                <a:ea typeface="Bahnschrift" pitchFamily="34" charset="-122"/>
+                <a:cs typeface="Bahnschrift" pitchFamily="34" charset="-120"/>
+              </a:rPr>
+              <a:t>Level-up</a:t>
+            </a:r>
+            <a:endParaRPr lang="en-US" sz="1200" dirty="0"/>
+          </a:p>
+        </p:txBody>
+      </p:sp>
+      <p:sp>
+        <p:nvSpPr>
+          <p:cNvPr id="36" name="Text 34"/>
+          <p:cNvSpPr/>
+          <p:nvPr/>
+        </p:nvSpPr>
+        <p:spPr>
+          <a:xfrm>
+            <a:off x="0" y="5257800"/>
+            <a:ext cx="12191695" cy="274320"/>
+          </a:xfrm>
+          <a:prstGeom prst="rect">
+            <a:avLst/>
+          </a:prstGeom>
+          <a:noFill/>
+          <a:ln/>
+        </p:spPr>
+        <p:txBody>
+          <a:bodyPr wrap="square" rtlCol="0" anchor="ctr"/>
+          <a:lstStyle/>
+          <a:p>
+            <a:pPr algn="ctr" indent="0" marL="0">
               <a:buNone/>
             </a:pPr>
             <a:r>
               <a:rPr lang="en-US" sz="1050" dirty="0">
                 <a:solidFill>
-                  <a:srgbClr val="9CA3AF"/>
+                  <a:srgbClr val="A3ABBD"/>
                 </a:solidFill>
                 <a:latin typeface="Segoe UI" pitchFamily="34" charset="0"/>
                 <a:ea typeface="Segoe UI" pitchFamily="34" charset="-122"/>
                 <a:cs typeface="Segoe UI" pitchFamily="34" charset="-120"/>
               </a:rPr>
-              <a:t>Une fois la confiance et l'usage établis via la Phase 1, commission sur les mises en relation payantes entre étudiants.</a:t>
+              <a:t>De la première visite à la réputation construite — zéro friction.</a:t>
             </a:r>
             <a:endParaRPr lang="en-US" sz="1050" dirty="0"/>
           </a:p>
@@ -3183,54 +3797,14 @@
       </p:sp>
       <p:sp>
         <p:nvSpPr>
-          <p:cNvPr id="18" name="Shape 16"/>
-          <p:cNvSpPr/>
-          <p:nvPr/>
-        </p:nvSpPr>
-        <p:spPr>
-          <a:xfrm>
-            <a:off x="8097317" y="1965960"/>
-            <a:ext cx="3454298" cy="54864"/>
-          </a:xfrm>
-          <a:prstGeom prst="rect">
-            <a:avLst/>
-          </a:prstGeom>
-          <a:solidFill>
-            <a:srgbClr val="4CAF7D"/>
-          </a:solidFill>
-          <a:ln/>
-        </p:spPr>
-      </p:sp>
-      <p:sp>
-        <p:nvSpPr>
-          <p:cNvPr id="19" name="Shape 17"/>
-          <p:cNvSpPr/>
-          <p:nvPr/>
-        </p:nvSpPr>
-        <p:spPr>
-          <a:xfrm>
-            <a:off x="11222431" y="2084832"/>
-            <a:ext cx="274320" cy="274320"/>
-          </a:xfrm>
-          <a:prstGeom prst="ellipse">
-            <a:avLst/>
-          </a:prstGeom>
-          <a:solidFill>
-            <a:srgbClr val="4CAF7D"/>
-          </a:solidFill>
-          <a:ln/>
-        </p:spPr>
-      </p:sp>
-      <p:sp>
-        <p:nvSpPr>
-          <p:cNvPr id="20" name="Text 18"/>
-          <p:cNvSpPr/>
-          <p:nvPr/>
-        </p:nvSpPr>
-        <p:spPr>
-          <a:xfrm>
-            <a:off x="11222431" y="2084832"/>
-            <a:ext cx="274320" cy="274320"/>
+          <p:cNvPr id="37" name="Text 35"/>
+          <p:cNvSpPr/>
+          <p:nvPr/>
+        </p:nvSpPr>
+        <p:spPr>
+          <a:xfrm>
+            <a:off x="640080" y="6400800"/>
+            <a:ext cx="6400800" cy="274320"/>
           </a:xfrm>
           <a:prstGeom prst="rect">
             <a:avLst/>
@@ -3242,34 +3816,48 @@
           <a:bodyPr wrap="square" rtlCol="0" anchor="ctr"/>
           <a:lstStyle/>
           <a:p>
-            <a:pPr algn="ctr" indent="0" marL="0">
-              <a:buNone/>
-            </a:pPr>
-            <a:r>
-              <a:rPr lang="en-US" sz="1320" b="1" dirty="0">
-                <a:solidFill>
-                  <a:srgbClr val="1A1D24"/>
+            <a:pPr indent="0" marL="0">
+              <a:buNone/>
+            </a:pPr>
+            <a:r>
+              <a:rPr lang="en-US" sz="1000" b="1" spc="100" kern="0" dirty="0">
+                <a:solidFill>
+                  <a:srgbClr val="A3ABBD"/>
                 </a:solidFill>
                 <a:latin typeface="Bahnschrift" pitchFamily="34" charset="0"/>
                 <a:ea typeface="Bahnschrift" pitchFamily="34" charset="-122"/>
                 <a:cs typeface="Bahnschrift" pitchFamily="34" charset="-120"/>
               </a:rPr>
-              <a:t>3</a:t>
-            </a:r>
-            <a:endParaRPr lang="en-US" sz="1320" dirty="0"/>
-          </a:p>
-        </p:txBody>
-      </p:sp>
-      <p:sp>
-        <p:nvSpPr>
-          <p:cNvPr id="21" name="Text 19"/>
-          <p:cNvSpPr/>
-          <p:nvPr/>
-        </p:nvSpPr>
-        <p:spPr>
-          <a:xfrm>
-            <a:off x="8097317" y="2103120"/>
-            <a:ext cx="3088538" cy="274320"/>
+              <a:t>CESTOMCLASH228  </a:t>
+            </a:r>
+            <a:pPr indent="0" marL="0">
+              <a:buNone/>
+            </a:pPr>
+            <a:r>
+              <a:rPr lang="en-US" sz="1000" spc="100" kern="0" dirty="0">
+                <a:solidFill>
+                  <a:srgbClr val="A3ABBD"/>
+                </a:solidFill>
+                <a:latin typeface="Bahnschrift" pitchFamily="34" charset="0"/>
+                <a:ea typeface="Bahnschrift" pitchFamily="34" charset="-122"/>
+                <a:cs typeface="Bahnschrift" pitchFamily="34" charset="-120"/>
+              </a:rPr>
+              <a:t>· Explore. Partage. Level-up.</a:t>
+            </a:r>
+            <a:endParaRPr lang="en-US" sz="1000" dirty="0"/>
+          </a:p>
+        </p:txBody>
+      </p:sp>
+      <p:sp>
+        <p:nvSpPr>
+          <p:cNvPr id="38" name="Text 36"/>
+          <p:cNvSpPr/>
+          <p:nvPr/>
+        </p:nvSpPr>
+        <p:spPr>
+          <a:xfrm>
+            <a:off x="7894015" y="6400800"/>
+            <a:ext cx="3657600" cy="274320"/>
           </a:xfrm>
           <a:prstGeom prst="rect">
             <a:avLst/>
@@ -3281,471 +3869,19 @@
           <a:bodyPr wrap="square" rtlCol="0" anchor="ctr"/>
           <a:lstStyle/>
           <a:p>
-            <a:pPr indent="0" marL="0">
+            <a:pPr algn="r" indent="0" marL="0">
               <a:buNone/>
             </a:pPr>
             <a:r>
               <a:rPr lang="en-US" sz="1000" dirty="0">
                 <a:solidFill>
-                  <a:srgbClr val="4CAF7D"/>
+                  <a:srgbClr val="A3ABBD"/>
                 </a:solidFill>
                 <a:latin typeface="Segoe UI" pitchFamily="34" charset="0"/>
                 <a:ea typeface="Segoe UI" pitchFamily="34" charset="-122"/>
                 <a:cs typeface="Segoe UI" pitchFamily="34" charset="-120"/>
               </a:rPr>
-              <a:t>Phase 3 — Vision</a:t>
-            </a:r>
-            <a:endParaRPr lang="en-US" sz="1000" dirty="0"/>
-          </a:p>
-        </p:txBody>
-      </p:sp>
-      <p:sp>
-        <p:nvSpPr>
-          <p:cNvPr id="22" name="Text 20"/>
-          <p:cNvSpPr/>
-          <p:nvPr/>
-        </p:nvSpPr>
-        <p:spPr>
-          <a:xfrm>
-            <a:off x="8097317" y="2377440"/>
-            <a:ext cx="3454298" cy="594360"/>
-          </a:xfrm>
-          <a:prstGeom prst="rect">
-            <a:avLst/>
-          </a:prstGeom>
-          <a:noFill/>
-          <a:ln/>
-        </p:spPr>
-        <p:txBody>
-          <a:bodyPr wrap="square" rtlCol="0" anchor="t"/>
-          <a:lstStyle/>
-          <a:p>
-            <a:pPr indent="0" marL="0">
-              <a:buNone/>
-            </a:pPr>
-            <a:r>
-              <a:rPr lang="en-US" sz="1400" b="1" dirty="0">
-                <a:solidFill>
-                  <a:srgbClr val="F4F1EC"/>
-                </a:solidFill>
-                <a:latin typeface="Bahnschrift" pitchFamily="34" charset="0"/>
-                <a:ea typeface="Bahnschrift" pitchFamily="34" charset="-122"/>
-                <a:cs typeface="Bahnschrift" pitchFamily="34" charset="-120"/>
-              </a:rPr>
-              <a:t>Licence à d'autres diasporas</a:t>
-            </a:r>
-            <a:endParaRPr lang="en-US" sz="1400" dirty="0"/>
-          </a:p>
-        </p:txBody>
-      </p:sp>
-      <p:sp>
-        <p:nvSpPr>
-          <p:cNvPr id="23" name="Text 21"/>
-          <p:cNvSpPr/>
-          <p:nvPr/>
-        </p:nvSpPr>
-        <p:spPr>
-          <a:xfrm>
-            <a:off x="8097317" y="3017520"/>
-            <a:ext cx="3454298" cy="1554480"/>
-          </a:xfrm>
-          <a:prstGeom prst="rect">
-            <a:avLst/>
-          </a:prstGeom>
-          <a:noFill/>
-          <a:ln/>
-        </p:spPr>
-        <p:txBody>
-          <a:bodyPr wrap="square" rtlCol="0" anchor="t"/>
-          <a:lstStyle/>
-          <a:p>
-            <a:pPr indent="0" marL="0">
-              <a:lnSpc>
-                <a:spcPct val="120000"/>
-              </a:lnSpc>
-              <a:buNone/>
-            </a:pPr>
-            <a:r>
-              <a:rPr lang="en-US" sz="1050" dirty="0">
-                <a:solidFill>
-                  <a:srgbClr val="9CA3AF"/>
-                </a:solidFill>
-                <a:latin typeface="Segoe UI" pitchFamily="34" charset="0"/>
-                <a:ea typeface="Segoe UI" pitchFamily="34" charset="-122"/>
-                <a:cs typeface="Segoe UI" pitchFamily="34" charset="-120"/>
-              </a:rPr>
-              <a:t>Architecture (carte, réputation, sponsoring vérifié, modération spatiale) transposable à toute communauté étudiante structurée autour d'une association reconnue.</a:t>
-            </a:r>
-            <a:endParaRPr lang="en-US" sz="1050" dirty="0"/>
-          </a:p>
-        </p:txBody>
-      </p:sp>
-      <p:sp>
-        <p:nvSpPr>
-          <p:cNvPr id="24" name="Shape 22"/>
-          <p:cNvSpPr/>
-          <p:nvPr/>
-        </p:nvSpPr>
-        <p:spPr>
-          <a:xfrm>
-            <a:off x="640080" y="4892040"/>
-            <a:ext cx="3566160" cy="1417320"/>
-          </a:xfrm>
-          <a:prstGeom prst="roundRect">
-            <a:avLst>
-              <a:gd name="adj" fmla="val 5161"/>
-            </a:avLst>
-          </a:prstGeom>
-          <a:solidFill>
-            <a:srgbClr val="2A2F3B"/>
-          </a:solidFill>
-          <a:ln w="12700">
-            <a:solidFill>
-              <a:srgbClr val="3A3F4C"/>
-            </a:solidFill>
-            <a:prstDash val="solid"/>
-          </a:ln>
-        </p:spPr>
-      </p:sp>
-      <p:sp>
-        <p:nvSpPr>
-          <p:cNvPr id="25" name="Shape 23"/>
-          <p:cNvSpPr/>
-          <p:nvPr/>
-        </p:nvSpPr>
-        <p:spPr>
-          <a:xfrm>
-            <a:off x="1444715" y="5416067"/>
-            <a:ext cx="237744" cy="237744"/>
-          </a:xfrm>
-          <a:prstGeom prst="ellipse">
-            <a:avLst/>
-          </a:prstGeom>
-          <a:solidFill>
-            <a:srgbClr val="F2C14E"/>
-          </a:solidFill>
-          <a:ln w="9525">
-            <a:solidFill>
-              <a:srgbClr val="1A1D24"/>
-            </a:solidFill>
-            <a:prstDash val="solid"/>
-          </a:ln>
-        </p:spPr>
-      </p:sp>
-      <p:sp>
-        <p:nvSpPr>
-          <p:cNvPr id="26" name="Shape 24"/>
-          <p:cNvSpPr/>
-          <p:nvPr/>
-        </p:nvSpPr>
-        <p:spPr>
-          <a:xfrm>
-            <a:off x="1178863" y="5516679"/>
-            <a:ext cx="216984" cy="216984"/>
-          </a:xfrm>
-          <a:prstGeom prst="ellipse">
-            <a:avLst/>
-          </a:prstGeom>
-          <a:solidFill>
-            <a:srgbClr val="F2C14E"/>
-          </a:solidFill>
-          <a:ln w="9525">
-            <a:solidFill>
-              <a:srgbClr val="1A1D24"/>
-            </a:solidFill>
-            <a:prstDash val="solid"/>
-          </a:ln>
-        </p:spPr>
-      </p:sp>
-      <p:sp>
-        <p:nvSpPr>
-          <p:cNvPr id="27" name="Shape 25"/>
-          <p:cNvSpPr/>
-          <p:nvPr/>
-        </p:nvSpPr>
-        <p:spPr>
-          <a:xfrm>
-            <a:off x="1061409" y="5935161"/>
-            <a:ext cx="163182" cy="163182"/>
-          </a:xfrm>
-          <a:prstGeom prst="ellipse">
-            <a:avLst/>
-          </a:prstGeom>
-          <a:solidFill>
-            <a:srgbClr val="F2C14E"/>
-          </a:solidFill>
-          <a:ln w="9525">
-            <a:solidFill>
-              <a:srgbClr val="1A1D24"/>
-            </a:solidFill>
-            <a:prstDash val="solid"/>
-          </a:ln>
-        </p:spPr>
-      </p:sp>
-      <p:sp>
-        <p:nvSpPr>
-          <p:cNvPr id="28" name="Shape 26"/>
-          <p:cNvSpPr/>
-          <p:nvPr/>
-        </p:nvSpPr>
-        <p:spPr>
-          <a:xfrm>
-            <a:off x="2165425" y="5454774"/>
-            <a:ext cx="155452" cy="155452"/>
-          </a:xfrm>
-          <a:prstGeom prst="ellipse">
-            <a:avLst/>
-          </a:prstGeom>
-          <a:solidFill>
-            <a:srgbClr val="F2C14E"/>
-          </a:solidFill>
-          <a:ln w="9525">
-            <a:solidFill>
-              <a:srgbClr val="1A1D24"/>
-            </a:solidFill>
-            <a:prstDash val="solid"/>
-          </a:ln>
-        </p:spPr>
-      </p:sp>
-      <p:sp>
-        <p:nvSpPr>
-          <p:cNvPr id="29" name="Shape 27"/>
-          <p:cNvSpPr/>
-          <p:nvPr/>
-        </p:nvSpPr>
-        <p:spPr>
-          <a:xfrm>
-            <a:off x="1878987" y="5128144"/>
-            <a:ext cx="113007" cy="113007"/>
-          </a:xfrm>
-          <a:prstGeom prst="ellipse">
-            <a:avLst/>
-          </a:prstGeom>
-          <a:solidFill>
-            <a:srgbClr val="F2C14E"/>
-          </a:solidFill>
-          <a:ln w="9525">
-            <a:solidFill>
-              <a:srgbClr val="1A1D24"/>
-            </a:solidFill>
-            <a:prstDash val="solid"/>
-          </a:ln>
-        </p:spPr>
-      </p:sp>
-      <p:sp>
-        <p:nvSpPr>
-          <p:cNvPr id="30" name="Shape 28"/>
-          <p:cNvSpPr/>
-          <p:nvPr/>
-        </p:nvSpPr>
-        <p:spPr>
-          <a:xfrm>
-            <a:off x="3332988" y="5350518"/>
-            <a:ext cx="100584" cy="100584"/>
-          </a:xfrm>
-          <a:prstGeom prst="ellipse">
-            <a:avLst/>
-          </a:prstGeom>
-          <a:solidFill>
-            <a:srgbClr val="F2C14E"/>
-          </a:solidFill>
-          <a:ln w="9525">
-            <a:solidFill>
-              <a:srgbClr val="1A1D24"/>
-            </a:solidFill>
-            <a:prstDash val="solid"/>
-          </a:ln>
-        </p:spPr>
-      </p:sp>
-      <p:sp>
-        <p:nvSpPr>
-          <p:cNvPr id="31" name="Text 29"/>
-          <p:cNvSpPr/>
-          <p:nvPr/>
-        </p:nvSpPr>
-        <p:spPr>
-          <a:xfrm>
-            <a:off x="4480560" y="4892040"/>
-            <a:ext cx="7071055" cy="1417320"/>
-          </a:xfrm>
-          <a:prstGeom prst="rect">
-            <a:avLst/>
-          </a:prstGeom>
-          <a:noFill/>
-          <a:ln/>
-        </p:spPr>
-        <p:txBody>
-          <a:bodyPr wrap="square" rtlCol="0" anchor="ctr"/>
-          <a:lstStyle/>
-          <a:p>
-            <a:pPr indent="0" marL="0">
-              <a:lnSpc>
-                <a:spcPct val="115000"/>
-              </a:lnSpc>
-              <a:buNone/>
-            </a:pPr>
-            <a:r>
-              <a:rPr lang="en-US" sz="2600" b="1" dirty="0">
-                <a:solidFill>
-                  <a:srgbClr val="F2C14E"/>
-                </a:solidFill>
-                <a:latin typeface="Bahnschrift" pitchFamily="34" charset="0"/>
-                <a:ea typeface="Bahnschrift" pitchFamily="34" charset="-122"/>
-                <a:cs typeface="Bahnschrift" pitchFamily="34" charset="-120"/>
-              </a:rPr>
-              <a:t>650</a:t>
-            </a:r>
-            <a:endParaRPr lang="en-US" sz="2600" dirty="0"/>
-          </a:p>
-          <a:p>
-            <a:pPr indent="0" marL="0">
-              <a:lnSpc>
-                <a:spcPct val="115000"/>
-              </a:lnSpc>
-              <a:buNone/>
-            </a:pPr>
-            <a:r>
-              <a:rPr lang="en-US" sz="1100" dirty="0">
-                <a:solidFill>
-                  <a:srgbClr val="F4F1EC"/>
-                </a:solidFill>
-                <a:latin typeface="Bahnschrift" pitchFamily="34" charset="0"/>
-                <a:ea typeface="Bahnschrift" pitchFamily="34" charset="-122"/>
-                <a:cs typeface="Bahnschrift" pitchFamily="34" charset="-120"/>
-              </a:rPr>
-              <a:t>membres CESTOM, 6 villes</a:t>
-            </a:r>
-            <a:endParaRPr lang="en-US" sz="2600" dirty="0"/>
-          </a:p>
-          <a:p>
-            <a:pPr indent="0" marL="0">
-              <a:lnSpc>
-                <a:spcPct val="115000"/>
-              </a:lnSpc>
-              <a:buNone/>
-            </a:pPr>
-            <a:r>
-              <a:rPr lang="en-US" sz="850" dirty="0">
-                <a:solidFill>
-                  <a:srgbClr val="9CA3AF"/>
-                </a:solidFill>
-                <a:latin typeface="Bahnschrift" pitchFamily="34" charset="0"/>
-                <a:ea typeface="Bahnschrift" pitchFamily="34" charset="-122"/>
-                <a:cs typeface="Bahnschrift" pitchFamily="34" charset="-120"/>
-              </a:rPr>
-              <a:t>Rabat 220  ·  Casablanca 180  ·  Marrakech 95  ·  Fès 85  ·  Tanger 40  ·  Oujda 30</a:t>
-            </a:r>
-            <a:endParaRPr lang="en-US" sz="2600" dirty="0"/>
-          </a:p>
-          <a:p>
-            <a:pPr indent="0" marL="0">
-              <a:lnSpc>
-                <a:spcPct val="115000"/>
-              </a:lnSpc>
-              <a:buNone/>
-            </a:pPr>
-            <a:r>
-              <a:rPr lang="en-US" sz="800" dirty="0">
-                <a:solidFill>
-                  <a:srgbClr val="9CA3AF"/>
-                </a:solidFill>
-                <a:latin typeface="Bahnschrift" pitchFamily="34" charset="0"/>
-                <a:ea typeface="Bahnschrift" pitchFamily="34" charset="-122"/>
-                <a:cs typeface="Bahnschrift" pitchFamily="34" charset="-120"/>
-              </a:rPr>
-              <a:t>Source : cestom.org</a:t>
-            </a:r>
-            <a:endParaRPr lang="en-US" sz="2600" dirty="0"/>
-          </a:p>
-        </p:txBody>
-      </p:sp>
-      <p:sp>
-        <p:nvSpPr>
-          <p:cNvPr id="32" name="Text 30"/>
-          <p:cNvSpPr/>
-          <p:nvPr/>
-        </p:nvSpPr>
-        <p:spPr>
-          <a:xfrm>
-            <a:off x="640080" y="6400800"/>
-            <a:ext cx="6400800" cy="274320"/>
-          </a:xfrm>
-          <a:prstGeom prst="rect">
-            <a:avLst/>
-          </a:prstGeom>
-          <a:noFill/>
-          <a:ln/>
-        </p:spPr>
-        <p:txBody>
-          <a:bodyPr wrap="square" rtlCol="0" anchor="ctr"/>
-          <a:lstStyle/>
-          <a:p>
-            <a:pPr indent="0" marL="0">
-              <a:buNone/>
-            </a:pPr>
-            <a:r>
-              <a:rPr lang="en-US" sz="1000" b="1" spc="100" kern="0" dirty="0">
-                <a:solidFill>
-                  <a:srgbClr val="9CA3AF"/>
-                </a:solidFill>
-                <a:latin typeface="Bahnschrift" pitchFamily="34" charset="0"/>
-                <a:ea typeface="Bahnschrift" pitchFamily="34" charset="-122"/>
-                <a:cs typeface="Bahnschrift" pitchFamily="34" charset="-120"/>
-              </a:rPr>
-              <a:t>CESTOMCLASH228  </a:t>
-            </a:r>
-            <a:pPr indent="0" marL="0">
-              <a:buNone/>
-            </a:pPr>
-            <a:r>
-              <a:rPr lang="en-US" sz="1000" spc="100" kern="0" dirty="0">
-                <a:solidFill>
-                  <a:srgbClr val="9CA3AF"/>
-                </a:solidFill>
-                <a:latin typeface="Bahnschrift" pitchFamily="34" charset="0"/>
-                <a:ea typeface="Bahnschrift" pitchFamily="34" charset="-122"/>
-                <a:cs typeface="Bahnschrift" pitchFamily="34" charset="-120"/>
-              </a:rPr>
-              <a:t>· Explore. Partage. Level-up.</a:t>
-            </a:r>
-            <a:endParaRPr lang="en-US" sz="1000" dirty="0"/>
-          </a:p>
-        </p:txBody>
-      </p:sp>
-      <p:sp>
-        <p:nvSpPr>
-          <p:cNvPr id="33" name="Text 31"/>
-          <p:cNvSpPr/>
-          <p:nvPr/>
-        </p:nvSpPr>
-        <p:spPr>
-          <a:xfrm>
-            <a:off x="7894015" y="6400800"/>
-            <a:ext cx="3657600" cy="274320"/>
-          </a:xfrm>
-          <a:prstGeom prst="rect">
-            <a:avLst/>
-          </a:prstGeom>
-          <a:noFill/>
-          <a:ln/>
-        </p:spPr>
-        <p:txBody>
-          <a:bodyPr wrap="square" rtlCol="0" anchor="ctr"/>
-          <a:lstStyle/>
-          <a:p>
-            <a:pPr algn="r" indent="0" marL="0">
-              <a:buNone/>
-            </a:pPr>
-            <a:r>
-              <a:rPr lang="en-US" sz="1000" dirty="0">
-                <a:solidFill>
-                  <a:srgbClr val="9CA3AF"/>
-                </a:solidFill>
-                <a:latin typeface="Segoe UI" pitchFamily="34" charset="0"/>
-                <a:ea typeface="Segoe UI" pitchFamily="34" charset="-122"/>
-                <a:cs typeface="Segoe UI" pitchFamily="34" charset="-120"/>
-              </a:rPr>
-              <a:t>03 · Business model &amp; marché</a:t>
+              <a:t>03 · Solution</a:t>
             </a:r>
             <a:endParaRPr lang="en-US" sz="1000" dirty="0"/>
           </a:p>
@@ -3765,7 +3901,7 @@
     <p:bg>
       <p:bgPr>
         <a:solidFill>
-          <a:srgbClr val="1A1D24"/>
+          <a:srgbClr val="14161C"/>
         </a:solidFill>
       </p:bgPr>
     </p:bg>
@@ -3798,7 +3934,7 @@
             <a:avLst/>
           </a:prstGeom>
           <a:solidFill>
-            <a:srgbClr val="F2C14E">
+            <a:srgbClr val="3FE0FF">
               <a:alpha val="8000"/>
             </a:srgbClr>
           </a:solidFill>
@@ -3847,23 +3983,62 @@
               <a:buNone/>
             </a:pPr>
             <a:r>
-              <a:rPr lang="en-US" sz="2800" b="1" dirty="0">
-                <a:solidFill>
-                  <a:srgbClr val="F4F1EC"/>
+              <a:rPr lang="en-US" sz="2700" b="1" dirty="0">
+                <a:solidFill>
+                  <a:srgbClr val="F5F3EE"/>
                 </a:solidFill>
                 <a:latin typeface="Bahnschrift" pitchFamily="34" charset="0"/>
                 <a:ea typeface="Bahnschrift" pitchFamily="34" charset="-122"/>
                 <a:cs typeface="Bahnschrift" pitchFamily="34" charset="-120"/>
               </a:rPr>
-              <a:t>Ce qui est réel aujourd'hui, et ce qu'on demande</a:t>
-            </a:r>
-            <a:endParaRPr lang="en-US" sz="2800" dirty="0"/>
+              <a:t>Business case : l'impact d'abord, prouvé dès le jour 1</a:t>
+            </a:r>
+            <a:endParaRPr lang="en-US" sz="2700" dirty="0"/>
           </a:p>
         </p:txBody>
       </p:sp>
       <p:sp>
         <p:nvSpPr>
           <p:cNvPr id="5" name="Text 3"/>
+          <p:cNvSpPr/>
+          <p:nvPr/>
+        </p:nvSpPr>
+        <p:spPr>
+          <a:xfrm>
+            <a:off x="640080" y="1298448"/>
+            <a:ext cx="10911535" cy="411480"/>
+          </a:xfrm>
+          <a:prstGeom prst="rect">
+            <a:avLst/>
+          </a:prstGeom>
+          <a:noFill/>
+          <a:ln/>
+        </p:spPr>
+        <p:txBody>
+          <a:bodyPr wrap="square" rtlCol="0" anchor="ctr"/>
+          <a:lstStyle/>
+          <a:p>
+            <a:pPr indent="0" marL="0">
+              <a:buNone/>
+            </a:pPr>
+            <a:r>
+              <a:rPr lang="en-US" sz="1300" dirty="0">
+                <a:solidFill>
+                  <a:srgbClr val="A3ABBD"/>
+                </a:solidFill>
+                <a:latin typeface="Segoe UI" pitchFamily="34" charset="0"/>
+                <a:ea typeface="Segoe UI" pitchFamily="34" charset="-122"/>
+                <a:cs typeface="Segoe UI" pitchFamily="34" charset="-120"/>
+              </a:rPr>
+              <a:t>Pas de bénévolat — un flux monétaire construit dès la version présentée au concours</a:t>
+            </a:r>
+            <a:endParaRPr lang="en-US" sz="1300" dirty="0"/>
+          </a:p>
+        </p:txBody>
+      </p:sp>
+      <p:sp>
+        <p:nvSpPr>
+          <p:cNvPr id="6" name="Text 4"/>
           <p:cNvSpPr/>
           <p:nvPr/>
         </p:nvSpPr>
@@ -3888,7 +4063,7 @@
             <a:r>
               <a:rPr lang="en-US" sz="1100" b="1" spc="100" kern="0" dirty="0">
                 <a:solidFill>
-                  <a:srgbClr val="9CA3AF"/>
+                  <a:srgbClr val="A3ABBD"/>
                 </a:solidFill>
                 <a:latin typeface="Bahnschrift" pitchFamily="34" charset="0"/>
                 <a:ea typeface="Bahnschrift" pitchFamily="34" charset="-122"/>
@@ -3902,14 +4077,1523 @@
       </p:sp>
       <p:sp>
         <p:nvSpPr>
-          <p:cNvPr id="6" name="Text 4"/>
-          <p:cNvSpPr/>
-          <p:nvPr/>
-        </p:nvSpPr>
-        <p:spPr>
-          <a:xfrm>
-            <a:off x="640080" y="2011680"/>
-            <a:ext cx="10911535" cy="2103120"/>
+          <p:cNvPr id="7" name="Shape 5"/>
+          <p:cNvSpPr/>
+          <p:nvPr/>
+        </p:nvSpPr>
+        <p:spPr>
+          <a:xfrm>
+            <a:off x="640080" y="1965960"/>
+            <a:ext cx="3454298" cy="1783080"/>
+          </a:xfrm>
+          <a:prstGeom prst="roundRect">
+            <a:avLst>
+              <a:gd name="adj" fmla="val 3590"/>
+            </a:avLst>
+          </a:prstGeom>
+          <a:ln w="12700">
+            <a:solidFill>
+              <a:srgbClr val="FFC94D">
+                <a:alpha val="70000"/>
+              </a:srgbClr>
+            </a:solidFill>
+            <a:prstDash val="solid"/>
+          </a:ln>
+          <a:effectLst>
+            <a:outerShdw sx="100000" sy="100000" kx="0" ky="0" algn="bl" rotWithShape="0" blurRad="101600" dist="50800" dir="16200000">
+              <a:srgbClr val="FFC94D">
+                <a:alpha val="28000"/>
+              </a:srgbClr>
+            </a:outerShdw>
+          </a:effectLst>
+        </p:spPr>
+      </p:sp>
+      <p:sp>
+        <p:nvSpPr>
+          <p:cNvPr id="8" name="Shape 6"/>
+          <p:cNvSpPr/>
+          <p:nvPr/>
+        </p:nvSpPr>
+        <p:spPr>
+          <a:xfrm>
+            <a:off x="814822" y="1975104"/>
+            <a:ext cx="3104815" cy="18288"/>
+          </a:xfrm>
+          <a:prstGeom prst="rect">
+            <a:avLst/>
+          </a:prstGeom>
+          <a:solidFill>
+            <a:srgbClr val="FFC94D">
+              <a:alpha val="65000"/>
+            </a:srgbClr>
+          </a:solidFill>
+          <a:ln/>
+        </p:spPr>
+      </p:sp>
+      <p:sp>
+        <p:nvSpPr>
+          <p:cNvPr id="9" name="Shape 7"/>
+          <p:cNvSpPr/>
+          <p:nvPr/>
+        </p:nvSpPr>
+        <p:spPr>
+          <a:xfrm>
+            <a:off x="3765194" y="2084832"/>
+            <a:ext cx="274320" cy="274320"/>
+          </a:xfrm>
+          <a:prstGeom prst="ellipse">
+            <a:avLst/>
+          </a:prstGeom>
+          <a:solidFill>
+            <a:srgbClr val="FFC94D"/>
+          </a:solidFill>
+          <a:ln/>
+          <a:effectLst>
+            <a:outerShdw sx="100000" sy="100000" kx="0" ky="0" algn="bl" rotWithShape="0" blurRad="76200" dist="50800" dir="16200000">
+              <a:srgbClr val="FFC94D">
+                <a:alpha val="50000"/>
+              </a:srgbClr>
+            </a:outerShdw>
+          </a:effectLst>
+        </p:spPr>
+      </p:sp>
+      <p:sp>
+        <p:nvSpPr>
+          <p:cNvPr id="10" name="Text 8"/>
+          <p:cNvSpPr/>
+          <p:nvPr/>
+        </p:nvSpPr>
+        <p:spPr>
+          <a:xfrm>
+            <a:off x="3765194" y="2084832"/>
+            <a:ext cx="274320" cy="274320"/>
+          </a:xfrm>
+          <a:prstGeom prst="rect">
+            <a:avLst/>
+          </a:prstGeom>
+          <a:noFill/>
+          <a:ln/>
+        </p:spPr>
+        <p:txBody>
+          <a:bodyPr wrap="square" rtlCol="0" anchor="ctr"/>
+          <a:lstStyle/>
+          <a:p>
+            <a:pPr algn="ctr" indent="0" marL="0">
+              <a:buNone/>
+            </a:pPr>
+            <a:r>
+              <a:rPr lang="en-US" sz="1320" b="1" dirty="0">
+                <a:solidFill>
+                  <a:srgbClr val="14161C"/>
+                </a:solidFill>
+                <a:latin typeface="Bahnschrift" pitchFamily="34" charset="0"/>
+                <a:ea typeface="Bahnschrift" pitchFamily="34" charset="-122"/>
+                <a:cs typeface="Bahnschrift" pitchFamily="34" charset="-120"/>
+              </a:rPr>
+              <a:t>1</a:t>
+            </a:r>
+            <a:endParaRPr lang="en-US" sz="1320" dirty="0"/>
+          </a:p>
+        </p:txBody>
+      </p:sp>
+      <p:sp>
+        <p:nvSpPr>
+          <p:cNvPr id="11" name="Text 9"/>
+          <p:cNvSpPr/>
+          <p:nvPr/>
+        </p:nvSpPr>
+        <p:spPr>
+          <a:xfrm>
+            <a:off x="841248" y="2103120"/>
+            <a:ext cx="2905658" cy="274320"/>
+          </a:xfrm>
+          <a:prstGeom prst="rect">
+            <a:avLst/>
+          </a:prstGeom>
+          <a:noFill/>
+          <a:ln/>
+        </p:spPr>
+        <p:txBody>
+          <a:bodyPr wrap="square" rtlCol="0" anchor="ctr"/>
+          <a:lstStyle/>
+          <a:p>
+            <a:pPr indent="0" marL="0">
+              <a:buNone/>
+            </a:pPr>
+            <a:r>
+              <a:rPr lang="en-US" sz="1000" dirty="0">
+                <a:solidFill>
+                  <a:srgbClr val="FFC94D"/>
+                </a:solidFill>
+                <a:latin typeface="Segoe UI" pitchFamily="34" charset="0"/>
+                <a:ea typeface="Segoe UI" pitchFamily="34" charset="-122"/>
+                <a:cs typeface="Segoe UI" pitchFamily="34" charset="-120"/>
+              </a:rPr>
+              <a:t>Phase 1 — Maintenant</a:t>
+            </a:r>
+            <a:endParaRPr lang="en-US" sz="1000" dirty="0"/>
+          </a:p>
+        </p:txBody>
+      </p:sp>
+      <p:sp>
+        <p:nvSpPr>
+          <p:cNvPr id="12" name="Text 10"/>
+          <p:cNvSpPr/>
+          <p:nvPr/>
+        </p:nvSpPr>
+        <p:spPr>
+          <a:xfrm>
+            <a:off x="841248" y="2377440"/>
+            <a:ext cx="3088538" cy="548640"/>
+          </a:xfrm>
+          <a:prstGeom prst="rect">
+            <a:avLst/>
+          </a:prstGeom>
+          <a:noFill/>
+          <a:ln/>
+        </p:spPr>
+        <p:txBody>
+          <a:bodyPr wrap="square" rtlCol="0" anchor="t"/>
+          <a:lstStyle/>
+          <a:p>
+            <a:pPr indent="0" marL="0">
+              <a:buNone/>
+            </a:pPr>
+            <a:r>
+              <a:rPr lang="en-US" sz="1350" b="1" dirty="0">
+                <a:solidFill>
+                  <a:srgbClr val="F5F3EE"/>
+                </a:solidFill>
+                <a:latin typeface="Bahnschrift" pitchFamily="34" charset="0"/>
+                <a:ea typeface="Bahnschrift" pitchFamily="34" charset="-122"/>
+                <a:cs typeface="Bahnschrift" pitchFamily="34" charset="-120"/>
+              </a:rPr>
+              <a:t>Sponsoring vérifié</a:t>
+            </a:r>
+            <a:endParaRPr lang="en-US" sz="1350" dirty="0"/>
+          </a:p>
+        </p:txBody>
+      </p:sp>
+      <p:sp>
+        <p:nvSpPr>
+          <p:cNvPr id="13" name="Text 11"/>
+          <p:cNvSpPr/>
+          <p:nvPr/>
+        </p:nvSpPr>
+        <p:spPr>
+          <a:xfrm>
+            <a:off x="841248" y="2971800"/>
+            <a:ext cx="3051962" cy="1600200"/>
+          </a:xfrm>
+          <a:prstGeom prst="rect">
+            <a:avLst/>
+          </a:prstGeom>
+          <a:noFill/>
+          <a:ln/>
+        </p:spPr>
+        <p:txBody>
+          <a:bodyPr wrap="square" rtlCol="0" anchor="t"/>
+          <a:lstStyle/>
+          <a:p>
+            <a:pPr indent="0" marL="0">
+              <a:lnSpc>
+                <a:spcPct val="120000"/>
+              </a:lnSpc>
+              <a:buNone/>
+            </a:pPr>
+            <a:r>
+              <a:rPr lang="en-US" sz="1000" dirty="0">
+                <a:solidFill>
+                  <a:srgbClr val="A3ABBD"/>
+                </a:solidFill>
+                <a:latin typeface="Segoe UI" pitchFamily="34" charset="0"/>
+                <a:ea typeface="Segoe UI" pitchFamily="34" charset="-122"/>
+                <a:cs typeface="Segoe UI" pitchFamily="34" charset="-120"/>
+              </a:rPr>
+              <a:t>Un acteur qui veut un privilège (Pin mis en avant) fait un virement réel vers un compte CESTOM dédié, soumet une preuve dans l'app, un vérificateur valide. 0 % prélevé par une passerelle de paiement tierce — tout reste dans le circuit CESTOM.</a:t>
+            </a:r>
+            <a:endParaRPr lang="en-US" sz="1000" dirty="0"/>
+          </a:p>
+        </p:txBody>
+      </p:sp>
+      <p:sp>
+        <p:nvSpPr>
+          <p:cNvPr id="14" name="Shape 12"/>
+          <p:cNvSpPr/>
+          <p:nvPr/>
+        </p:nvSpPr>
+        <p:spPr>
+          <a:xfrm>
+            <a:off x="4368698" y="1965960"/>
+            <a:ext cx="3454298" cy="1783080"/>
+          </a:xfrm>
+          <a:prstGeom prst="roundRect">
+            <a:avLst>
+              <a:gd name="adj" fmla="val 3590"/>
+            </a:avLst>
+          </a:prstGeom>
+          <a:ln w="12700">
+            <a:solidFill>
+              <a:srgbClr val="3FE0FF">
+                <a:alpha val="70000"/>
+              </a:srgbClr>
+            </a:solidFill>
+            <a:prstDash val="solid"/>
+          </a:ln>
+          <a:effectLst>
+            <a:outerShdw sx="100000" sy="100000" kx="0" ky="0" algn="bl" rotWithShape="0" blurRad="101600" dist="50800" dir="16200000">
+              <a:srgbClr val="3FE0FF">
+                <a:alpha val="28000"/>
+              </a:srgbClr>
+            </a:outerShdw>
+          </a:effectLst>
+        </p:spPr>
+      </p:sp>
+      <p:sp>
+        <p:nvSpPr>
+          <p:cNvPr id="15" name="Shape 13"/>
+          <p:cNvSpPr/>
+          <p:nvPr/>
+        </p:nvSpPr>
+        <p:spPr>
+          <a:xfrm>
+            <a:off x="4543440" y="1975104"/>
+            <a:ext cx="3104815" cy="18288"/>
+          </a:xfrm>
+          <a:prstGeom prst="rect">
+            <a:avLst/>
+          </a:prstGeom>
+          <a:solidFill>
+            <a:srgbClr val="3FE0FF">
+              <a:alpha val="65000"/>
+            </a:srgbClr>
+          </a:solidFill>
+          <a:ln/>
+        </p:spPr>
+      </p:sp>
+      <p:sp>
+        <p:nvSpPr>
+          <p:cNvPr id="16" name="Shape 14"/>
+          <p:cNvSpPr/>
+          <p:nvPr/>
+        </p:nvSpPr>
+        <p:spPr>
+          <a:xfrm>
+            <a:off x="7493813" y="2084832"/>
+            <a:ext cx="274320" cy="274320"/>
+          </a:xfrm>
+          <a:prstGeom prst="ellipse">
+            <a:avLst/>
+          </a:prstGeom>
+          <a:solidFill>
+            <a:srgbClr val="3FE0FF"/>
+          </a:solidFill>
+          <a:ln/>
+          <a:effectLst>
+            <a:outerShdw sx="100000" sy="100000" kx="0" ky="0" algn="bl" rotWithShape="0" blurRad="76200" dist="50800" dir="16200000">
+              <a:srgbClr val="3FE0FF">
+                <a:alpha val="50000"/>
+              </a:srgbClr>
+            </a:outerShdw>
+          </a:effectLst>
+        </p:spPr>
+      </p:sp>
+      <p:sp>
+        <p:nvSpPr>
+          <p:cNvPr id="17" name="Text 15"/>
+          <p:cNvSpPr/>
+          <p:nvPr/>
+        </p:nvSpPr>
+        <p:spPr>
+          <a:xfrm>
+            <a:off x="7493813" y="2084832"/>
+            <a:ext cx="274320" cy="274320"/>
+          </a:xfrm>
+          <a:prstGeom prst="rect">
+            <a:avLst/>
+          </a:prstGeom>
+          <a:noFill/>
+          <a:ln/>
+        </p:spPr>
+        <p:txBody>
+          <a:bodyPr wrap="square" rtlCol="0" anchor="ctr"/>
+          <a:lstStyle/>
+          <a:p>
+            <a:pPr algn="ctr" indent="0" marL="0">
+              <a:buNone/>
+            </a:pPr>
+            <a:r>
+              <a:rPr lang="en-US" sz="1320" b="1" dirty="0">
+                <a:solidFill>
+                  <a:srgbClr val="14161C"/>
+                </a:solidFill>
+                <a:latin typeface="Bahnschrift" pitchFamily="34" charset="0"/>
+                <a:ea typeface="Bahnschrift" pitchFamily="34" charset="-122"/>
+                <a:cs typeface="Bahnschrift" pitchFamily="34" charset="-120"/>
+              </a:rPr>
+              <a:t>2</a:t>
+            </a:r>
+            <a:endParaRPr lang="en-US" sz="1320" dirty="0"/>
+          </a:p>
+        </p:txBody>
+      </p:sp>
+      <p:sp>
+        <p:nvSpPr>
+          <p:cNvPr id="18" name="Text 16"/>
+          <p:cNvSpPr/>
+          <p:nvPr/>
+        </p:nvSpPr>
+        <p:spPr>
+          <a:xfrm>
+            <a:off x="4569866" y="2103120"/>
+            <a:ext cx="2905658" cy="274320"/>
+          </a:xfrm>
+          <a:prstGeom prst="rect">
+            <a:avLst/>
+          </a:prstGeom>
+          <a:noFill/>
+          <a:ln/>
+        </p:spPr>
+        <p:txBody>
+          <a:bodyPr wrap="square" rtlCol="0" anchor="ctr"/>
+          <a:lstStyle/>
+          <a:p>
+            <a:pPr indent="0" marL="0">
+              <a:buNone/>
+            </a:pPr>
+            <a:r>
+              <a:rPr lang="en-US" sz="1000" dirty="0">
+                <a:solidFill>
+                  <a:srgbClr val="3FE0FF"/>
+                </a:solidFill>
+                <a:latin typeface="Segoe UI" pitchFamily="34" charset="0"/>
+                <a:ea typeface="Segoe UI" pitchFamily="34" charset="-122"/>
+                <a:cs typeface="Segoe UI" pitchFamily="34" charset="-120"/>
+              </a:rPr>
+              <a:t>Phase 2 — Après traction</a:t>
+            </a:r>
+            <a:endParaRPr lang="en-US" sz="1000" dirty="0"/>
+          </a:p>
+        </p:txBody>
+      </p:sp>
+      <p:sp>
+        <p:nvSpPr>
+          <p:cNvPr id="19" name="Text 17"/>
+          <p:cNvSpPr/>
+          <p:nvPr/>
+        </p:nvSpPr>
+        <p:spPr>
+          <a:xfrm>
+            <a:off x="4569866" y="2377440"/>
+            <a:ext cx="3088538" cy="548640"/>
+          </a:xfrm>
+          <a:prstGeom prst="rect">
+            <a:avLst/>
+          </a:prstGeom>
+          <a:noFill/>
+          <a:ln/>
+        </p:spPr>
+        <p:txBody>
+          <a:bodyPr wrap="square" rtlCol="0" anchor="t"/>
+          <a:lstStyle/>
+          <a:p>
+            <a:pPr indent="0" marL="0">
+              <a:buNone/>
+            </a:pPr>
+            <a:r>
+              <a:rPr lang="en-US" sz="1350" b="1" dirty="0">
+                <a:solidFill>
+                  <a:srgbClr val="F5F3EE"/>
+                </a:solidFill>
+                <a:latin typeface="Bahnschrift" pitchFamily="34" charset="0"/>
+                <a:ea typeface="Bahnschrift" pitchFamily="34" charset="-122"/>
+                <a:cs typeface="Bahnschrift" pitchFamily="34" charset="-120"/>
+              </a:rPr>
+              <a:t>Commission sur services rendus</a:t>
+            </a:r>
+            <a:endParaRPr lang="en-US" sz="1350" dirty="0"/>
+          </a:p>
+        </p:txBody>
+      </p:sp>
+      <p:sp>
+        <p:nvSpPr>
+          <p:cNvPr id="20" name="Text 18"/>
+          <p:cNvSpPr/>
+          <p:nvPr/>
+        </p:nvSpPr>
+        <p:spPr>
+          <a:xfrm>
+            <a:off x="4569866" y="2971800"/>
+            <a:ext cx="3051962" cy="1600200"/>
+          </a:xfrm>
+          <a:prstGeom prst="rect">
+            <a:avLst/>
+          </a:prstGeom>
+          <a:noFill/>
+          <a:ln/>
+        </p:spPr>
+        <p:txBody>
+          <a:bodyPr wrap="square" rtlCol="0" anchor="t"/>
+          <a:lstStyle/>
+          <a:p>
+            <a:pPr indent="0" marL="0">
+              <a:lnSpc>
+                <a:spcPct val="120000"/>
+              </a:lnSpc>
+              <a:buNone/>
+            </a:pPr>
+            <a:r>
+              <a:rPr lang="en-US" sz="1000" dirty="0">
+                <a:solidFill>
+                  <a:srgbClr val="A3ABBD"/>
+                </a:solidFill>
+                <a:latin typeface="Segoe UI" pitchFamily="34" charset="0"/>
+                <a:ea typeface="Segoe UI" pitchFamily="34" charset="-122"/>
+                <a:cs typeface="Segoe UI" pitchFamily="34" charset="-120"/>
+              </a:rPr>
+              <a:t>Une fois la confiance et l'usage établis via la Phase 1, commission sur les mises en relation payantes entre étudiants.</a:t>
+            </a:r>
+            <a:endParaRPr lang="en-US" sz="1000" dirty="0"/>
+          </a:p>
+        </p:txBody>
+      </p:sp>
+      <p:sp>
+        <p:nvSpPr>
+          <p:cNvPr id="21" name="Shape 19"/>
+          <p:cNvSpPr/>
+          <p:nvPr/>
+        </p:nvSpPr>
+        <p:spPr>
+          <a:xfrm>
+            <a:off x="8097317" y="1965960"/>
+            <a:ext cx="3454298" cy="1783080"/>
+          </a:xfrm>
+          <a:prstGeom prst="roundRect">
+            <a:avLst>
+              <a:gd name="adj" fmla="val 3590"/>
+            </a:avLst>
+          </a:prstGeom>
+          <a:ln w="12700">
+            <a:solidFill>
+              <a:srgbClr val="2FE894">
+                <a:alpha val="70000"/>
+              </a:srgbClr>
+            </a:solidFill>
+            <a:prstDash val="solid"/>
+          </a:ln>
+          <a:effectLst>
+            <a:outerShdw sx="100000" sy="100000" kx="0" ky="0" algn="bl" rotWithShape="0" blurRad="101600" dist="50800" dir="16200000">
+              <a:srgbClr val="2FE894">
+                <a:alpha val="28000"/>
+              </a:srgbClr>
+            </a:outerShdw>
+          </a:effectLst>
+        </p:spPr>
+      </p:sp>
+      <p:sp>
+        <p:nvSpPr>
+          <p:cNvPr id="22" name="Shape 20"/>
+          <p:cNvSpPr/>
+          <p:nvPr/>
+        </p:nvSpPr>
+        <p:spPr>
+          <a:xfrm>
+            <a:off x="8272059" y="1975104"/>
+            <a:ext cx="3104815" cy="18288"/>
+          </a:xfrm>
+          <a:prstGeom prst="rect">
+            <a:avLst/>
+          </a:prstGeom>
+          <a:solidFill>
+            <a:srgbClr val="2FE894">
+              <a:alpha val="65000"/>
+            </a:srgbClr>
+          </a:solidFill>
+          <a:ln/>
+        </p:spPr>
+      </p:sp>
+      <p:sp>
+        <p:nvSpPr>
+          <p:cNvPr id="23" name="Shape 21"/>
+          <p:cNvSpPr/>
+          <p:nvPr/>
+        </p:nvSpPr>
+        <p:spPr>
+          <a:xfrm>
+            <a:off x="11222431" y="2084832"/>
+            <a:ext cx="274320" cy="274320"/>
+          </a:xfrm>
+          <a:prstGeom prst="ellipse">
+            <a:avLst/>
+          </a:prstGeom>
+          <a:solidFill>
+            <a:srgbClr val="2FE894"/>
+          </a:solidFill>
+          <a:ln/>
+          <a:effectLst>
+            <a:outerShdw sx="100000" sy="100000" kx="0" ky="0" algn="bl" rotWithShape="0" blurRad="76200" dist="50800" dir="16200000">
+              <a:srgbClr val="2FE894">
+                <a:alpha val="50000"/>
+              </a:srgbClr>
+            </a:outerShdw>
+          </a:effectLst>
+        </p:spPr>
+      </p:sp>
+      <p:sp>
+        <p:nvSpPr>
+          <p:cNvPr id="24" name="Text 22"/>
+          <p:cNvSpPr/>
+          <p:nvPr/>
+        </p:nvSpPr>
+        <p:spPr>
+          <a:xfrm>
+            <a:off x="11222431" y="2084832"/>
+            <a:ext cx="274320" cy="274320"/>
+          </a:xfrm>
+          <a:prstGeom prst="rect">
+            <a:avLst/>
+          </a:prstGeom>
+          <a:noFill/>
+          <a:ln/>
+        </p:spPr>
+        <p:txBody>
+          <a:bodyPr wrap="square" rtlCol="0" anchor="ctr"/>
+          <a:lstStyle/>
+          <a:p>
+            <a:pPr algn="ctr" indent="0" marL="0">
+              <a:buNone/>
+            </a:pPr>
+            <a:r>
+              <a:rPr lang="en-US" sz="1320" b="1" dirty="0">
+                <a:solidFill>
+                  <a:srgbClr val="14161C"/>
+                </a:solidFill>
+                <a:latin typeface="Bahnschrift" pitchFamily="34" charset="0"/>
+                <a:ea typeface="Bahnschrift" pitchFamily="34" charset="-122"/>
+                <a:cs typeface="Bahnschrift" pitchFamily="34" charset="-120"/>
+              </a:rPr>
+              <a:t>3</a:t>
+            </a:r>
+            <a:endParaRPr lang="en-US" sz="1320" dirty="0"/>
+          </a:p>
+        </p:txBody>
+      </p:sp>
+      <p:sp>
+        <p:nvSpPr>
+          <p:cNvPr id="25" name="Text 23"/>
+          <p:cNvSpPr/>
+          <p:nvPr/>
+        </p:nvSpPr>
+        <p:spPr>
+          <a:xfrm>
+            <a:off x="8298485" y="2103120"/>
+            <a:ext cx="2905658" cy="274320"/>
+          </a:xfrm>
+          <a:prstGeom prst="rect">
+            <a:avLst/>
+          </a:prstGeom>
+          <a:noFill/>
+          <a:ln/>
+        </p:spPr>
+        <p:txBody>
+          <a:bodyPr wrap="square" rtlCol="0" anchor="ctr"/>
+          <a:lstStyle/>
+          <a:p>
+            <a:pPr indent="0" marL="0">
+              <a:buNone/>
+            </a:pPr>
+            <a:r>
+              <a:rPr lang="en-US" sz="1000" dirty="0">
+                <a:solidFill>
+                  <a:srgbClr val="2FE894"/>
+                </a:solidFill>
+                <a:latin typeface="Segoe UI" pitchFamily="34" charset="0"/>
+                <a:ea typeface="Segoe UI" pitchFamily="34" charset="-122"/>
+                <a:cs typeface="Segoe UI" pitchFamily="34" charset="-120"/>
+              </a:rPr>
+              <a:t>Phase 3 — Vision</a:t>
+            </a:r>
+            <a:endParaRPr lang="en-US" sz="1000" dirty="0"/>
+          </a:p>
+        </p:txBody>
+      </p:sp>
+      <p:sp>
+        <p:nvSpPr>
+          <p:cNvPr id="26" name="Text 24"/>
+          <p:cNvSpPr/>
+          <p:nvPr/>
+        </p:nvSpPr>
+        <p:spPr>
+          <a:xfrm>
+            <a:off x="8298485" y="2377440"/>
+            <a:ext cx="3088538" cy="548640"/>
+          </a:xfrm>
+          <a:prstGeom prst="rect">
+            <a:avLst/>
+          </a:prstGeom>
+          <a:noFill/>
+          <a:ln/>
+        </p:spPr>
+        <p:txBody>
+          <a:bodyPr wrap="square" rtlCol="0" anchor="t"/>
+          <a:lstStyle/>
+          <a:p>
+            <a:pPr indent="0" marL="0">
+              <a:buNone/>
+            </a:pPr>
+            <a:r>
+              <a:rPr lang="en-US" sz="1350" b="1" dirty="0">
+                <a:solidFill>
+                  <a:srgbClr val="F5F3EE"/>
+                </a:solidFill>
+                <a:latin typeface="Bahnschrift" pitchFamily="34" charset="0"/>
+                <a:ea typeface="Bahnschrift" pitchFamily="34" charset="-122"/>
+                <a:cs typeface="Bahnschrift" pitchFamily="34" charset="-120"/>
+              </a:rPr>
+              <a:t>Licence à d'autres diasporas</a:t>
+            </a:r>
+            <a:endParaRPr lang="en-US" sz="1350" dirty="0"/>
+          </a:p>
+        </p:txBody>
+      </p:sp>
+      <p:sp>
+        <p:nvSpPr>
+          <p:cNvPr id="27" name="Text 25"/>
+          <p:cNvSpPr/>
+          <p:nvPr/>
+        </p:nvSpPr>
+        <p:spPr>
+          <a:xfrm>
+            <a:off x="8298485" y="2971800"/>
+            <a:ext cx="3051962" cy="1600200"/>
+          </a:xfrm>
+          <a:prstGeom prst="rect">
+            <a:avLst/>
+          </a:prstGeom>
+          <a:noFill/>
+          <a:ln/>
+        </p:spPr>
+        <p:txBody>
+          <a:bodyPr wrap="square" rtlCol="0" anchor="t"/>
+          <a:lstStyle/>
+          <a:p>
+            <a:pPr indent="0" marL="0">
+              <a:lnSpc>
+                <a:spcPct val="120000"/>
+              </a:lnSpc>
+              <a:buNone/>
+            </a:pPr>
+            <a:r>
+              <a:rPr lang="en-US" sz="1000" dirty="0">
+                <a:solidFill>
+                  <a:srgbClr val="A3ABBD"/>
+                </a:solidFill>
+                <a:latin typeface="Segoe UI" pitchFamily="34" charset="0"/>
+                <a:ea typeface="Segoe UI" pitchFamily="34" charset="-122"/>
+                <a:cs typeface="Segoe UI" pitchFamily="34" charset="-120"/>
+              </a:rPr>
+              <a:t>Architecture (carte, réputation, sponsoring vérifié, modération spatiale) transposable à toute communauté étudiante structurée autour d'une association reconnue.</a:t>
+            </a:r>
+            <a:endParaRPr lang="en-US" sz="1000" dirty="0"/>
+          </a:p>
+        </p:txBody>
+      </p:sp>
+      <p:sp>
+        <p:nvSpPr>
+          <p:cNvPr id="28" name="Shape 26"/>
+          <p:cNvSpPr/>
+          <p:nvPr/>
+        </p:nvSpPr>
+        <p:spPr>
+          <a:xfrm>
+            <a:off x="640080" y="4069080"/>
+            <a:ext cx="3566160" cy="1691640"/>
+          </a:xfrm>
+          <a:prstGeom prst="roundRect">
+            <a:avLst>
+              <a:gd name="adj" fmla="val 4324"/>
+            </a:avLst>
+          </a:prstGeom>
+          <a:solidFill>
+            <a:srgbClr val="242836"/>
+          </a:solidFill>
+          <a:ln w="12700">
+            <a:solidFill>
+              <a:srgbClr val="363C4C"/>
+            </a:solidFill>
+            <a:prstDash val="solid"/>
+          </a:ln>
+        </p:spPr>
+      </p:sp>
+      <p:sp>
+        <p:nvSpPr>
+          <p:cNvPr id="29" name="Shape 27"/>
+          <p:cNvSpPr/>
+          <p:nvPr/>
+        </p:nvSpPr>
+        <p:spPr>
+          <a:xfrm>
+            <a:off x="1563587" y="4758171"/>
+            <a:ext cx="362390" cy="16070"/>
+          </a:xfrm>
+          <a:prstGeom prst="line">
+            <a:avLst/>
+          </a:prstGeom>
+          <a:noFill/>
+          <a:ln w="9525">
+            <a:solidFill>
+              <a:srgbClr val="3FE0FF">
+                <a:alpha val="45000"/>
+              </a:srgbClr>
+            </a:solidFill>
+            <a:prstDash val="solid"/>
+          </a:ln>
+        </p:spPr>
+      </p:sp>
+      <p:sp>
+        <p:nvSpPr>
+          <p:cNvPr id="30" name="Shape 28"/>
+          <p:cNvSpPr/>
+          <p:nvPr/>
+        </p:nvSpPr>
+        <p:spPr>
+          <a:xfrm>
+            <a:off x="1287355" y="4774241"/>
+            <a:ext cx="638622" cy="86061"/>
+          </a:xfrm>
+          <a:prstGeom prst="line">
+            <a:avLst/>
+          </a:prstGeom>
+          <a:noFill/>
+          <a:ln w="9525">
+            <a:solidFill>
+              <a:srgbClr val="3FE0FF">
+                <a:alpha val="45000"/>
+              </a:srgbClr>
+            </a:solidFill>
+            <a:prstDash val="solid"/>
+          </a:ln>
+        </p:spPr>
+      </p:sp>
+      <p:sp>
+        <p:nvSpPr>
+          <p:cNvPr id="31" name="Shape 29"/>
+          <p:cNvSpPr/>
+          <p:nvPr/>
+        </p:nvSpPr>
+        <p:spPr>
+          <a:xfrm>
+            <a:off x="1143000" y="4774241"/>
+            <a:ext cx="782977" cy="529279"/>
+          </a:xfrm>
+          <a:prstGeom prst="line">
+            <a:avLst/>
+          </a:prstGeom>
+          <a:noFill/>
+          <a:ln w="9525">
+            <a:solidFill>
+              <a:srgbClr val="3FE0FF">
+                <a:alpha val="45000"/>
+              </a:srgbClr>
+            </a:solidFill>
+            <a:prstDash val="solid"/>
+          </a:ln>
+        </p:spPr>
+      </p:sp>
+      <p:sp>
+        <p:nvSpPr>
+          <p:cNvPr id="32" name="Shape 30"/>
+          <p:cNvSpPr/>
+          <p:nvPr/>
+        </p:nvSpPr>
+        <p:spPr>
+          <a:xfrm>
+            <a:off x="1925977" y="4755411"/>
+            <a:ext cx="317173" cy="18830"/>
+          </a:xfrm>
+          <a:prstGeom prst="line">
+            <a:avLst/>
+          </a:prstGeom>
+          <a:noFill/>
+          <a:ln w="9525">
+            <a:solidFill>
+              <a:srgbClr val="3FE0FF">
+                <a:alpha val="45000"/>
+              </a:srgbClr>
+            </a:solidFill>
+            <a:prstDash val="solid"/>
+          </a:ln>
+        </p:spPr>
+      </p:sp>
+      <p:sp>
+        <p:nvSpPr>
+          <p:cNvPr id="33" name="Shape 31"/>
+          <p:cNvSpPr/>
+          <p:nvPr/>
+        </p:nvSpPr>
+        <p:spPr>
+          <a:xfrm>
+            <a:off x="1925977" y="4361688"/>
+            <a:ext cx="9513" cy="412553"/>
+          </a:xfrm>
+          <a:prstGeom prst="line">
+            <a:avLst/>
+          </a:prstGeom>
+          <a:noFill/>
+          <a:ln w="9525">
+            <a:solidFill>
+              <a:srgbClr val="3FE0FF">
+                <a:alpha val="45000"/>
+              </a:srgbClr>
+            </a:solidFill>
+            <a:prstDash val="solid"/>
+          </a:ln>
+        </p:spPr>
+      </p:sp>
+      <p:sp>
+        <p:nvSpPr>
+          <p:cNvPr id="34" name="Shape 32"/>
+          <p:cNvSpPr/>
+          <p:nvPr/>
+        </p:nvSpPr>
+        <p:spPr>
+          <a:xfrm>
+            <a:off x="1925977" y="4606355"/>
+            <a:ext cx="1457303" cy="167886"/>
+          </a:xfrm>
+          <a:prstGeom prst="line">
+            <a:avLst/>
+          </a:prstGeom>
+          <a:noFill/>
+          <a:ln w="9525">
+            <a:solidFill>
+              <a:srgbClr val="3FE0FF">
+                <a:alpha val="45000"/>
+              </a:srgbClr>
+            </a:solidFill>
+            <a:prstDash val="solid"/>
+          </a:ln>
+        </p:spPr>
+      </p:sp>
+      <p:sp>
+        <p:nvSpPr>
+          <p:cNvPr id="35" name="Shape 33"/>
+          <p:cNvSpPr/>
+          <p:nvPr/>
+        </p:nvSpPr>
+        <p:spPr>
+          <a:xfrm>
+            <a:off x="1453859" y="4648443"/>
+            <a:ext cx="219456" cy="219456"/>
+          </a:xfrm>
+          <a:prstGeom prst="ellipse">
+            <a:avLst/>
+          </a:prstGeom>
+          <a:solidFill>
+            <a:srgbClr val="FFC94D"/>
+          </a:solidFill>
+          <a:ln w="9525">
+            <a:solidFill>
+              <a:srgbClr val="14161C"/>
+            </a:solidFill>
+            <a:prstDash val="solid"/>
+          </a:ln>
+          <a:effectLst>
+            <a:outerShdw sx="100000" sy="100000" kx="0" ky="0" algn="bl" rotWithShape="0" blurRad="63500" dist="50800" dir="16200000">
+              <a:srgbClr val="FFC94D">
+                <a:alpha val="40000"/>
+              </a:srgbClr>
+            </a:outerShdw>
+          </a:effectLst>
+        </p:spPr>
+      </p:sp>
+      <p:sp>
+        <p:nvSpPr>
+          <p:cNvPr id="36" name="Shape 34"/>
+          <p:cNvSpPr/>
+          <p:nvPr/>
+        </p:nvSpPr>
+        <p:spPr>
+          <a:xfrm>
+            <a:off x="1187315" y="4760262"/>
+            <a:ext cx="200080" cy="200080"/>
+          </a:xfrm>
+          <a:prstGeom prst="ellipse">
+            <a:avLst/>
+          </a:prstGeom>
+          <a:solidFill>
+            <a:srgbClr val="FFC94D"/>
+          </a:solidFill>
+          <a:ln w="9525">
+            <a:solidFill>
+              <a:srgbClr val="14161C"/>
+            </a:solidFill>
+            <a:prstDash val="solid"/>
+          </a:ln>
+          <a:effectLst>
+            <a:outerShdw sx="100000" sy="100000" kx="0" ky="0" algn="bl" rotWithShape="0" blurRad="63500" dist="50800" dir="16200000">
+              <a:srgbClr val="FFC94D">
+                <a:alpha val="40000"/>
+              </a:srgbClr>
+            </a:outerShdw>
+          </a:effectLst>
+        </p:spPr>
+      </p:sp>
+      <p:sp>
+        <p:nvSpPr>
+          <p:cNvPr id="37" name="Shape 35"/>
+          <p:cNvSpPr/>
+          <p:nvPr/>
+        </p:nvSpPr>
+        <p:spPr>
+          <a:xfrm>
+            <a:off x="1068068" y="5228588"/>
+            <a:ext cx="149865" cy="149865"/>
+          </a:xfrm>
+          <a:prstGeom prst="ellipse">
+            <a:avLst/>
+          </a:prstGeom>
+          <a:solidFill>
+            <a:srgbClr val="FFC94D"/>
+          </a:solidFill>
+          <a:ln w="9525">
+            <a:solidFill>
+              <a:srgbClr val="14161C"/>
+            </a:solidFill>
+            <a:prstDash val="solid"/>
+          </a:ln>
+          <a:effectLst>
+            <a:outerShdw sx="100000" sy="100000" kx="0" ky="0" algn="bl" rotWithShape="0" blurRad="63500" dist="50800" dir="16200000">
+              <a:srgbClr val="FFC94D">
+                <a:alpha val="40000"/>
+              </a:srgbClr>
+            </a:outerShdw>
+          </a:effectLst>
+        </p:spPr>
+      </p:sp>
+      <p:sp>
+        <p:nvSpPr>
+          <p:cNvPr id="38" name="Shape 36"/>
+          <p:cNvSpPr/>
+          <p:nvPr/>
+        </p:nvSpPr>
+        <p:spPr>
+          <a:xfrm>
+            <a:off x="2171826" y="4684086"/>
+            <a:ext cx="142650" cy="142650"/>
+          </a:xfrm>
+          <a:prstGeom prst="ellipse">
+            <a:avLst/>
+          </a:prstGeom>
+          <a:solidFill>
+            <a:srgbClr val="FFC94D"/>
+          </a:solidFill>
+          <a:ln w="9525">
+            <a:solidFill>
+              <a:srgbClr val="14161C"/>
+            </a:solidFill>
+            <a:prstDash val="solid"/>
+          </a:ln>
+          <a:effectLst>
+            <a:outerShdw sx="100000" sy="100000" kx="0" ky="0" algn="bl" rotWithShape="0" blurRad="63500" dist="50800" dir="16200000">
+              <a:srgbClr val="FFC94D">
+                <a:alpha val="40000"/>
+              </a:srgbClr>
+            </a:outerShdw>
+          </a:effectLst>
+        </p:spPr>
+      </p:sp>
+      <p:sp>
+        <p:nvSpPr>
+          <p:cNvPr id="39" name="Shape 37"/>
+          <p:cNvSpPr/>
+          <p:nvPr/>
+        </p:nvSpPr>
+        <p:spPr>
+          <a:xfrm>
+            <a:off x="1883973" y="4310171"/>
+            <a:ext cx="103035" cy="103035"/>
+          </a:xfrm>
+          <a:prstGeom prst="ellipse">
+            <a:avLst/>
+          </a:prstGeom>
+          <a:solidFill>
+            <a:srgbClr val="FFC94D"/>
+          </a:solidFill>
+          <a:ln w="9525">
+            <a:solidFill>
+              <a:srgbClr val="14161C"/>
+            </a:solidFill>
+            <a:prstDash val="solid"/>
+          </a:ln>
+          <a:effectLst>
+            <a:outerShdw sx="100000" sy="100000" kx="0" ky="0" algn="bl" rotWithShape="0" blurRad="63500" dist="50800" dir="16200000">
+              <a:srgbClr val="FFC94D">
+                <a:alpha val="40000"/>
+              </a:srgbClr>
+            </a:outerShdw>
+          </a:effectLst>
+        </p:spPr>
+      </p:sp>
+      <p:sp>
+        <p:nvSpPr>
+          <p:cNvPr id="40" name="Shape 38"/>
+          <p:cNvSpPr/>
+          <p:nvPr/>
+        </p:nvSpPr>
+        <p:spPr>
+          <a:xfrm>
+            <a:off x="3337560" y="4560635"/>
+            <a:ext cx="91440" cy="91440"/>
+          </a:xfrm>
+          <a:prstGeom prst="ellipse">
+            <a:avLst/>
+          </a:prstGeom>
+          <a:solidFill>
+            <a:srgbClr val="FFC94D"/>
+          </a:solidFill>
+          <a:ln w="9525">
+            <a:solidFill>
+              <a:srgbClr val="14161C"/>
+            </a:solidFill>
+            <a:prstDash val="solid"/>
+          </a:ln>
+          <a:effectLst>
+            <a:outerShdw sx="100000" sy="100000" kx="0" ky="0" algn="bl" rotWithShape="0" blurRad="63500" dist="50800" dir="16200000">
+              <a:srgbClr val="FFC94D">
+                <a:alpha val="40000"/>
+              </a:srgbClr>
+            </a:outerShdw>
+          </a:effectLst>
+        </p:spPr>
+      </p:sp>
+      <p:sp>
+        <p:nvSpPr>
+          <p:cNvPr id="41" name="Text 39"/>
+          <p:cNvSpPr/>
+          <p:nvPr/>
+        </p:nvSpPr>
+        <p:spPr>
+          <a:xfrm>
+            <a:off x="868680" y="5468112"/>
+            <a:ext cx="3108960" cy="256032"/>
+          </a:xfrm>
+          <a:prstGeom prst="rect">
+            <a:avLst/>
+          </a:prstGeom>
+          <a:noFill/>
+          <a:ln/>
+        </p:spPr>
+        <p:txBody>
+          <a:bodyPr wrap="square" rtlCol="0" anchor="ctr"/>
+          <a:lstStyle/>
+          <a:p>
+            <a:pPr algn="ctr" indent="0" marL="0">
+              <a:buNone/>
+            </a:pPr>
+            <a:r>
+              <a:rPr lang="en-US" sz="750" dirty="0">
+                <a:solidFill>
+                  <a:srgbClr val="A3ABBD"/>
+                </a:solidFill>
+                <a:latin typeface="Segoe UI" pitchFamily="34" charset="0"/>
+                <a:ea typeface="Segoe UI" pitchFamily="34" charset="-122"/>
+                <a:cs typeface="Segoe UI" pitchFamily="34" charset="-120"/>
+              </a:rPr>
+              <a:t>Rabat 220  ·  Casablanca 180  ·  Marrakech 95  ·  Fès 85  ·  Tanger 40  ·  Oujda 30</a:t>
+            </a:r>
+            <a:endParaRPr lang="en-US" sz="750" dirty="0"/>
+          </a:p>
+        </p:txBody>
+      </p:sp>
+      <p:sp>
+        <p:nvSpPr>
+          <p:cNvPr id="42" name="Text 40"/>
+          <p:cNvSpPr/>
+          <p:nvPr/>
+        </p:nvSpPr>
+        <p:spPr>
+          <a:xfrm>
+            <a:off x="4480560" y="4069080"/>
+            <a:ext cx="7071055" cy="1691640"/>
+          </a:xfrm>
+          <a:prstGeom prst="rect">
+            <a:avLst/>
+          </a:prstGeom>
+          <a:noFill/>
+          <a:ln/>
+        </p:spPr>
+        <p:txBody>
+          <a:bodyPr wrap="square" rtlCol="0" anchor="ctr"/>
+          <a:lstStyle/>
+          <a:p>
+            <a:pPr indent="0" marL="0">
+              <a:lnSpc>
+                <a:spcPct val="115000"/>
+              </a:lnSpc>
+              <a:buNone/>
+            </a:pPr>
+            <a:r>
+              <a:rPr lang="en-US" sz="2800" b="1" dirty="0">
+                <a:solidFill>
+                  <a:srgbClr val="FFC94D"/>
+                </a:solidFill>
+                <a:latin typeface="Bahnschrift" pitchFamily="34" charset="0"/>
+                <a:ea typeface="Bahnschrift" pitchFamily="34" charset="-122"/>
+                <a:cs typeface="Bahnschrift" pitchFamily="34" charset="-120"/>
+              </a:rPr>
+              <a:t>650</a:t>
+            </a:r>
+            <a:endParaRPr lang="en-US" sz="2800" dirty="0"/>
+          </a:p>
+          <a:p>
+            <a:pPr indent="0" marL="0">
+              <a:lnSpc>
+                <a:spcPct val="115000"/>
+              </a:lnSpc>
+              <a:buNone/>
+            </a:pPr>
+            <a:r>
+              <a:rPr lang="en-US" sz="1100" dirty="0">
+                <a:solidFill>
+                  <a:srgbClr val="F5F3EE"/>
+                </a:solidFill>
+                <a:latin typeface="Bahnschrift" pitchFamily="34" charset="0"/>
+                <a:ea typeface="Bahnschrift" pitchFamily="34" charset="-122"/>
+                <a:cs typeface="Bahnschrift" pitchFamily="34" charset="-120"/>
+              </a:rPr>
+              <a:t>membres CESTOM, 6 villes</a:t>
+            </a:r>
+            <a:endParaRPr lang="en-US" sz="2800" dirty="0"/>
+          </a:p>
+          <a:p>
+            <a:pPr indent="0" marL="0">
+              <a:lnSpc>
+                <a:spcPct val="115000"/>
+              </a:lnSpc>
+              <a:buNone/>
+            </a:pPr>
+            <a:r>
+              <a:rPr lang="en-US" sz="800" dirty="0">
+                <a:solidFill>
+                  <a:srgbClr val="A3ABBD"/>
+                </a:solidFill>
+                <a:latin typeface="Bahnschrift" pitchFamily="34" charset="0"/>
+                <a:ea typeface="Bahnschrift" pitchFamily="34" charset="-122"/>
+                <a:cs typeface="Bahnschrift" pitchFamily="34" charset="-120"/>
+              </a:rPr>
+              <a:t>Source : cestom.org</a:t>
+            </a:r>
+            <a:endParaRPr lang="en-US" sz="2800" dirty="0"/>
+          </a:p>
+        </p:txBody>
+      </p:sp>
+      <p:sp>
+        <p:nvSpPr>
+          <p:cNvPr id="43" name="Text 41"/>
+          <p:cNvSpPr/>
+          <p:nvPr/>
+        </p:nvSpPr>
+        <p:spPr>
+          <a:xfrm>
+            <a:off x="640080" y="6400800"/>
+            <a:ext cx="6400800" cy="274320"/>
+          </a:xfrm>
+          <a:prstGeom prst="rect">
+            <a:avLst/>
+          </a:prstGeom>
+          <a:noFill/>
+          <a:ln/>
+        </p:spPr>
+        <p:txBody>
+          <a:bodyPr wrap="square" rtlCol="0" anchor="ctr"/>
+          <a:lstStyle/>
+          <a:p>
+            <a:pPr indent="0" marL="0">
+              <a:buNone/>
+            </a:pPr>
+            <a:r>
+              <a:rPr lang="en-US" sz="1000" b="1" spc="100" kern="0" dirty="0">
+                <a:solidFill>
+                  <a:srgbClr val="A3ABBD"/>
+                </a:solidFill>
+                <a:latin typeface="Bahnschrift" pitchFamily="34" charset="0"/>
+                <a:ea typeface="Bahnschrift" pitchFamily="34" charset="-122"/>
+                <a:cs typeface="Bahnschrift" pitchFamily="34" charset="-120"/>
+              </a:rPr>
+              <a:t>CESTOMCLASH228  </a:t>
+            </a:r>
+            <a:pPr indent="0" marL="0">
+              <a:buNone/>
+            </a:pPr>
+            <a:r>
+              <a:rPr lang="en-US" sz="1000" spc="100" kern="0" dirty="0">
+                <a:solidFill>
+                  <a:srgbClr val="A3ABBD"/>
+                </a:solidFill>
+                <a:latin typeface="Bahnschrift" pitchFamily="34" charset="0"/>
+                <a:ea typeface="Bahnschrift" pitchFamily="34" charset="-122"/>
+                <a:cs typeface="Bahnschrift" pitchFamily="34" charset="-120"/>
+              </a:rPr>
+              <a:t>· Explore. Partage. Level-up.</a:t>
+            </a:r>
+            <a:endParaRPr lang="en-US" sz="1000" dirty="0"/>
+          </a:p>
+        </p:txBody>
+      </p:sp>
+      <p:sp>
+        <p:nvSpPr>
+          <p:cNvPr id="44" name="Text 42"/>
+          <p:cNvSpPr/>
+          <p:nvPr/>
+        </p:nvSpPr>
+        <p:spPr>
+          <a:xfrm>
+            <a:off x="7894015" y="6400800"/>
+            <a:ext cx="3657600" cy="274320"/>
+          </a:xfrm>
+          <a:prstGeom prst="rect">
+            <a:avLst/>
+          </a:prstGeom>
+          <a:noFill/>
+          <a:ln/>
+        </p:spPr>
+        <p:txBody>
+          <a:bodyPr wrap="square" rtlCol="0" anchor="ctr"/>
+          <a:lstStyle/>
+          <a:p>
+            <a:pPr algn="r" indent="0" marL="0">
+              <a:buNone/>
+            </a:pPr>
+            <a:r>
+              <a:rPr lang="en-US" sz="1000" dirty="0">
+                <a:solidFill>
+                  <a:srgbClr val="A3ABBD"/>
+                </a:solidFill>
+                <a:latin typeface="Segoe UI" pitchFamily="34" charset="0"/>
+                <a:ea typeface="Segoe UI" pitchFamily="34" charset="-122"/>
+                <a:cs typeface="Segoe UI" pitchFamily="34" charset="-120"/>
+              </a:rPr>
+              <a:t>04 · Business case</a:t>
+            </a:r>
+            <a:endParaRPr lang="en-US" sz="1000" dirty="0"/>
+          </a:p>
+        </p:txBody>
+      </p:sp>
+    </p:spTree>
+  </p:cSld>
+  <p:clrMapOvr>
+    <a:masterClrMapping/>
+  </p:clrMapOvr>
+</p:sld>
+</file>
+
+<file path=ppt/slides/slide5.xml><?xml version="1.0" encoding="utf-8"?>
+<p:sld xmlns:a="http://schemas.openxmlformats.org/drawingml/2006/main" xmlns:r="http://schemas.openxmlformats.org/officeDocument/2006/relationships" xmlns:p="http://schemas.openxmlformats.org/presentationml/2006/main">
+  <p:cSld name="Slide 5">
+    <p:bg>
+      <p:bgPr>
+        <a:solidFill>
+          <a:srgbClr val="14161C"/>
+        </a:solidFill>
+      </p:bgPr>
+    </p:bg>
+    <p:spTree>
+      <p:nvGrpSpPr>
+        <p:cNvPr id="1" name=""/>
+        <p:cNvGrpSpPr/>
+        <p:nvPr/>
+      </p:nvGrpSpPr>
+      <p:grpSpPr>
+        <a:xfrm>
+          <a:off x="0" y="0"/>
+          <a:ext cx="0" cy="0"/>
+          <a:chOff x="0" y="0"/>
+          <a:chExt cx="0" cy="0"/>
+        </a:xfrm>
+      </p:grpSpPr>
+      <p:sp>
+        <p:nvSpPr>
+          <p:cNvPr id="2" name="Shape 0"/>
+          <p:cNvSpPr/>
+          <p:nvPr/>
+        </p:nvSpPr>
+        <p:spPr>
+          <a:xfrm>
+            <a:off x="11002975" y="2377440"/>
+            <a:ext cx="3291840" cy="3291840"/>
+          </a:xfrm>
+          <a:prstGeom prst="ellipse">
+            <a:avLst/>
+          </a:prstGeom>
+          <a:solidFill>
+            <a:srgbClr val="FFC94D">
+              <a:alpha val="8000"/>
+            </a:srgbClr>
+          </a:solidFill>
+          <a:ln/>
+        </p:spPr>
+      </p:sp>
+      <p:sp>
+        <p:nvSpPr>
+          <p:cNvPr id="3" name="Shape 1"/>
+          <p:cNvSpPr/>
+          <p:nvPr/>
+        </p:nvSpPr>
+        <p:spPr>
+          <a:xfrm>
+            <a:off x="640080" y="502920"/>
+            <a:ext cx="1005840" cy="54864"/>
+          </a:xfrm>
+          <a:prstGeom prst="rect">
+            <a:avLst/>
+          </a:prstGeom>
+          <a:ln/>
+        </p:spPr>
+      </p:sp>
+      <p:sp>
+        <p:nvSpPr>
+          <p:cNvPr id="4" name="Text 2"/>
+          <p:cNvSpPr/>
+          <p:nvPr/>
+        </p:nvSpPr>
+        <p:spPr>
+          <a:xfrm>
+            <a:off x="640080" y="621792"/>
+            <a:ext cx="8534095" cy="777240"/>
+          </a:xfrm>
+          <a:prstGeom prst="rect">
+            <a:avLst/>
+          </a:prstGeom>
+          <a:noFill/>
+          <a:ln/>
+        </p:spPr>
+        <p:txBody>
+          <a:bodyPr wrap="square" rtlCol="0" anchor="ctr"/>
+          <a:lstStyle/>
+          <a:p>
+            <a:pPr indent="0" marL="0">
+              <a:buNone/>
+            </a:pPr>
+            <a:r>
+              <a:rPr lang="en-US" sz="2700" b="1" dirty="0">
+                <a:solidFill>
+                  <a:srgbClr val="F5F3EE"/>
+                </a:solidFill>
+                <a:latin typeface="Bahnschrift" pitchFamily="34" charset="0"/>
+                <a:ea typeface="Bahnschrift" pitchFamily="34" charset="-122"/>
+                <a:cs typeface="Bahnschrift" pitchFamily="34" charset="-120"/>
+              </a:rPr>
+              <a:t>Ce qu'on a déjà construit, et ce qu'on vous demande</a:t>
+            </a:r>
+            <a:endParaRPr lang="en-US" sz="2700" dirty="0"/>
+          </a:p>
+        </p:txBody>
+      </p:sp>
+      <p:sp>
+        <p:nvSpPr>
+          <p:cNvPr id="5" name="Text 3"/>
+          <p:cNvSpPr/>
+          <p:nvPr/>
+        </p:nvSpPr>
+        <p:spPr>
+          <a:xfrm>
+            <a:off x="9174175" y="640080"/>
+            <a:ext cx="2377440" cy="365760"/>
+          </a:xfrm>
+          <a:prstGeom prst="rect">
+            <a:avLst/>
+          </a:prstGeom>
+          <a:noFill/>
+          <a:ln/>
+        </p:spPr>
+        <p:txBody>
+          <a:bodyPr wrap="square" rtlCol="0" anchor="ctr"/>
+          <a:lstStyle/>
+          <a:p>
+            <a:pPr algn="r" indent="0" marL="0">
+              <a:buNone/>
+            </a:pPr>
+            <a:r>
+              <a:rPr lang="en-US" sz="1100" b="1" spc="100" kern="0" dirty="0">
+                <a:solidFill>
+                  <a:srgbClr val="A3ABBD"/>
+                </a:solidFill>
+                <a:latin typeface="Bahnschrift" pitchFamily="34" charset="0"/>
+                <a:ea typeface="Bahnschrift" pitchFamily="34" charset="-122"/>
+                <a:cs typeface="Bahnschrift" pitchFamily="34" charset="-120"/>
+              </a:rPr>
+              <a:t>CESTOMCLASH228</a:t>
+            </a:r>
+            <a:endParaRPr lang="en-US" sz="1100" dirty="0"/>
+          </a:p>
+        </p:txBody>
+      </p:sp>
+      <p:sp>
+        <p:nvSpPr>
+          <p:cNvPr id="6" name="Shape 4"/>
+          <p:cNvSpPr/>
+          <p:nvPr/>
+        </p:nvSpPr>
+        <p:spPr>
+          <a:xfrm>
+            <a:off x="640080" y="1965960"/>
+            <a:ext cx="10911535" cy="1783080"/>
+          </a:xfrm>
+          <a:prstGeom prst="roundRect">
+            <a:avLst>
+              <a:gd name="adj" fmla="val 3590"/>
+            </a:avLst>
+          </a:prstGeom>
+          <a:ln w="12700">
+            <a:solidFill>
+              <a:srgbClr val="3FE0FF">
+                <a:alpha val="70000"/>
+              </a:srgbClr>
+            </a:solidFill>
+            <a:prstDash val="solid"/>
+          </a:ln>
+          <a:effectLst>
+            <a:outerShdw sx="100000" sy="100000" kx="0" ky="0" algn="bl" rotWithShape="0" blurRad="101600" dist="50800" dir="16200000">
+              <a:srgbClr val="3FE0FF">
+                <a:alpha val="28000"/>
+              </a:srgbClr>
+            </a:outerShdw>
+          </a:effectLst>
+        </p:spPr>
+      </p:sp>
+      <p:sp>
+        <p:nvSpPr>
+          <p:cNvPr id="7" name="Shape 5"/>
+          <p:cNvSpPr/>
+          <p:nvPr/>
+        </p:nvSpPr>
+        <p:spPr>
+          <a:xfrm>
+            <a:off x="814822" y="1975104"/>
+            <a:ext cx="10562052" cy="18288"/>
+          </a:xfrm>
+          <a:prstGeom prst="rect">
+            <a:avLst/>
+          </a:prstGeom>
+          <a:solidFill>
+            <a:srgbClr val="3FE0FF">
+              <a:alpha val="65000"/>
+            </a:srgbClr>
+          </a:solidFill>
+          <a:ln/>
+        </p:spPr>
+      </p:sp>
+      <p:sp>
+        <p:nvSpPr>
+          <p:cNvPr id="8" name="Text 6"/>
+          <p:cNvSpPr/>
+          <p:nvPr/>
+        </p:nvSpPr>
+        <p:spPr>
+          <a:xfrm>
+            <a:off x="960120" y="2148840"/>
+            <a:ext cx="10271455" cy="1463040"/>
           </a:xfrm>
           <a:prstGeom prst="rect">
             <a:avLst/>
@@ -3923,15 +5607,15 @@
           <a:p>
             <a:pPr marL="342900" indent="-342900">
               <a:lnSpc>
-                <a:spcPct val="150000"/>
+                <a:spcPct val="145000"/>
               </a:lnSpc>
               <a:buSzPct val="100000"/>
               <a:buChar char="▸"/>
             </a:pPr>
             <a:r>
-              <a:rPr lang="en-US" sz="1400" dirty="0">
-                <a:solidFill>
-                  <a:srgbClr val="F4F1EC"/>
+              <a:rPr lang="en-US" sz="1300" dirty="0">
+                <a:solidFill>
+                  <a:srgbClr val="F5F3EE"/>
                 </a:solidFill>
                 <a:latin typeface="Segoe UI" pitchFamily="34" charset="0"/>
                 <a:ea typeface="Segoe UI" pitchFamily="34" charset="-122"/>
@@ -3939,41 +5623,41 @@
               </a:rPr>
               <a:t>Carte, demandes d'aide, authentification, gouvernance à 2 niveaux — code fonctionnel, testé (32/32 tests automatisés)</a:t>
             </a:r>
-            <a:endParaRPr lang="en-US" sz="1400" dirty="0"/>
+            <a:endParaRPr lang="en-US" sz="1300" dirty="0"/>
           </a:p>
           <a:p>
             <a:pPr marL="342900" indent="-342900">
               <a:lnSpc>
-                <a:spcPct val="150000"/>
+                <a:spcPct val="145000"/>
               </a:lnSpc>
               <a:buSzPct val="100000"/>
               <a:buChar char="▸"/>
             </a:pPr>
             <a:r>
-              <a:rPr lang="en-US" sz="1400" dirty="0">
-                <a:solidFill>
-                  <a:srgbClr val="F4F1EC"/>
+              <a:rPr lang="en-US" sz="1300" dirty="0">
+                <a:solidFill>
+                  <a:srgbClr val="F5F3EE"/>
                 </a:solidFill>
                 <a:latin typeface="Segoe UI" pitchFamily="34" charset="0"/>
                 <a:ea typeface="Segoe UI" pitchFamily="34" charset="-122"/>
                 <a:cs typeface="Segoe UI" pitchFamily="34" charset="-120"/>
               </a:rPr>
-              <a:t>3 directions visuelles explorées et maquettées — direction retenue le 2026-08-31</a:t>
-            </a:r>
-            <a:endParaRPr lang="en-US" sz="1400" dirty="0"/>
+              <a:t>Direction visuelle afro-futuriste retenue, 3 maquettes explorées (2026-08-31)</a:t>
+            </a:r>
+            <a:endParaRPr lang="en-US" sz="1300" dirty="0"/>
           </a:p>
           <a:p>
             <a:pPr marL="342900" indent="-342900">
               <a:lnSpc>
-                <a:spcPct val="150000"/>
+                <a:spcPct val="145000"/>
               </a:lnSpc>
               <a:buSzPct val="100000"/>
               <a:buChar char="▸"/>
             </a:pPr>
             <a:r>
-              <a:rPr lang="en-US" sz="1400" dirty="0">
-                <a:solidFill>
-                  <a:srgbClr val="F4F1EC"/>
+              <a:rPr lang="en-US" sz="1300" dirty="0">
+                <a:solidFill>
+                  <a:srgbClr val="F5F3EE"/>
                 </a:solidFill>
                 <a:latin typeface="Segoe UI" pitchFamily="34" charset="0"/>
                 <a:ea typeface="Segoe UI" pitchFamily="34" charset="-122"/>
@@ -3981,20 +5665,20 @@
               </a:rPr>
               <a:t>Sponsoring vérifié + notation en cours de développement, ciblés pour ce concours</a:t>
             </a:r>
-            <a:endParaRPr lang="en-US" sz="1400" dirty="0"/>
+            <a:endParaRPr lang="en-US" sz="1300" dirty="0"/>
           </a:p>
           <a:p>
             <a:pPr marL="342900" indent="-342900">
               <a:lnSpc>
-                <a:spcPct val="150000"/>
+                <a:spcPct val="145000"/>
               </a:lnSpc>
               <a:buSzPct val="100000"/>
               <a:buChar char="▸"/>
             </a:pPr>
             <a:r>
-              <a:rPr lang="en-US" sz="1400" dirty="0">
-                <a:solidFill>
-                  <a:srgbClr val="F4F1EC"/>
+              <a:rPr lang="en-US" sz="1300" dirty="0">
+                <a:solidFill>
+                  <a:srgbClr val="F5F3EE"/>
                 </a:solidFill>
                 <a:latin typeface="Segoe UI" pitchFamily="34" charset="0"/>
                 <a:ea typeface="Segoe UI" pitchFamily="34" charset="-122"/>
@@ -4002,47 +5686,75 @@
               </a:rPr>
               <a:t>Hébergement 100 % gratuit (aucune carte bancaire engagée) — marge protégée dès le 1er sponsor</a:t>
             </a:r>
-            <a:endParaRPr lang="en-US" sz="1400" dirty="0"/>
-          </a:p>
-        </p:txBody>
-      </p:sp>
-      <p:sp>
-        <p:nvSpPr>
-          <p:cNvPr id="7" name="Shape 5"/>
-          <p:cNvSpPr/>
-          <p:nvPr/>
-        </p:nvSpPr>
-        <p:spPr>
-          <a:xfrm>
-            <a:off x="640080" y="4297680"/>
-            <a:ext cx="10911535" cy="1371600"/>
+            <a:endParaRPr lang="en-US" sz="1300" dirty="0"/>
+          </a:p>
+        </p:txBody>
+      </p:sp>
+      <p:sp>
+        <p:nvSpPr>
+          <p:cNvPr id="9" name="Shape 7"/>
+          <p:cNvSpPr/>
+          <p:nvPr/>
+        </p:nvSpPr>
+        <p:spPr>
+          <a:xfrm>
+            <a:off x="640080" y="3977640"/>
+            <a:ext cx="10911535" cy="1143000"/>
           </a:xfrm>
           <a:prstGeom prst="roundRect">
             <a:avLst>
-              <a:gd name="adj" fmla="val 6667"/>
+              <a:gd name="adj" fmla="val 5600"/>
             </a:avLst>
           </a:prstGeom>
-          <a:solidFill>
-            <a:srgbClr val="242832"/>
-          </a:solidFill>
-          <a:ln w="19050">
+          <a:ln w="12700">
             <a:solidFill>
-              <a:srgbClr val="F2C14E"/>
+              <a:srgbClr val="FFC94D">
+                <a:alpha val="70000"/>
+              </a:srgbClr>
             </a:solidFill>
             <a:prstDash val="solid"/>
           </a:ln>
-        </p:spPr>
-      </p:sp>
-      <p:sp>
-        <p:nvSpPr>
-          <p:cNvPr id="8" name="Text 6"/>
-          <p:cNvSpPr/>
-          <p:nvPr/>
-        </p:nvSpPr>
-        <p:spPr>
-          <a:xfrm>
-            <a:off x="960120" y="4297680"/>
-            <a:ext cx="10271455" cy="1371600"/>
+          <a:effectLst>
+            <a:outerShdw sx="100000" sy="100000" kx="0" ky="0" algn="bl" rotWithShape="0" blurRad="101600" dist="50800" dir="16200000">
+              <a:srgbClr val="FFC94D">
+                <a:alpha val="28000"/>
+              </a:srgbClr>
+            </a:outerShdw>
+          </a:effectLst>
+        </p:spPr>
+      </p:sp>
+      <p:sp>
+        <p:nvSpPr>
+          <p:cNvPr id="10" name="Shape 8"/>
+          <p:cNvSpPr/>
+          <p:nvPr/>
+        </p:nvSpPr>
+        <p:spPr>
+          <a:xfrm>
+            <a:off x="752094" y="3986784"/>
+            <a:ext cx="10687507" cy="18288"/>
+          </a:xfrm>
+          <a:prstGeom prst="rect">
+            <a:avLst/>
+          </a:prstGeom>
+          <a:solidFill>
+            <a:srgbClr val="FFC94D">
+              <a:alpha val="65000"/>
+            </a:srgbClr>
+          </a:solidFill>
+          <a:ln/>
+        </p:spPr>
+      </p:sp>
+      <p:sp>
+        <p:nvSpPr>
+          <p:cNvPr id="11" name="Text 9"/>
+          <p:cNvSpPr/>
+          <p:nvPr/>
+        </p:nvSpPr>
+        <p:spPr>
+          <a:xfrm>
+            <a:off x="960120" y="3977640"/>
+            <a:ext cx="10271455" cy="1143000"/>
           </a:xfrm>
           <a:prstGeom prst="rect">
             <a:avLst/>
@@ -4063,7 +5775,7 @@
             <a:r>
               <a:rPr lang="en-US" sz="1300" b="1" dirty="0">
                 <a:solidFill>
-                  <a:srgbClr val="F2C14E"/>
+                  <a:srgbClr val="FFC94D"/>
                 </a:solidFill>
                 <a:latin typeface="Segoe UI" pitchFamily="34" charset="0"/>
                 <a:ea typeface="Segoe UI" pitchFamily="34" charset="-122"/>
@@ -4080,7 +5792,7 @@
             <a:r>
               <a:rPr lang="en-US" sz="1300" i="1" dirty="0">
                 <a:solidFill>
-                  <a:srgbClr val="9CA3AF"/>
+                  <a:srgbClr val="A3ABBD"/>
                 </a:solidFill>
                 <a:latin typeface="Segoe UI" pitchFamily="34" charset="0"/>
                 <a:ea typeface="Segoe UI" pitchFamily="34" charset="-122"/>
@@ -4094,7 +5806,46 @@
       </p:sp>
       <p:sp>
         <p:nvSpPr>
-          <p:cNvPr id="9" name="Text 7"/>
+          <p:cNvPr id="12" name="Text 10"/>
+          <p:cNvSpPr/>
+          <p:nvPr/>
+        </p:nvSpPr>
+        <p:spPr>
+          <a:xfrm>
+            <a:off x="0" y="5349240"/>
+            <a:ext cx="12191695" cy="365760"/>
+          </a:xfrm>
+          <a:prstGeom prst="rect">
+            <a:avLst/>
+          </a:prstGeom>
+          <a:noFill/>
+          <a:ln/>
+        </p:spPr>
+        <p:txBody>
+          <a:bodyPr wrap="square" rtlCol="0" anchor="ctr"/>
+          <a:lstStyle/>
+          <a:p>
+            <a:pPr algn="ctr" indent="0" marL="0">
+              <a:buNone/>
+            </a:pPr>
+            <a:r>
+              <a:rPr lang="en-US" sz="1500" b="1" spc="100" kern="0" dirty="0">
+                <a:solidFill>
+                  <a:srgbClr val="3FE0FF"/>
+                </a:solidFill>
+                <a:latin typeface="Bahnschrift" pitchFamily="34" charset="0"/>
+                <a:ea typeface="Bahnschrift" pitchFamily="34" charset="-122"/>
+                <a:cs typeface="Bahnschrift" pitchFamily="34" charset="-120"/>
+              </a:rPr>
+              <a:t>Explore. Partage. Level-up.</a:t>
+            </a:r>
+            <a:endParaRPr lang="en-US" sz="1500" dirty="0"/>
+          </a:p>
+        </p:txBody>
+      </p:sp>
+      <p:sp>
+        <p:nvSpPr>
+          <p:cNvPr id="13" name="Text 11"/>
           <p:cNvSpPr/>
           <p:nvPr/>
         </p:nvSpPr>
@@ -4113,13 +5864,13 @@
           <a:bodyPr wrap="square" rtlCol="0" anchor="ctr"/>
           <a:lstStyle/>
           <a:p>
-            <a:pPr indent="0" marL="0">
+            <a:pPr algn="ctr" indent="0" marL="0">
               <a:buNone/>
             </a:pPr>
             <a:r>
               <a:rPr lang="en-US" sz="1100" dirty="0">
                 <a:solidFill>
-                  <a:srgbClr val="7DD3E0"/>
+                  <a:srgbClr val="A3ABBD"/>
                 </a:solidFill>
                 <a:latin typeface="Segoe UI" pitchFamily="34" charset="0"/>
                 <a:ea typeface="Segoe UI" pitchFamily="34" charset="-122"/>
@@ -4133,7 +5884,7 @@
       </p:sp>
       <p:sp>
         <p:nvSpPr>
-          <p:cNvPr id="10" name="Text 8"/>
+          <p:cNvPr id="14" name="Text 12"/>
           <p:cNvSpPr/>
           <p:nvPr/>
         </p:nvSpPr>
@@ -4158,7 +5909,7 @@
             <a:r>
               <a:rPr lang="en-US" sz="1000" b="1" spc="100" kern="0" dirty="0">
                 <a:solidFill>
-                  <a:srgbClr val="9CA3AF"/>
+                  <a:srgbClr val="A3ABBD"/>
                 </a:solidFill>
                 <a:latin typeface="Bahnschrift" pitchFamily="34" charset="0"/>
                 <a:ea typeface="Bahnschrift" pitchFamily="34" charset="-122"/>
@@ -4172,7 +5923,7 @@
             <a:r>
               <a:rPr lang="en-US" sz="1000" spc="100" kern="0" dirty="0">
                 <a:solidFill>
-                  <a:srgbClr val="9CA3AF"/>
+                  <a:srgbClr val="A3ABBD"/>
                 </a:solidFill>
                 <a:latin typeface="Bahnschrift" pitchFamily="34" charset="0"/>
                 <a:ea typeface="Bahnschrift" pitchFamily="34" charset="-122"/>
@@ -4186,7 +5937,7 @@
       </p:sp>
       <p:sp>
         <p:nvSpPr>
-          <p:cNvPr id="11" name="Text 9"/>
+          <p:cNvPr id="15" name="Text 13"/>
           <p:cNvSpPr/>
           <p:nvPr/>
         </p:nvSpPr>
@@ -4211,13 +5962,13 @@
             <a:r>
               <a:rPr lang="en-US" sz="1000" dirty="0">
                 <a:solidFill>
-                  <a:srgbClr val="9CA3AF"/>
+                  <a:srgbClr val="A3ABBD"/>
                 </a:solidFill>
                 <a:latin typeface="Segoe UI" pitchFamily="34" charset="0"/>
                 <a:ea typeface="Segoe UI" pitchFamily="34" charset="-122"/>
                 <a:cs typeface="Segoe UI" pitchFamily="34" charset="-120"/>
               </a:rPr>
-              <a:t>04 · Traction &amp; demande</a:t>
+              <a:t>05 · Conclusion</a:t>
             </a:r>
             <a:endParaRPr lang="en-US" sz="1000" dirty="0"/>
           </a:p>

--- a/pitch/CestomClash228-Pitch.pptx
+++ b/pitch/CestomClash228-Pitch.pptx
@@ -5621,7 +5621,7 @@
                 <a:ea typeface="Segoe UI" pitchFamily="34" charset="-122"/>
                 <a:cs typeface="Segoe UI" pitchFamily="34" charset="-120"/>
               </a:rPr>
-              <a:t>Carte, demandes d'aide, authentification, gouvernance à 2 niveaux — code fonctionnel, testé (32/32 tests automatisés)</a:t>
+              <a:t>Carte, demandes d'aide, authentification, gouvernance à 2 niveaux — code fonctionnel, testé (59/59 tests automatisés)</a:t>
             </a:r>
             <a:endParaRPr lang="en-US" sz="1300" dirty="0"/>
           </a:p>
@@ -5642,7 +5642,7 @@
                 <a:ea typeface="Segoe UI" pitchFamily="34" charset="-122"/>
                 <a:cs typeface="Segoe UI" pitchFamily="34" charset="-120"/>
               </a:rPr>
-              <a:t>Direction visuelle afro-futuriste retenue, 3 maquettes explorées (2026-08-31)</a:t>
+              <a:t>Direction visuelle afro-futuriste appliquée au produit réel (palette, écran d'accueil)</a:t>
             </a:r>
             <a:endParaRPr lang="en-US" sz="1300" dirty="0"/>
           </a:p>
@@ -5663,7 +5663,7 @@
                 <a:ea typeface="Segoe UI" pitchFamily="34" charset="-122"/>
                 <a:cs typeface="Segoe UI" pitchFamily="34" charset="-120"/>
               </a:rPr>
-              <a:t>Sponsoring vérifié + notation en cours de développement, ciblés pour ce concours</a:t>
+              <a:t>Sponsoring vérifié + notation : construits, testés bout-en-bout, audités avant mise en ligne</a:t>
             </a:r>
             <a:endParaRPr lang="en-US" sz="1300" dirty="0"/>
           </a:p>
@@ -5798,7 +5798,7 @@
                 <a:ea typeface="Segoe UI" pitchFamily="34" charset="-122"/>
                 <a:cs typeface="Segoe UI" pitchFamily="34" charset="-120"/>
               </a:rPr>
-              <a:t>[À compléter avec le porteur de projet — modalités exactes du concours CréaAfrica non connues : financement, mentorat, mise en réseau]</a:t>
+              <a:t>De la visibilité — l'exposition du concours suffit à amorcer la traction. Le reste suivra naturellement.</a:t>
             </a:r>
             <a:endParaRPr lang="en-US" sz="1300" dirty="0"/>
           </a:p>
